--- a/site/showcase/exports/infographic.pptx
+++ b/site/showcase/exports/infographic.pptx
@@ -637,12 +637,12 @@
           </a:p>
           <a:p>
             <a:r>
-              <a:t>Provider summary | Worst of 4 frames (figure p15): synthetic likelihood 28/100; tells: clean vector typography, standard geometric graphic design elements, absence of diffusion generation artifacts</a:t>
-            </a:r>
-          </a:p>
-          <a:p>
-            <a:r>
-              <a:t>Evidence 1 | Frame figure p1: 25/100</a:t>
+              <a:t>Provider summary | Worst of 4 frames (figure p15): synthetic likelihood 30/100; tells: sharp vector-style geometric graphics, clean digital typography, standard graphic design layout artifacts</a:t>
+            </a:r>
+          </a:p>
+          <a:p>
+            <a:r>
+              <a:t>Evidence 1 | Frame figure p1: 28/100</a:t>
             </a:r>
           </a:p>
           <a:p>
@@ -657,27 +657,27 @@
           </a:p>
           <a:p>
             <a:r>
-              <a:t>Evidence 4 | Frame figure p15: 28/100</a:t>
-            </a:r>
-          </a:p>
-          <a:p>
-            <a:r>
-              <a:t>Evidence 5 | Clean vector typography</a:t>
-            </a:r>
-          </a:p>
-          <a:p>
-            <a:r>
-              <a:t>Evidence 6 | Standard geometric graphic design elements</a:t>
-            </a:r>
-          </a:p>
-          <a:p>
-            <a:r>
-              <a:t>Evidence 7 | Absence of diffusion generation artifacts</a:t>
-            </a:r>
-          </a:p>
-          <a:p>
-            <a:r>
-              <a:t>Evidence 8 | Caveat: Standard presentation slide with digital vector art; non-photographic graphics make AI detection inconclusive.</a:t>
+              <a:t>Evidence 4 | Frame figure p15: 30/100</a:t>
+            </a:r>
+          </a:p>
+          <a:p>
+            <a:r>
+              <a:t>Evidence 5 | Sharp vector-style geometric graphics</a:t>
+            </a:r>
+          </a:p>
+          <a:p>
+            <a:r>
+              <a:t>Evidence 6 | Clean digital typography</a:t>
+            </a:r>
+          </a:p>
+          <a:p>
+            <a:r>
+              <a:t>Evidence 7 | Standard graphic design layout artifacts</a:t>
+            </a:r>
+          </a:p>
+          <a:p>
+            <a:r>
+              <a:t>Evidence 8 | Caveat: Standard presentation slide graphics can be synthesized or edited via automated tools.</a:t>
             </a:r>
           </a:p>
         </p:txBody>
@@ -1077,7 +1077,7 @@
           </a:p>
           <a:p>
             <a:r>
-              <a:t>Evidence 6 | ELA mean 0.4, peak 23 (uniform high ELA can indicate generation/heavy edit).</a:t>
+              <a:t>Evidence 6 | ELA mean 0.4, peak 21 (uniform high ELA can indicate generation/heavy edit).</a:t>
             </a:r>
           </a:p>
           <a:p>
@@ -1087,7 +1087,7 @@
           </a:p>
           <a:p>
             <a:r>
-              <a:t>Evidence 8 | Spectral peakiness 19.47 (periodic frequency peaks can mark generated textures).</a:t>
+              <a:t>Evidence 8 | Spectral peakiness 19.49 (periodic frequency peaks can mark generated textures).</a:t>
             </a:r>
           </a:p>
         </p:txBody>
@@ -1227,7 +1227,7 @@
           </a:p>
           <a:p>
             <a:r>
-              <a:t>Evidence 6 | ELA mean 0.4, peak 23 (uniform high ELA can indicate generation/heavy edit).</a:t>
+              <a:t>Evidence 6 | ELA mean 0.4, peak 21 (uniform high ELA can indicate generation/heavy edit).</a:t>
             </a:r>
           </a:p>
           <a:p>
@@ -1237,7 +1237,7 @@
           </a:p>
           <a:p>
             <a:r>
-              <a:t>Evidence 8 | Spectral peakiness 19.47 (periodic frequency peaks can mark generated textures).</a:t>
+              <a:t>Evidence 8 | Spectral peakiness 19.49 (periodic frequency peaks can mark generated textures).</a:t>
             </a:r>
           </a:p>
         </p:txBody>
@@ -1317,7 +1317,7 @@
           </a:p>
           <a:p>
             <a:r>
-              <a:t>figure p1 | authentic likely | 25</a:t>
+              <a:t>figure p1 | inconclusive | 28</a:t>
             </a:r>
           </a:p>
           <a:p>
@@ -1327,12 +1327,12 @@
           </a:p>
           <a:p>
             <a:r>
-              <a:t>figure p10 | authentic likely | 25</a:t>
-            </a:r>
-          </a:p>
-          <a:p>
-            <a:r>
-              <a:t>figure p15 | inconclusive | 28</a:t>
+              <a:t>figure p10 | inconclusive | 25</a:t>
+            </a:r>
+          </a:p>
+          <a:p>
+            <a:r>
+              <a:t>figure p15 | inconclusive | 30</a:t>
             </a:r>
           </a:p>
         </p:txBody>
@@ -1492,17 +1492,17 @@
           </a:p>
           <a:p>
             <a:r>
-              <a:t>Claude Vision | Worst of 4 frames (figure p15): synthetic likelihood 55/100; tells: no camera-photo content; digitally rendered slide graphic, so photographic forensics (grain, lens blur, lighting) do not apply, irregular, non-geometric low-poly line networks with inconsistent node joins and fading, typical of AI image-generator decorative motifs, red-to-green left/right mirrored decoration with loosely matched structure, heavy bold text with slightly soft drop-shadow/halo edges on headline</a:t>
-            </a:r>
-          </a:p>
-          <a:p>
-            <a:r>
-              <a:t>OpenAI Vision | Worst of 4 frames (figure p6): synthetic likelihood 15/100; tells: Consistent, legible typography throughout both columns, Regular rounded panels and aligned borders characteristic of conventional slide design, No obvious malformed lettering or incoherent graphic elements, Entire image is a text infographic, with no photographic detail to assess</a:t>
-            </a:r>
-          </a:p>
-          <a:p>
-            <a:r>
-              <a:t>Gemini Vision | Worst of 4 frames (figure p15): synthetic likelihood 28/100; tells: clean vector typography, standard geometric graphic design elements, absence of diffusion generation artifacts</a:t>
+              <a:t>Claude Vision | Worst of 4 frames (figure p15): synthetic likelihood 62/100; tells: not a camera photo: flat digital graphic/slide, so photographic forensics (sensor noise, lens blur, lighting) do not apply, inconsistent centering of body text lines, with ragged, uneven offsets unlike typical layout-software alignment, polygonal network line-art with segments that end in mid-air, fade unevenly, and break into stray dashed fragments on the left, faint mottled texture in the flat background, atypical of vector-exported slides</a:t>
+            </a:r>
+          </a:p>
+          <a:p>
+            <a:r>
+              <a:t>OpenAI Vision | Worst of 4 frames (figure p6): synthetic likelihood 15/100; tells: Legible, coherent text with consistent repeated letterforms., Regular two-column layout with aligned rounded panels., Consistent bold labels and uniform bullet styling., No photographic base or identifiable inpainting boundaries.</a:t>
+            </a:r>
+          </a:p>
+          <a:p>
+            <a:r>
+              <a:t>Gemini Vision | Worst of 4 frames (figure p15): synthetic likelihood 30/100; tells: sharp vector-style geometric graphics, clean digital typography, standard graphic design layout artifacts</a:t>
             </a:r>
           </a:p>
           <a:p>
@@ -1672,7 +1672,7 @@
           </a:p>
           <a:p>
             <a:r>
-              <a:t>1. frame_agreement | frames=4; synthetic_frames=0; authentic_frames=2; rating_spread=3</a:t>
+              <a:t>1. frame_agreement | frames=4; synthetic_frames=0; authentic_frames=0; rating_spread=5</a:t>
             </a:r>
           </a:p>
           <a:p>
@@ -1772,7 +1772,7 @@
           </a:p>
           <a:p>
             <a:r>
-              <a:t>Indicative rating | 26/100</a:t>
+              <a:t>Indicative rating | 27/100</a:t>
             </a:r>
           </a:p>
           <a:p>
@@ -1877,12 +1877,12 @@
           </a:p>
           <a:p>
             <a:r>
-              <a:t>Analysis ID | 279c5518-74f1-42db-a265-19a0d0fcb0bc</a:t>
-            </a:r>
-          </a:p>
-          <a:p>
-            <a:r>
-              <a:t>Generated | 2026-09-26T17:54:48+00:00</a:t>
+              <a:t>Analysis ID | f46ae041-994d-44fa-997c-8e6f23dcff90</a:t>
+            </a:r>
+          </a:p>
+          <a:p>
+            <a:r>
+              <a:t>Generated | 2026-09-26T22:31:05+00:00</a:t>
             </a:r>
           </a:p>
           <a:p>
@@ -1897,7 +1897,7 @@
           </a:p>
           <a:p>
             <a:r>
-              <a:t>Method version | verdict-consistency-2026-09-26.1</a:t>
+              <a:t>Method version | pdf-preparation-2026-09-26.1</a:t>
             </a:r>
           </a:p>
           <a:p>
@@ -1912,27 +1912,27 @@
           </a:p>
           <a:p>
             <a:r>
-              <a:t>Ingestion note 1 | Extracted 4 embedded figure(s) of 15 found (figure mode).</a:t>
-            </a:r>
-          </a:p>
-          <a:p>
-            <a:r>
-              <a:t>Ingestion note 2 | No selectable text layer - vision models read the page/figure images.</a:t>
-            </a:r>
-          </a:p>
-          <a:p>
-            <a:r>
-              <a:t>Ingestion note 3 | Recomputed locally from the same saved provider replies acquired under run five-examples-20260926-r1. No new provider requests. Original report 67783866-5136-47c8-95ce-ff7e7f37c6d3 was generated at 2026-09-26T17:38:42+00:00 under method publication-repair-2026-09-24.3; that report is preserved.</a:t>
-            </a:r>
-          </a:p>
-          <a:p>
-            <a:r>
-              <a:t>Ingestion note 4 | Method verdict-consistency-2026-09-26.1: directional model votes require matching explicit verdicts and rating thresholds. Inconclusive replies retain their ratings and remain undecided observations.</a:t>
-            </a:r>
-          </a:p>
-          <a:p>
-            <a:r>
-              <a:t>Ingestion note 5 | Presentation copy of saved report aac43583-5a80-4042-988f-028d0b7bfae8. The descriptive filename replaces the earlier example ID for navigation. Original analysis dates, provider replies, scores and acquisition context are retained; no new model analysis.</a:t>
+              <a:t>Ingestion note 1 | PDF preparation: pdf-input-2026-09-26.1 (pypdf text/figures; PDFium page rendering).</a:t>
+            </a:r>
+          </a:p>
+          <a:p>
+            <a:r>
+              <a:t>Ingestion note 2 | Extracted 4 embedded figure(s) of 15 found (figure mode).</a:t>
+            </a:r>
+          </a:p>
+          <a:p>
+            <a:r>
+              <a:t>Ingestion note 3 | No selectable text layer - vision models read the page/figure images.</a:t>
+            </a:r>
+          </a:p>
+          <a:p>
+            <a:r>
+              <a:t>Ingestion note 4 | Fresh provider replies acquired for eleven-examples-refresh-20260926-r1; report assembled locally from the saved responses without further API calls.</a:t>
+            </a:r>
+          </a:p>
+          <a:p>
+            <a:r>
+              <a:t>Ingestion note 5 | Provider latency values are restored from the acquisition receipts (maximum sampled-frame latency per provider); raw replies and assessment results are unchanged by this bookkeeping step.</a:t>
             </a:r>
           </a:p>
         </p:txBody>
@@ -2017,12 +2017,12 @@
           </a:p>
           <a:p>
             <a:r>
-              <a:t>Analysis ID | 279c5518-74f1-42db-a265-19a0d0fcb0bc</a:t>
-            </a:r>
-          </a:p>
-          <a:p>
-            <a:r>
-              <a:t>Generated | 2026-09-26T17:54:48+00:00</a:t>
+              <a:t>Analysis ID | f46ae041-994d-44fa-997c-8e6f23dcff90</a:t>
+            </a:r>
+          </a:p>
+          <a:p>
+            <a:r>
+              <a:t>Generated | 2026-09-26T22:31:05+00:00</a:t>
             </a:r>
           </a:p>
           <a:p>
@@ -2037,7 +2037,7 @@
           </a:p>
           <a:p>
             <a:r>
-              <a:t>Method version | verdict-consistency-2026-09-26.1</a:t>
+              <a:t>Method version | pdf-preparation-2026-09-26.1</a:t>
             </a:r>
           </a:p>
           <a:p>
@@ -2052,27 +2052,27 @@
           </a:p>
           <a:p>
             <a:r>
-              <a:t>Ingestion note 1 | Extracted 4 embedded figure(s) of 15 found (figure mode).</a:t>
-            </a:r>
-          </a:p>
-          <a:p>
-            <a:r>
-              <a:t>Ingestion note 2 | No selectable text layer - vision models read the page/figure images.</a:t>
-            </a:r>
-          </a:p>
-          <a:p>
-            <a:r>
-              <a:t>Ingestion note 3 | Recomputed locally from the same saved provider replies acquired under run five-examples-20260926-r1. No new provider requests. Original report 67783866-5136-47c8-95ce-ff7e7f37c6d3 was generated at 2026-09-26T17:38:42+00:00 under method publication-repair-2026-09-24.3; that report is preserved.</a:t>
-            </a:r>
-          </a:p>
-          <a:p>
-            <a:r>
-              <a:t>Ingestion note 4 | Method verdict-consistency-2026-09-26.1: directional model votes require matching explicit verdicts and rating thresholds. Inconclusive replies retain their ratings and remain undecided observations.</a:t>
-            </a:r>
-          </a:p>
-          <a:p>
-            <a:r>
-              <a:t>Ingestion note 5 | Presentation copy of saved report aac43583-5a80-4042-988f-028d0b7bfae8. The descriptive filename replaces the earlier example ID for navigation. Original analysis dates, provider replies, scores and acquisition context are retained; no new model analysis.</a:t>
+              <a:t>Ingestion note 1 | PDF preparation: pdf-input-2026-09-26.1 (pypdf text/figures; PDFium page rendering).</a:t>
+            </a:r>
+          </a:p>
+          <a:p>
+            <a:r>
+              <a:t>Ingestion note 2 | Extracted 4 embedded figure(s) of 15 found (figure mode).</a:t>
+            </a:r>
+          </a:p>
+          <a:p>
+            <a:r>
+              <a:t>Ingestion note 3 | No selectable text layer - vision models read the page/figure images.</a:t>
+            </a:r>
+          </a:p>
+          <a:p>
+            <a:r>
+              <a:t>Ingestion note 4 | Fresh provider replies acquired for eleven-examples-refresh-20260926-r1; report assembled locally from the saved responses without further API calls.</a:t>
+            </a:r>
+          </a:p>
+          <a:p>
+            <a:r>
+              <a:t>Ingestion note 5 | Provider latency values are restored from the acquisition receipts (maximum sampled-frame latency per provider); raw replies and assessment results are unchanged by this bookkeeping step.</a:t>
             </a:r>
           </a:p>
         </p:txBody>
@@ -2152,7 +2152,7 @@
           </a:p>
           <a:p>
             <a:r>
-              <a:t>Claude Vision | vision / ok | inconclusive | 55/100</a:t>
+              <a:t>Claude Vision | vision / ok | synthetic likely | 62/100</a:t>
             </a:r>
           </a:p>
           <a:p>
@@ -2162,7 +2162,7 @@
           </a:p>
           <a:p>
             <a:r>
-              <a:t>Gemini Vision | vision / ok | authentic likely | 28/100</a:t>
+              <a:t>Gemini Vision | vision / ok | authentic likely | 30/100</a:t>
             </a:r>
           </a:p>
           <a:p>
@@ -2267,7 +2267,7 @@
           </a:p>
           <a:p>
             <a:r>
-              <a:t>Assessment | inconclusive</a:t>
+              <a:t>Assessment | synthetic likely</a:t>
             </a:r>
           </a:p>
           <a:p>
@@ -2282,67 +2282,67 @@
           </a:p>
           <a:p>
             <a:r>
-              <a:t>Provider summary | Worst of 4 frames (figure p15): synthetic likelihood 55/100; tells: no camera-photo content; digitally rendered slide graphic, so photographic forensics (grain, lens blur, lighting) do not apply, irregular, non-geometric low-poly line networks with inconsistent node joins and fading, typical of AI image-generator decorative motifs, red-to-green left/right mirrored decoration with loosely matched structure, heavy bold text with slightly soft drop-shadow/halo edges on headline</a:t>
-            </a:r>
-          </a:p>
-          <a:p>
-            <a:r>
-              <a:t>Evidence 1 | Frame figure p1: 45/100</a:t>
-            </a:r>
-          </a:p>
-          <a:p>
-            <a:r>
-              <a:t>Evidence 2 | Frame figure p6: 40/100</a:t>
-            </a:r>
-          </a:p>
-          <a:p>
-            <a:r>
-              <a:t>Evidence 3 | Frame figure p10: 35/100</a:t>
-            </a:r>
-          </a:p>
-          <a:p>
-            <a:r>
-              <a:t>Evidence 4 | Frame figure p15: 55/100</a:t>
-            </a:r>
-          </a:p>
-          <a:p>
-            <a:r>
-              <a:t>Evidence 5 | No camera-photo content; digitally rendered slide graphic, so photographic forensics (grain, lens blur, lighting) do not apply</a:t>
-            </a:r>
-          </a:p>
-          <a:p>
-            <a:r>
-              <a:t>Evidence 6 | Irregular, non-geometric low-poly line networks with inconsistent node joins and fading, typical of AI image-generator decorative motifs</a:t>
-            </a:r>
-          </a:p>
-          <a:p>
-            <a:r>
-              <a:t>Evidence 7 | Red-to-green left/right mirrored decoration with loosely matched structure</a:t>
-            </a:r>
-          </a:p>
-          <a:p>
-            <a:r>
-              <a:t>Evidence 8 | Heavy bold text with slightly soft drop-shadow/halo edges on headline</a:t>
-            </a:r>
-          </a:p>
-          <a:p>
-            <a:r>
-              <a:t>Evidence 9 | Slightly uneven centred line breaks in body text</a:t>
-            </a:r>
-          </a:p>
-          <a:p>
-            <a:r>
-              <a:t>Evidence 10 | All text is correctly spelled and coherent, which is consistent with either modern text-capable generators or conventional slide software</a:t>
-            </a:r>
-          </a:p>
-          <a:p>
-            <a:r>
-              <a:t>Evidence 11 | Faint mottled background texture rather than flat vector fill</a:t>
-            </a:r>
-          </a:p>
-          <a:p>
-            <a:r>
-              <a:t>Evidence 12 | Caveat: This is a text-and-graphic slide, likely extracted from a PDF, not a photograph. Slides made in presentation software and slides from text-capable AI image generators can look alike. The irregular network motifs and soft rendering suggest possible AI generation, but they are not decisive. A human should check the source PDF's metadata, fonts and vector layers, and the authoring tool.</a:t>
+              <a:t>Provider summary | Worst of 4 frames (figure p15): synthetic likelihood 62/100; tells: not a camera photo: flat digital graphic/slide, so photographic forensics (sensor noise, lens blur, lighting) do not apply, inconsistent centering of body text lines, with ragged, uneven offsets unlike typical layout-software alignment, polygonal network line-art with segments that end in mid-air, fade unevenly, and break into stray dashed fragments on the left, faint mottled texture in the flat background, atypical of vector-exported slides</a:t>
+            </a:r>
+          </a:p>
+          <a:p>
+            <a:r>
+              <a:t>Evidence 1 | Frame figure p1: 40/100</a:t>
+            </a:r>
+          </a:p>
+          <a:p>
+            <a:r>
+              <a:t>Evidence 2 | Frame figure p6: 45/100</a:t>
+            </a:r>
+          </a:p>
+          <a:p>
+            <a:r>
+              <a:t>Evidence 3 | Frame figure p10: 45/100</a:t>
+            </a:r>
+          </a:p>
+          <a:p>
+            <a:r>
+              <a:t>Evidence 4 | Frame figure p15: 62/100</a:t>
+            </a:r>
+          </a:p>
+          <a:p>
+            <a:r>
+              <a:t>Evidence 5 | Not a camera photo: flat digital graphic/slide, so photographic forensics (sensor noise, lens blur, lighting) do not apply</a:t>
+            </a:r>
+          </a:p>
+          <a:p>
+            <a:r>
+              <a:t>Evidence 6 | Inconsistent centering of body text lines, with ragged, uneven offsets unlike typical layout-software alignment</a:t>
+            </a:r>
+          </a:p>
+          <a:p>
+            <a:r>
+              <a:t>Evidence 7 | Polygonal network line-art with segments that end in mid-air, fade unevenly, and break into stray dashed fragments on the left</a:t>
+            </a:r>
+          </a:p>
+          <a:p>
+            <a:r>
+              <a:t>Evidence 8 | Faint mottled texture in the flat background, atypical of vector-exported slides</a:t>
+            </a:r>
+          </a:p>
+          <a:p>
+            <a:r>
+              <a:t>Evidence 9 | 1376x768 dimensions, which match a common native output size of some current image generators</a:t>
+            </a:r>
+          </a:p>
+          <a:p>
+            <a:r>
+              <a:t>Evidence 10 | Heavy soft drop shadow on the headline, a stylistic pattern common in generated slide imagery</a:t>
+            </a:r>
+          </a:p>
+          <a:p>
+            <a:r>
+              <a:t>Evidence 11 | Text is fully legible and correctly spelled, which weighs against older generators but not modern text-capable models</a:t>
+            </a:r>
+          </a:p>
+          <a:p>
+            <a:r>
+              <a:t>Evidence 12 | Caveat: Designed graphics from a PDF can be produced by ordinary layout tools or by modern text-capable generators and look nearly identical. The layout irregularities and image dimensions are suggestive only, so check the source PDF metadata, its creation tool, and any C2PA/provenance data.</a:t>
             </a:r>
           </a:p>
         </p:txBody>
@@ -2437,7 +2437,7 @@
           </a:p>
           <a:p>
             <a:r>
-              <a:t>Assessment | inconclusive</a:t>
+              <a:t>Assessment | synthetic likely</a:t>
             </a:r>
           </a:p>
           <a:p>
@@ -2452,67 +2452,67 @@
           </a:p>
           <a:p>
             <a:r>
-              <a:t>Provider summary | Worst of 4 frames (figure p15): synthetic likelihood 55/100; tells: no camera-photo content; digitally rendered slide graphic, so photographic forensics (grain, lens blur, lighting) do not apply, irregular, non-geometric low-poly line networks with inconsistent node joins and fading, typical of AI image-generator decorative motifs, red-to-green left/right mirrored decoration with loosely matched structure, heavy bold text with slightly soft drop-shadow/halo edges on headline</a:t>
-            </a:r>
-          </a:p>
-          <a:p>
-            <a:r>
-              <a:t>Evidence 1 | Frame figure p1: 45/100</a:t>
-            </a:r>
-          </a:p>
-          <a:p>
-            <a:r>
-              <a:t>Evidence 2 | Frame figure p6: 40/100</a:t>
-            </a:r>
-          </a:p>
-          <a:p>
-            <a:r>
-              <a:t>Evidence 3 | Frame figure p10: 35/100</a:t>
-            </a:r>
-          </a:p>
-          <a:p>
-            <a:r>
-              <a:t>Evidence 4 | Frame figure p15: 55/100</a:t>
-            </a:r>
-          </a:p>
-          <a:p>
-            <a:r>
-              <a:t>Evidence 5 | No camera-photo content; digitally rendered slide graphic, so photographic forensics (grain, lens blur, lighting) do not apply</a:t>
-            </a:r>
-          </a:p>
-          <a:p>
-            <a:r>
-              <a:t>Evidence 6 | Irregular, non-geometric low-poly line networks with inconsistent node joins and fading, typical of AI image-generator decorative motifs</a:t>
-            </a:r>
-          </a:p>
-          <a:p>
-            <a:r>
-              <a:t>Evidence 7 | Red-to-green left/right mirrored decoration with loosely matched structure</a:t>
-            </a:r>
-          </a:p>
-          <a:p>
-            <a:r>
-              <a:t>Evidence 8 | Heavy bold text with slightly soft drop-shadow/halo edges on headline</a:t>
-            </a:r>
-          </a:p>
-          <a:p>
-            <a:r>
-              <a:t>Evidence 9 | Slightly uneven centred line breaks in body text</a:t>
-            </a:r>
-          </a:p>
-          <a:p>
-            <a:r>
-              <a:t>Evidence 10 | All text is correctly spelled and coherent, which is consistent with either modern text-capable generators or conventional slide software</a:t>
-            </a:r>
-          </a:p>
-          <a:p>
-            <a:r>
-              <a:t>Evidence 11 | Faint mottled background texture rather than flat vector fill</a:t>
-            </a:r>
-          </a:p>
-          <a:p>
-            <a:r>
-              <a:t>Evidence 12 | Caveat: This is a text-and-graphic slide, likely extracted from a PDF, not a photograph. Slides made in presentation software and slides from text-capable AI image generators can look alike. The irregular network motifs and soft rendering suggest possible AI generation, but they are not decisive. A human should check the source PDF's metadata, fonts and vector layers, and the authoring tool.</a:t>
+              <a:t>Provider summary | Worst of 4 frames (figure p15): synthetic likelihood 62/100; tells: not a camera photo: flat digital graphic/slide, so photographic forensics (sensor noise, lens blur, lighting) do not apply, inconsistent centering of body text lines, with ragged, uneven offsets unlike typical layout-software alignment, polygonal network line-art with segments that end in mid-air, fade unevenly, and break into stray dashed fragments on the left, faint mottled texture in the flat background, atypical of vector-exported slides</a:t>
+            </a:r>
+          </a:p>
+          <a:p>
+            <a:r>
+              <a:t>Evidence 1 | Frame figure p1: 40/100</a:t>
+            </a:r>
+          </a:p>
+          <a:p>
+            <a:r>
+              <a:t>Evidence 2 | Frame figure p6: 45/100</a:t>
+            </a:r>
+          </a:p>
+          <a:p>
+            <a:r>
+              <a:t>Evidence 3 | Frame figure p10: 45/100</a:t>
+            </a:r>
+          </a:p>
+          <a:p>
+            <a:r>
+              <a:t>Evidence 4 | Frame figure p15: 62/100</a:t>
+            </a:r>
+          </a:p>
+          <a:p>
+            <a:r>
+              <a:t>Evidence 5 | Not a camera photo: flat digital graphic/slide, so photographic forensics (sensor noise, lens blur, lighting) do not apply</a:t>
+            </a:r>
+          </a:p>
+          <a:p>
+            <a:r>
+              <a:t>Evidence 6 | Inconsistent centering of body text lines, with ragged, uneven offsets unlike typical layout-software alignment</a:t>
+            </a:r>
+          </a:p>
+          <a:p>
+            <a:r>
+              <a:t>Evidence 7 | Polygonal network line-art with segments that end in mid-air, fade unevenly, and break into stray dashed fragments on the left</a:t>
+            </a:r>
+          </a:p>
+          <a:p>
+            <a:r>
+              <a:t>Evidence 8 | Faint mottled texture in the flat background, atypical of vector-exported slides</a:t>
+            </a:r>
+          </a:p>
+          <a:p>
+            <a:r>
+              <a:t>Evidence 9 | 1376x768 dimensions, which match a common native output size of some current image generators</a:t>
+            </a:r>
+          </a:p>
+          <a:p>
+            <a:r>
+              <a:t>Evidence 10 | Heavy soft drop shadow on the headline, a stylistic pattern common in generated slide imagery</a:t>
+            </a:r>
+          </a:p>
+          <a:p>
+            <a:r>
+              <a:t>Evidence 11 | Text is fully legible and correctly spelled, which weighs against older generators but not modern text-capable models</a:t>
+            </a:r>
+          </a:p>
+          <a:p>
+            <a:r>
+              <a:t>Evidence 12 | Caveat: Designed graphics from a PDF can be produced by ordinary layout tools or by modern text-capable generators and look nearly identical. The layout irregularities and image dimensions are suggestive only, so check the source PDF metadata, its creation tool, and any C2PA/provenance data.</a:t>
             </a:r>
           </a:p>
         </p:txBody>
@@ -2607,7 +2607,7 @@
           </a:p>
           <a:p>
             <a:r>
-              <a:t>Assessment | inconclusive</a:t>
+              <a:t>Assessment | synthetic likely</a:t>
             </a:r>
           </a:p>
           <a:p>
@@ -2622,67 +2622,67 @@
           </a:p>
           <a:p>
             <a:r>
-              <a:t>Provider summary | Worst of 4 frames (figure p15): synthetic likelihood 55/100; tells: no camera-photo content; digitally rendered slide graphic, so photographic forensics (grain, lens blur, lighting) do not apply, irregular, non-geometric low-poly line networks with inconsistent node joins and fading, typical of AI image-generator decorative motifs, red-to-green left/right mirrored decoration with loosely matched structure, heavy bold text with slightly soft drop-shadow/halo edges on headline</a:t>
-            </a:r>
-          </a:p>
-          <a:p>
-            <a:r>
-              <a:t>Evidence 1 | Frame figure p1: 45/100</a:t>
-            </a:r>
-          </a:p>
-          <a:p>
-            <a:r>
-              <a:t>Evidence 2 | Frame figure p6: 40/100</a:t>
-            </a:r>
-          </a:p>
-          <a:p>
-            <a:r>
-              <a:t>Evidence 3 | Frame figure p10: 35/100</a:t>
-            </a:r>
-          </a:p>
-          <a:p>
-            <a:r>
-              <a:t>Evidence 4 | Frame figure p15: 55/100</a:t>
-            </a:r>
-          </a:p>
-          <a:p>
-            <a:r>
-              <a:t>Evidence 5 | No camera-photo content; digitally rendered slide graphic, so photographic forensics (grain, lens blur, lighting) do not apply</a:t>
-            </a:r>
-          </a:p>
-          <a:p>
-            <a:r>
-              <a:t>Evidence 6 | Irregular, non-geometric low-poly line networks with inconsistent node joins and fading, typical of AI image-generator decorative motifs</a:t>
-            </a:r>
-          </a:p>
-          <a:p>
-            <a:r>
-              <a:t>Evidence 7 | Red-to-green left/right mirrored decoration with loosely matched structure</a:t>
-            </a:r>
-          </a:p>
-          <a:p>
-            <a:r>
-              <a:t>Evidence 8 | Heavy bold text with slightly soft drop-shadow/halo edges on headline</a:t>
-            </a:r>
-          </a:p>
-          <a:p>
-            <a:r>
-              <a:t>Evidence 9 | Slightly uneven centred line breaks in body text</a:t>
-            </a:r>
-          </a:p>
-          <a:p>
-            <a:r>
-              <a:t>Evidence 10 | All text is correctly spelled and coherent, which is consistent with either modern text-capable generators or conventional slide software</a:t>
-            </a:r>
-          </a:p>
-          <a:p>
-            <a:r>
-              <a:t>Evidence 11 | Faint mottled background texture rather than flat vector fill</a:t>
-            </a:r>
-          </a:p>
-          <a:p>
-            <a:r>
-              <a:t>Evidence 12 | Caveat: This is a text-and-graphic slide, likely extracted from a PDF, not a photograph. Slides made in presentation software and slides from text-capable AI image generators can look alike. The irregular network motifs and soft rendering suggest possible AI generation, but they are not decisive. A human should check the source PDF's metadata, fonts and vector layers, and the authoring tool.</a:t>
+              <a:t>Provider summary | Worst of 4 frames (figure p15): synthetic likelihood 62/100; tells: not a camera photo: flat digital graphic/slide, so photographic forensics (sensor noise, lens blur, lighting) do not apply, inconsistent centering of body text lines, with ragged, uneven offsets unlike typical layout-software alignment, polygonal network line-art with segments that end in mid-air, fade unevenly, and break into stray dashed fragments on the left, faint mottled texture in the flat background, atypical of vector-exported slides</a:t>
+            </a:r>
+          </a:p>
+          <a:p>
+            <a:r>
+              <a:t>Evidence 1 | Frame figure p1: 40/100</a:t>
+            </a:r>
+          </a:p>
+          <a:p>
+            <a:r>
+              <a:t>Evidence 2 | Frame figure p6: 45/100</a:t>
+            </a:r>
+          </a:p>
+          <a:p>
+            <a:r>
+              <a:t>Evidence 3 | Frame figure p10: 45/100</a:t>
+            </a:r>
+          </a:p>
+          <a:p>
+            <a:r>
+              <a:t>Evidence 4 | Frame figure p15: 62/100</a:t>
+            </a:r>
+          </a:p>
+          <a:p>
+            <a:r>
+              <a:t>Evidence 5 | Not a camera photo: flat digital graphic/slide, so photographic forensics (sensor noise, lens blur, lighting) do not apply</a:t>
+            </a:r>
+          </a:p>
+          <a:p>
+            <a:r>
+              <a:t>Evidence 6 | Inconsistent centering of body text lines, with ragged, uneven offsets unlike typical layout-software alignment</a:t>
+            </a:r>
+          </a:p>
+          <a:p>
+            <a:r>
+              <a:t>Evidence 7 | Polygonal network line-art with segments that end in mid-air, fade unevenly, and break into stray dashed fragments on the left</a:t>
+            </a:r>
+          </a:p>
+          <a:p>
+            <a:r>
+              <a:t>Evidence 8 | Faint mottled texture in the flat background, atypical of vector-exported slides</a:t>
+            </a:r>
+          </a:p>
+          <a:p>
+            <a:r>
+              <a:t>Evidence 9 | 1376x768 dimensions, which match a common native output size of some current image generators</a:t>
+            </a:r>
+          </a:p>
+          <a:p>
+            <a:r>
+              <a:t>Evidence 10 | Heavy soft drop shadow on the headline, a stylistic pattern common in generated slide imagery</a:t>
+            </a:r>
+          </a:p>
+          <a:p>
+            <a:r>
+              <a:t>Evidence 11 | Text is fully legible and correctly spelled, which weighs against older generators but not modern text-capable models</a:t>
+            </a:r>
+          </a:p>
+          <a:p>
+            <a:r>
+              <a:t>Evidence 12 | Caveat: Designed graphics from a PDF can be produced by ordinary layout tools or by modern text-capable generators and look nearly identical. The layout irregularities and image dimensions are suggestive only, so check the source PDF metadata, its creation tool, and any C2PA/provenance data.</a:t>
             </a:r>
           </a:p>
         </p:txBody>
@@ -2792,12 +2792,12 @@
           </a:p>
           <a:p>
             <a:r>
-              <a:t>Provider summary | Worst of 4 frames (figure p6): synthetic likelihood 15/100; tells: Consistent, legible typography throughout both columns, Regular rounded panels and aligned borders characteristic of conventional slide design, No obvious malformed lettering or incoherent graphic elements, Entire image is a text infographic, with no photographic detail to assess</a:t>
-            </a:r>
-          </a:p>
-          <a:p>
-            <a:r>
-              <a:t>Evidence 1 | Frame figure p1: 8/100</a:t>
+              <a:t>Provider summary | Worst of 4 frames (figure p6): synthetic likelihood 15/100; tells: Legible, coherent text with consistent repeated letterforms., Regular two-column layout with aligned rounded panels., Consistent bold labels and uniform bullet styling., No photographic base or identifiable inpainting boundaries.</a:t>
+            </a:r>
+          </a:p>
+          <a:p>
+            <a:r>
+              <a:t>Evidence 1 | Frame figure p1: 12/100</a:t>
             </a:r>
           </a:p>
           <a:p>
@@ -2807,7 +2807,7 @@
           </a:p>
           <a:p>
             <a:r>
-              <a:t>Evidence 3 | Frame figure p10: 5/100</a:t>
+              <a:t>Evidence 3 | Frame figure p10: 12/100</a:t>
             </a:r>
           </a:p>
           <a:p>
@@ -2817,27 +2817,27 @@
           </a:p>
           <a:p>
             <a:r>
-              <a:t>Evidence 5 | Consistent, legible typography throughout both columns</a:t>
-            </a:r>
-          </a:p>
-          <a:p>
-            <a:r>
-              <a:t>Evidence 6 | Regular rounded panels and aligned borders characteristic of conventional slide design</a:t>
-            </a:r>
-          </a:p>
-          <a:p>
-            <a:r>
-              <a:t>Evidence 7 | No obvious malformed lettering or incoherent graphic elements</a:t>
-            </a:r>
-          </a:p>
-          <a:p>
-            <a:r>
-              <a:t>Evidence 8 | Entire image is a text infographic, with no photographic detail to assess</a:t>
-            </a:r>
-          </a:p>
-          <a:p>
-            <a:r>
-              <a:t>Evidence 9 | Caveat: A conventional infographic and an AI-assisted graphic can look identical; source files or creation history are needed to establish provenance.</a:t>
+              <a:t>Evidence 5 | Legible, coherent text with consistent repeated letterforms.</a:t>
+            </a:r>
+          </a:p>
+          <a:p>
+            <a:r>
+              <a:t>Evidence 6 | Regular two-column layout with aligned rounded panels.</a:t>
+            </a:r>
+          </a:p>
+          <a:p>
+            <a:r>
+              <a:t>Evidence 7 | Consistent bold labels and uniform bullet styling.</a:t>
+            </a:r>
+          </a:p>
+          <a:p>
+            <a:r>
+              <a:t>Evidence 8 | No photographic base or identifiable inpainting boundaries.</a:t>
+            </a:r>
+          </a:p>
+          <a:p>
+            <a:r>
+              <a:t>Evidence 9 | Caveat: This is a designed infographic, not a camera photo; conventional design and AI-assisted production cannot reliably be distinguished from the rendered image alone.</a:t>
             </a:r>
           </a:p>
         </p:txBody>
@@ -2947,12 +2947,12 @@
           </a:p>
           <a:p>
             <a:r>
-              <a:t>Provider summary | Worst of 4 frames (figure p6): synthetic likelihood 15/100; tells: Consistent, legible typography throughout both columns, Regular rounded panels and aligned borders characteristic of conventional slide design, No obvious malformed lettering or incoherent graphic elements, Entire image is a text infographic, with no photographic detail to assess</a:t>
-            </a:r>
-          </a:p>
-          <a:p>
-            <a:r>
-              <a:t>Evidence 1 | Frame figure p1: 8/100</a:t>
+              <a:t>Provider summary | Worst of 4 frames (figure p6): synthetic likelihood 15/100; tells: Legible, coherent text with consistent repeated letterforms., Regular two-column layout with aligned rounded panels., Consistent bold labels and uniform bullet styling., No photographic base or identifiable inpainting boundaries.</a:t>
+            </a:r>
+          </a:p>
+          <a:p>
+            <a:r>
+              <a:t>Evidence 1 | Frame figure p1: 12/100</a:t>
             </a:r>
           </a:p>
           <a:p>
@@ -2962,7 +2962,7 @@
           </a:p>
           <a:p>
             <a:r>
-              <a:t>Evidence 3 | Frame figure p10: 5/100</a:t>
+              <a:t>Evidence 3 | Frame figure p10: 12/100</a:t>
             </a:r>
           </a:p>
           <a:p>
@@ -2972,27 +2972,27 @@
           </a:p>
           <a:p>
             <a:r>
-              <a:t>Evidence 5 | Consistent, legible typography throughout both columns</a:t>
-            </a:r>
-          </a:p>
-          <a:p>
-            <a:r>
-              <a:t>Evidence 6 | Regular rounded panels and aligned borders characteristic of conventional slide design</a:t>
-            </a:r>
-          </a:p>
-          <a:p>
-            <a:r>
-              <a:t>Evidence 7 | No obvious malformed lettering or incoherent graphic elements</a:t>
-            </a:r>
-          </a:p>
-          <a:p>
-            <a:r>
-              <a:t>Evidence 8 | Entire image is a text infographic, with no photographic detail to assess</a:t>
-            </a:r>
-          </a:p>
-          <a:p>
-            <a:r>
-              <a:t>Evidence 9 | Caveat: A conventional infographic and an AI-assisted graphic can look identical; source files or creation history are needed to establish provenance.</a:t>
+              <a:t>Evidence 5 | Legible, coherent text with consistent repeated letterforms.</a:t>
+            </a:r>
+          </a:p>
+          <a:p>
+            <a:r>
+              <a:t>Evidence 6 | Regular two-column layout with aligned rounded panels.</a:t>
+            </a:r>
+          </a:p>
+          <a:p>
+            <a:r>
+              <a:t>Evidence 7 | Consistent bold labels and uniform bullet styling.</a:t>
+            </a:r>
+          </a:p>
+          <a:p>
+            <a:r>
+              <a:t>Evidence 8 | No photographic base or identifiable inpainting boundaries.</a:t>
+            </a:r>
+          </a:p>
+          <a:p>
+            <a:r>
+              <a:t>Evidence 9 | Caveat: This is a designed infographic, not a camera photo; conventional design and AI-assisted production cannot reliably be distinguished from the rendered image alone.</a:t>
             </a:r>
           </a:p>
         </p:txBody>
@@ -3102,12 +3102,12 @@
           </a:p>
           <a:p>
             <a:r>
-              <a:t>Provider summary | Worst of 4 frames (figure p15): synthetic likelihood 28/100; tells: clean vector typography, standard geometric graphic design elements, absence of diffusion generation artifacts</a:t>
-            </a:r>
-          </a:p>
-          <a:p>
-            <a:r>
-              <a:t>Evidence 1 | Frame figure p1: 25/100</a:t>
+              <a:t>Provider summary | Worst of 4 frames (figure p15): synthetic likelihood 30/100; tells: sharp vector-style geometric graphics, clean digital typography, standard graphic design layout artifacts</a:t>
+            </a:r>
+          </a:p>
+          <a:p>
+            <a:r>
+              <a:t>Evidence 1 | Frame figure p1: 28/100</a:t>
             </a:r>
           </a:p>
           <a:p>
@@ -3122,27 +3122,27 @@
           </a:p>
           <a:p>
             <a:r>
-              <a:t>Evidence 4 | Frame figure p15: 28/100</a:t>
-            </a:r>
-          </a:p>
-          <a:p>
-            <a:r>
-              <a:t>Evidence 5 | Clean vector typography</a:t>
-            </a:r>
-          </a:p>
-          <a:p>
-            <a:r>
-              <a:t>Evidence 6 | Standard geometric graphic design elements</a:t>
-            </a:r>
-          </a:p>
-          <a:p>
-            <a:r>
-              <a:t>Evidence 7 | Absence of diffusion generation artifacts</a:t>
-            </a:r>
-          </a:p>
-          <a:p>
-            <a:r>
-              <a:t>Evidence 8 | Caveat: Standard presentation slide with digital vector art; non-photographic graphics make AI detection inconclusive.</a:t>
+              <a:t>Evidence 4 | Frame figure p15: 30/100</a:t>
+            </a:r>
+          </a:p>
+          <a:p>
+            <a:r>
+              <a:t>Evidence 5 | Sharp vector-style geometric graphics</a:t>
+            </a:r>
+          </a:p>
+          <a:p>
+            <a:r>
+              <a:t>Evidence 6 | Clean digital typography</a:t>
+            </a:r>
+          </a:p>
+          <a:p>
+            <a:r>
+              <a:t>Evidence 7 | Standard graphic design layout artifacts</a:t>
+            </a:r>
+          </a:p>
+          <a:p>
+            <a:r>
+              <a:t>Evidence 8 | Caveat: Standard presentation slide graphics can be synthesized or edited via automated tools.</a:t>
             </a:r>
           </a:p>
         </p:txBody>
@@ -6729,7 +6729,7 @@
                         </a:defRPr>
                       </a:pPr>
                       <a:r>
-                        <a:t>Frame figure p15: 28/100</a:t>
+                        <a:t>Frame figure p15: 30/100</a:t>
                       </a:r>
                     </a:p>
                   </a:txBody>
@@ -6817,7 +6817,7 @@
                         </a:defRPr>
                       </a:pPr>
                       <a:r>
-                        <a:t>Clean vector typography</a:t>
+                        <a:t>Sharp vector-style geometric graphics</a:t>
                       </a:r>
                     </a:p>
                   </a:txBody>
@@ -6905,7 +6905,7 @@
                         </a:defRPr>
                       </a:pPr>
                       <a:r>
-                        <a:t>Standard geometric graphic design elements</a:t>
+                        <a:t>Clean digital typography</a:t>
                       </a:r>
                     </a:p>
                   </a:txBody>
@@ -6993,7 +6993,7 @@
                         </a:defRPr>
                       </a:pPr>
                       <a:r>
-                        <a:t>Absence of diffusion generation artifacts</a:t>
+                        <a:t>Standard graphic design layout artifacts</a:t>
                       </a:r>
                     </a:p>
                   </a:txBody>
@@ -7081,26 +7081,26 @@
                         </a:defRPr>
                       </a:pPr>
                       <a:r>
-                        <a:t>Caveat: Standard presentation slide with digital vector art; non-photographic</a:t>
-                      </a:r>
-                    </a:p>
-                    <a:p>
-                      <a:pPr>
-                        <a:lnSpc>
-                          <a:spcPts val="1600"/>
-                        </a:lnSpc>
-                        <a:spcAft>
-                          <a:spcPts val="0"/>
-                        </a:spcAft>
-                        <a:defRPr sz="1200" b="0">
-                          <a:solidFill>
-                            <a:srgbClr val="21243A"/>
-                          </a:solidFill>
-                          <a:latin typeface="Arial"/>
-                        </a:defRPr>
-                      </a:pPr>
-                      <a:r>
-                        <a:t>graphics make AI detection inconclusive.</a:t>
+                        <a:t>Caveat: Standard presentation slide graphics can be synthesized or edited via</a:t>
+                      </a:r>
+                    </a:p>
+                    <a:p>
+                      <a:pPr>
+                        <a:lnSpc>
+                          <a:spcPts val="1600"/>
+                        </a:lnSpc>
+                        <a:spcAft>
+                          <a:spcPts val="0"/>
+                        </a:spcAft>
+                        <a:defRPr sz="1200" b="0">
+                          <a:solidFill>
+                            <a:srgbClr val="21243A"/>
+                          </a:solidFill>
+                          <a:latin typeface="Arial"/>
+                        </a:defRPr>
+                      </a:pPr>
+                      <a:r>
+                        <a:t>automated tools.</a:t>
                       </a:r>
                     </a:p>
                   </a:txBody>
@@ -10403,7 +10403,7 @@
                         </a:defRPr>
                       </a:pPr>
                       <a:r>
-                        <a:t>ELA mean 0.4, peak 23 (uniform high ELA can indicate generation/heavy edit).</a:t>
+                        <a:t>ELA mean 0.4, peak 21 (uniform high ELA can indicate generation/heavy edit).</a:t>
                       </a:r>
                     </a:p>
                   </a:txBody>
@@ -10579,7 +10579,7 @@
                         </a:defRPr>
                       </a:pPr>
                       <a:r>
-                        <a:t>Spectral peakiness 19.47 (periodic frequency peaks can mark generated textures).</a:t>
+                        <a:t>Spectral peakiness 19.49 (periodic frequency peaks can mark generated textures).</a:t>
                       </a:r>
                     </a:p>
                   </a:txBody>
@@ -10973,7 +10973,7 @@
                         </a:defRPr>
                       </a:pPr>
                       <a:r>
-                        <a:t>authentic likely</a:t>
+                        <a:t>inconclusive</a:t>
                       </a:r>
                     </a:p>
                   </a:txBody>
@@ -11003,7 +11003,7 @@
                         </a:defRPr>
                       </a:pPr>
                       <a:r>
-                        <a:t>25</a:t>
+                        <a:t>28</a:t>
                       </a:r>
                     </a:p>
                   </a:txBody>
@@ -11211,7 +11211,7 @@
                         </a:defRPr>
                       </a:pPr>
                       <a:r>
-                        <a:t>authentic likely</a:t>
+                        <a:t>inconclusive</a:t>
                       </a:r>
                     </a:p>
                   </a:txBody>
@@ -11360,7 +11360,7 @@
                         </a:defRPr>
                       </a:pPr>
                       <a:r>
-                        <a:t>28</a:t>
+                        <a:t>30</a:t>
                       </a:r>
                     </a:p>
                   </a:txBody>
@@ -12021,7 +12021,7 @@
         </p:nvGraphicFramePr>
         <p:xfrm>
           <a:off x="365760" y="1700784"/>
-          <a:ext cx="8412479" cy="1365503"/>
+          <a:ext cx="8412479" cy="1568704"/>
         </p:xfrm>
         <a:graphic>
           <a:graphicData uri="http://schemas.openxmlformats.org/drawingml/2006/table">
@@ -12033,7 +12033,7 @@
                 <a:gridCol w="2271369"/>
                 <a:gridCol w="6141110"/>
               </a:tblGrid>
-              <a:tr h="1365503">
+              <a:tr h="1568704">
                 <a:tc>
                   <a:txBody>
                     <a:bodyPr wrap="none"/>
@@ -12084,102 +12084,121 @@
                         </a:defRPr>
                       </a:pPr>
                       <a:r>
-                        <a:t>Worst of 4 frames (figure p15): synthetic likelihood 55/100; tells: no camera-photo</a:t>
-                      </a:r>
-                    </a:p>
-                    <a:p>
-                      <a:pPr>
-                        <a:lnSpc>
-                          <a:spcPts val="1600"/>
-                        </a:lnSpc>
-                        <a:spcAft>
-                          <a:spcPts val="0"/>
-                        </a:spcAft>
-                        <a:defRPr sz="1200" b="0">
-                          <a:solidFill>
-                            <a:srgbClr val="21243A"/>
-                          </a:solidFill>
-                          <a:latin typeface="Arial"/>
-                        </a:defRPr>
-                      </a:pPr>
-                      <a:r>
-                        <a:t>content; digitally rendered slide graphic, so photographic forensics (grain, lens</a:t>
-                      </a:r>
-                    </a:p>
-                    <a:p>
-                      <a:pPr>
-                        <a:lnSpc>
-                          <a:spcPts val="1600"/>
-                        </a:lnSpc>
-                        <a:spcAft>
-                          <a:spcPts val="0"/>
-                        </a:spcAft>
-                        <a:defRPr sz="1200" b="0">
-                          <a:solidFill>
-                            <a:srgbClr val="21243A"/>
-                          </a:solidFill>
-                          <a:latin typeface="Arial"/>
-                        </a:defRPr>
-                      </a:pPr>
-                      <a:r>
-                        <a:t>blur, lighting) do not apply, irregular, non-geometric low-poly line networks with</a:t>
-                      </a:r>
-                    </a:p>
-                    <a:p>
-                      <a:pPr>
-                        <a:lnSpc>
-                          <a:spcPts val="1600"/>
-                        </a:lnSpc>
-                        <a:spcAft>
-                          <a:spcPts val="0"/>
-                        </a:spcAft>
-                        <a:defRPr sz="1200" b="0">
-                          <a:solidFill>
-                            <a:srgbClr val="21243A"/>
-                          </a:solidFill>
-                          <a:latin typeface="Arial"/>
-                        </a:defRPr>
-                      </a:pPr>
-                      <a:r>
-                        <a:t>inconsistent node joins and fading, typical of AI image-generator decorative</a:t>
-                      </a:r>
-                    </a:p>
-                    <a:p>
-                      <a:pPr>
-                        <a:lnSpc>
-                          <a:spcPts val="1600"/>
-                        </a:lnSpc>
-                        <a:spcAft>
-                          <a:spcPts val="0"/>
-                        </a:spcAft>
-                        <a:defRPr sz="1200" b="0">
-                          <a:solidFill>
-                            <a:srgbClr val="21243A"/>
-                          </a:solidFill>
-                          <a:latin typeface="Arial"/>
-                        </a:defRPr>
-                      </a:pPr>
-                      <a:r>
-                        <a:t>motifs, red-to-green left/right mirrored decoration with loosely matched</a:t>
-                      </a:r>
-                    </a:p>
-                    <a:p>
-                      <a:pPr>
-                        <a:lnSpc>
-                          <a:spcPts val="1600"/>
-                        </a:lnSpc>
-                        <a:spcAft>
-                          <a:spcPts val="0"/>
-                        </a:spcAft>
-                        <a:defRPr sz="1200" b="0">
-                          <a:solidFill>
-                            <a:srgbClr val="21243A"/>
-                          </a:solidFill>
-                          <a:latin typeface="Arial"/>
-                        </a:defRPr>
-                      </a:pPr>
-                      <a:r>
-                        <a:t>structure, heavy bold text with slightly soft drop-shadow/halo edges on headline</a:t>
+                        <a:t>Worst of 4 frames (figure p15): synthetic likelihood 62/100; tells: not a camera</a:t>
+                      </a:r>
+                    </a:p>
+                    <a:p>
+                      <a:pPr>
+                        <a:lnSpc>
+                          <a:spcPts val="1600"/>
+                        </a:lnSpc>
+                        <a:spcAft>
+                          <a:spcPts val="0"/>
+                        </a:spcAft>
+                        <a:defRPr sz="1200" b="0">
+                          <a:solidFill>
+                            <a:srgbClr val="21243A"/>
+                          </a:solidFill>
+                          <a:latin typeface="Arial"/>
+                        </a:defRPr>
+                      </a:pPr>
+                      <a:r>
+                        <a:t>photo: flat digital graphic/slide, so photographic forensics (sensor noise, lens blur,</a:t>
+                      </a:r>
+                    </a:p>
+                    <a:p>
+                      <a:pPr>
+                        <a:lnSpc>
+                          <a:spcPts val="1600"/>
+                        </a:lnSpc>
+                        <a:spcAft>
+                          <a:spcPts val="0"/>
+                        </a:spcAft>
+                        <a:defRPr sz="1200" b="0">
+                          <a:solidFill>
+                            <a:srgbClr val="21243A"/>
+                          </a:solidFill>
+                          <a:latin typeface="Arial"/>
+                        </a:defRPr>
+                      </a:pPr>
+                      <a:r>
+                        <a:t>lighting) do not apply, inconsistent centering of body text lines, with ragged,</a:t>
+                      </a:r>
+                    </a:p>
+                    <a:p>
+                      <a:pPr>
+                        <a:lnSpc>
+                          <a:spcPts val="1600"/>
+                        </a:lnSpc>
+                        <a:spcAft>
+                          <a:spcPts val="0"/>
+                        </a:spcAft>
+                        <a:defRPr sz="1200" b="0">
+                          <a:solidFill>
+                            <a:srgbClr val="21243A"/>
+                          </a:solidFill>
+                          <a:latin typeface="Arial"/>
+                        </a:defRPr>
+                      </a:pPr>
+                      <a:r>
+                        <a:t>uneven offsets unlike typical layout-software alignment, polygonal network</a:t>
+                      </a:r>
+                    </a:p>
+                    <a:p>
+                      <a:pPr>
+                        <a:lnSpc>
+                          <a:spcPts val="1600"/>
+                        </a:lnSpc>
+                        <a:spcAft>
+                          <a:spcPts val="0"/>
+                        </a:spcAft>
+                        <a:defRPr sz="1200" b="0">
+                          <a:solidFill>
+                            <a:srgbClr val="21243A"/>
+                          </a:solidFill>
+                          <a:latin typeface="Arial"/>
+                        </a:defRPr>
+                      </a:pPr>
+                      <a:r>
+                        <a:t>line-art with segments that end in mid-air, fade unevenly, and break into stray</a:t>
+                      </a:r>
+                    </a:p>
+                    <a:p>
+                      <a:pPr>
+                        <a:lnSpc>
+                          <a:spcPts val="1600"/>
+                        </a:lnSpc>
+                        <a:spcAft>
+                          <a:spcPts val="0"/>
+                        </a:spcAft>
+                        <a:defRPr sz="1200" b="0">
+                          <a:solidFill>
+                            <a:srgbClr val="21243A"/>
+                          </a:solidFill>
+                          <a:latin typeface="Arial"/>
+                        </a:defRPr>
+                      </a:pPr>
+                      <a:r>
+                        <a:t>dashed fragments on the left, faint mottled texture in the flat background,</a:t>
+                      </a:r>
+                    </a:p>
+                    <a:p>
+                      <a:pPr>
+                        <a:lnSpc>
+                          <a:spcPts val="1600"/>
+                        </a:lnSpc>
+                        <a:spcAft>
+                          <a:spcPts val="0"/>
+                        </a:spcAft>
+                        <a:defRPr sz="1200" b="0">
+                          <a:solidFill>
+                            <a:srgbClr val="21243A"/>
+                          </a:solidFill>
+                          <a:latin typeface="Arial"/>
+                        </a:defRPr>
+                      </a:pPr>
+                      <a:r>
+                        <a:t>atypical of vector-exported slides</a:t>
                       </a:r>
                     </a:p>
                   </a:txBody>
@@ -12203,8 +12222,8 @@
           <p:nvPr/>
         </p:nvGraphicFramePr>
         <p:xfrm>
-          <a:off x="365760" y="3066288"/>
-          <a:ext cx="8412479" cy="1162304"/>
+          <a:off x="365760" y="3269488"/>
+          <a:ext cx="8412479" cy="959103"/>
         </p:xfrm>
         <a:graphic>
           <a:graphicData uri="http://schemas.openxmlformats.org/drawingml/2006/table">
@@ -12216,7 +12235,7 @@
                 <a:gridCol w="2271369"/>
                 <a:gridCol w="6141110"/>
               </a:tblGrid>
-              <a:tr h="1162304">
+              <a:tr h="959103">
                 <a:tc>
                   <a:txBody>
                     <a:bodyPr wrap="none"/>
@@ -12267,83 +12286,64 @@
                         </a:defRPr>
                       </a:pPr>
                       <a:r>
-                        <a:t>Worst of 4 frames (figure p6): synthetic likelihood 15/100; tells: Consistent, legible</a:t>
-                      </a:r>
-                    </a:p>
-                    <a:p>
-                      <a:pPr>
-                        <a:lnSpc>
-                          <a:spcPts val="1600"/>
-                        </a:lnSpc>
-                        <a:spcAft>
-                          <a:spcPts val="0"/>
-                        </a:spcAft>
-                        <a:defRPr sz="1200" b="0">
-                          <a:solidFill>
-                            <a:srgbClr val="21243A"/>
-                          </a:solidFill>
-                          <a:latin typeface="Arial"/>
-                        </a:defRPr>
-                      </a:pPr>
-                      <a:r>
-                        <a:t>typography throughout both columns, Regular rounded panels and aligned</a:t>
-                      </a:r>
-                    </a:p>
-                    <a:p>
-                      <a:pPr>
-                        <a:lnSpc>
-                          <a:spcPts val="1600"/>
-                        </a:lnSpc>
-                        <a:spcAft>
-                          <a:spcPts val="0"/>
-                        </a:spcAft>
-                        <a:defRPr sz="1200" b="0">
-                          <a:solidFill>
-                            <a:srgbClr val="21243A"/>
-                          </a:solidFill>
-                          <a:latin typeface="Arial"/>
-                        </a:defRPr>
-                      </a:pPr>
-                      <a:r>
-                        <a:t>borders characteristic of conventional slide design, No obvious malformed</a:t>
-                      </a:r>
-                    </a:p>
-                    <a:p>
-                      <a:pPr>
-                        <a:lnSpc>
-                          <a:spcPts val="1600"/>
-                        </a:lnSpc>
-                        <a:spcAft>
-                          <a:spcPts val="0"/>
-                        </a:spcAft>
-                        <a:defRPr sz="1200" b="0">
-                          <a:solidFill>
-                            <a:srgbClr val="21243A"/>
-                          </a:solidFill>
-                          <a:latin typeface="Arial"/>
-                        </a:defRPr>
-                      </a:pPr>
-                      <a:r>
-                        <a:t>lettering or incoherent graphic elements, Entire image is a text infographic, with</a:t>
-                      </a:r>
-                    </a:p>
-                    <a:p>
-                      <a:pPr>
-                        <a:lnSpc>
-                          <a:spcPts val="1600"/>
-                        </a:lnSpc>
-                        <a:spcAft>
-                          <a:spcPts val="0"/>
-                        </a:spcAft>
-                        <a:defRPr sz="1200" b="0">
-                          <a:solidFill>
-                            <a:srgbClr val="21243A"/>
-                          </a:solidFill>
-                          <a:latin typeface="Arial"/>
-                        </a:defRPr>
-                      </a:pPr>
-                      <a:r>
-                        <a:t>no photographic detail to assess</a:t>
+                        <a:t>Worst of 4 frames (figure p6): synthetic likelihood 15/100; tells: Legible, coherent</a:t>
+                      </a:r>
+                    </a:p>
+                    <a:p>
+                      <a:pPr>
+                        <a:lnSpc>
+                          <a:spcPts val="1600"/>
+                        </a:lnSpc>
+                        <a:spcAft>
+                          <a:spcPts val="0"/>
+                        </a:spcAft>
+                        <a:defRPr sz="1200" b="0">
+                          <a:solidFill>
+                            <a:srgbClr val="21243A"/>
+                          </a:solidFill>
+                          <a:latin typeface="Arial"/>
+                        </a:defRPr>
+                      </a:pPr>
+                      <a:r>
+                        <a:t>text with consistent repeated letterforms., Regular two-column layout with</a:t>
+                      </a:r>
+                    </a:p>
+                    <a:p>
+                      <a:pPr>
+                        <a:lnSpc>
+                          <a:spcPts val="1600"/>
+                        </a:lnSpc>
+                        <a:spcAft>
+                          <a:spcPts val="0"/>
+                        </a:spcAft>
+                        <a:defRPr sz="1200" b="0">
+                          <a:solidFill>
+                            <a:srgbClr val="21243A"/>
+                          </a:solidFill>
+                          <a:latin typeface="Arial"/>
+                        </a:defRPr>
+                      </a:pPr>
+                      <a:r>
+                        <a:t>aligned rounded panels., Consistent bold labels and uniform bullet styling., No</a:t>
+                      </a:r>
+                    </a:p>
+                    <a:p>
+                      <a:pPr>
+                        <a:lnSpc>
+                          <a:spcPts val="1600"/>
+                        </a:lnSpc>
+                        <a:spcAft>
+                          <a:spcPts val="0"/>
+                        </a:spcAft>
+                        <a:defRPr sz="1200" b="0">
+                          <a:solidFill>
+                            <a:srgbClr val="21243A"/>
+                          </a:solidFill>
+                          <a:latin typeface="Arial"/>
+                        </a:defRPr>
+                      </a:pPr>
+                      <a:r>
+                        <a:t>photographic base or identifiable inpainting boundaries.</a:t>
                       </a:r>
                     </a:p>
                   </a:txBody>
@@ -12431,45 +12431,45 @@
                         </a:defRPr>
                       </a:pPr>
                       <a:r>
-                        <a:t>Worst of 4 frames (figure p15): synthetic likelihood 28/100; tells: clean vector</a:t>
-                      </a:r>
-                    </a:p>
-                    <a:p>
-                      <a:pPr>
-                        <a:lnSpc>
-                          <a:spcPts val="1600"/>
-                        </a:lnSpc>
-                        <a:spcAft>
-                          <a:spcPts val="0"/>
-                        </a:spcAft>
-                        <a:defRPr sz="1200" b="0">
-                          <a:solidFill>
-                            <a:srgbClr val="21243A"/>
-                          </a:solidFill>
-                          <a:latin typeface="Arial"/>
-                        </a:defRPr>
-                      </a:pPr>
-                      <a:r>
-                        <a:t>typography, standard geometric graphic design elements, absence of diffusion</a:t>
-                      </a:r>
-                    </a:p>
-                    <a:p>
-                      <a:pPr>
-                        <a:lnSpc>
-                          <a:spcPts val="1600"/>
-                        </a:lnSpc>
-                        <a:spcAft>
-                          <a:spcPts val="0"/>
-                        </a:spcAft>
-                        <a:defRPr sz="1200" b="0">
-                          <a:solidFill>
-                            <a:srgbClr val="21243A"/>
-                          </a:solidFill>
-                          <a:latin typeface="Arial"/>
-                        </a:defRPr>
-                      </a:pPr>
-                      <a:r>
-                        <a:t>generation artifacts</a:t>
+                        <a:t>Worst of 4 frames (figure p15): synthetic likelihood 30/100; tells: sharp vector-style</a:t>
+                      </a:r>
+                    </a:p>
+                    <a:p>
+                      <a:pPr>
+                        <a:lnSpc>
+                          <a:spcPts val="1600"/>
+                        </a:lnSpc>
+                        <a:spcAft>
+                          <a:spcPts val="0"/>
+                        </a:spcAft>
+                        <a:defRPr sz="1200" b="0">
+                          <a:solidFill>
+                            <a:srgbClr val="21243A"/>
+                          </a:solidFill>
+                          <a:latin typeface="Arial"/>
+                        </a:defRPr>
+                      </a:pPr>
+                      <a:r>
+                        <a:t>geometric graphics, clean digital typography, standard graphic design layout</a:t>
+                      </a:r>
+                    </a:p>
+                    <a:p>
+                      <a:pPr>
+                        <a:lnSpc>
+                          <a:spcPts val="1600"/>
+                        </a:lnSpc>
+                        <a:spcAft>
+                          <a:spcPts val="0"/>
+                        </a:spcAft>
+                        <a:defRPr sz="1200" b="0">
+                          <a:solidFill>
+                            <a:srgbClr val="21243A"/>
+                          </a:solidFill>
+                          <a:latin typeface="Arial"/>
+                        </a:defRPr>
+                      </a:pPr>
+                      <a:r>
+                        <a:t>artifacts</a:t>
                       </a:r>
                     </a:p>
                   </a:txBody>
@@ -13483,7 +13483,7 @@
                         </a:defRPr>
                       </a:pPr>
                       <a:r>
-                        <a:t>frames=4; synthetic_frames=0; authentic_frames=2; rating_spread=3</a:t>
+                        <a:t>frames=4; synthetic_frames=0; authentic_frames=0; rating_spread=5</a:t>
                       </a:r>
                     </a:p>
                   </a:txBody>
@@ -14216,7 +14216,7 @@
                         </a:defRPr>
                       </a:pPr>
                       <a:r>
-                        <a:t>26/100</a:t>
+                        <a:t>27/100</a:t>
                       </a:r>
                     </a:p>
                   </a:txBody>
@@ -15075,7 +15075,7 @@
                         </a:defRPr>
                       </a:pPr>
                       <a:r>
-                        <a:t>279c5518-74f1-42db-a265-19a0d0fcb0bc</a:t>
+                        <a:t>f46ae041-994d-44fa-997c-8e6f23dcff90</a:t>
                       </a:r>
                     </a:p>
                   </a:txBody>
@@ -15163,7 +15163,7 @@
                         </a:defRPr>
                       </a:pPr>
                       <a:r>
-                        <a:t>2026-09-26T17:54:48+00:00</a:t>
+                        <a:t>2026-09-26T22:31:05+00:00</a:t>
                       </a:r>
                     </a:p>
                   </a:txBody>
@@ -15427,7 +15427,7 @@
                         </a:defRPr>
                       </a:pPr>
                       <a:r>
-                        <a:t>verdict-consistency-2026-09-26.1</a:t>
+                        <a:t>pdf-preparation-2026-09-26.1</a:t>
                       </a:r>
                     </a:p>
                   </a:txBody>
@@ -15628,7 +15628,7 @@
         </p:nvGraphicFramePr>
         <p:xfrm>
           <a:off x="365760" y="4496816"/>
-          <a:ext cx="8412479" cy="349504"/>
+          <a:ext cx="8412479" cy="552704"/>
         </p:xfrm>
         <a:graphic>
           <a:graphicData uri="http://schemas.openxmlformats.org/drawingml/2006/table">
@@ -15640,7 +15640,7 @@
                 <a:gridCol w="2271369"/>
                 <a:gridCol w="6141110"/>
               </a:tblGrid>
-              <a:tr h="349504">
+              <a:tr h="552704">
                 <a:tc>
                   <a:txBody>
                     <a:bodyPr wrap="none"/>
@@ -15691,7 +15691,26 @@
                         </a:defRPr>
                       </a:pPr>
                       <a:r>
-                        <a:t>Extracted 4 embedded figure(s) of 15 found (figure mode).</a:t>
+                        <a:t>PDF preparation: pdf-input-2026-09-26.1 (pypdf text/figures; PDFium page</a:t>
+                      </a:r>
+                    </a:p>
+                    <a:p>
+                      <a:pPr>
+                        <a:lnSpc>
+                          <a:spcPts val="1600"/>
+                        </a:lnSpc>
+                        <a:spcAft>
+                          <a:spcPts val="0"/>
+                        </a:spcAft>
+                        <a:defRPr sz="1200" b="0">
+                          <a:solidFill>
+                            <a:srgbClr val="21243A"/>
+                          </a:solidFill>
+                          <a:latin typeface="Arial"/>
+                        </a:defRPr>
+                      </a:pPr>
+                      <a:r>
+                        <a:t>rendering).</a:t>
                       </a:r>
                     </a:p>
                   </a:txBody>
@@ -15715,7 +15734,7 @@
           <p:nvPr/>
         </p:nvGraphicFramePr>
         <p:xfrm>
-          <a:off x="365760" y="4846320"/>
+          <a:off x="365760" y="5049520"/>
           <a:ext cx="8412479" cy="349504"/>
         </p:xfrm>
         <a:graphic>
@@ -15779,7 +15798,7 @@
                         </a:defRPr>
                       </a:pPr>
                       <a:r>
-                        <a:t>No selectable text layer - vision models read the page/figure images.</a:t>
+                        <a:t>Extracted 4 embedded figure(s) of 15 found (figure mode).</a:t>
                       </a:r>
                     </a:p>
                   </a:txBody>
@@ -15803,8 +15822,8 @@
           <p:nvPr/>
         </p:nvGraphicFramePr>
         <p:xfrm>
-          <a:off x="365760" y="5195824"/>
-          <a:ext cx="8412479" cy="755904"/>
+          <a:off x="365760" y="5399024"/>
+          <a:ext cx="8412479" cy="349504"/>
         </p:xfrm>
         <a:graphic>
           <a:graphicData uri="http://schemas.openxmlformats.org/drawingml/2006/table">
@@ -15816,7 +15835,7 @@
                 <a:gridCol w="2271369"/>
                 <a:gridCol w="6141110"/>
               </a:tblGrid>
-              <a:tr h="755904">
+              <a:tr h="349504">
                 <a:tc>
                   <a:txBody>
                     <a:bodyPr wrap="none"/>
@@ -15867,45 +15886,7 @@
                         </a:defRPr>
                       </a:pPr>
                       <a:r>
-                        <a:t>Recomputed locally from the same saved provider replies acquired under run</a:t>
-                      </a:r>
-                    </a:p>
-                    <a:p>
-                      <a:pPr>
-                        <a:lnSpc>
-                          <a:spcPts val="1600"/>
-                        </a:lnSpc>
-                        <a:spcAft>
-                          <a:spcPts val="0"/>
-                        </a:spcAft>
-                        <a:defRPr sz="1200" b="0">
-                          <a:solidFill>
-                            <a:srgbClr val="21243A"/>
-                          </a:solidFill>
-                          <a:latin typeface="Arial"/>
-                        </a:defRPr>
-                      </a:pPr>
-                      <a:r>
-                        <a:t>five-examples-20260926-r1. No new provider requests. Original report</a:t>
-                      </a:r>
-                    </a:p>
-                    <a:p>
-                      <a:pPr>
-                        <a:lnSpc>
-                          <a:spcPts val="1600"/>
-                        </a:lnSpc>
-                        <a:spcAft>
-                          <a:spcPts val="0"/>
-                        </a:spcAft>
-                        <a:defRPr sz="1200" b="0">
-                          <a:solidFill>
-                            <a:srgbClr val="21243A"/>
-                          </a:solidFill>
-                          <a:latin typeface="Arial"/>
-                        </a:defRPr>
-                      </a:pPr>
-                      <a:r>
-                        <a:t>67783866-5136-47c8-95ce-ff7e7f37c6d3 was generated at</a:t>
+                        <a:t>No selectable text layer - vision models read the page/figure images.</a:t>
                       </a:r>
                     </a:p>
                   </a:txBody>
@@ -16237,62 +16218,62 @@
                         </a:defRPr>
                       </a:pPr>
                       <a:r>
-                        <a:t>Continued</a:t>
-                      </a:r>
-                    </a:p>
-                  </a:txBody>
-                  <a:tcPr marL="82296" marR="82296" marT="64008" marB="64008">
-                    <a:solidFill>
-                      <a:srgbClr val="F1F7F7"/>
-                    </a:solidFill>
-                  </a:tcPr>
-                </a:tc>
-                <a:tc>
-                  <a:txBody>
-                    <a:bodyPr wrap="none"/>
-                    <a:lstStyle/>
-                    <a:p>
-                      <a:pPr>
-                        <a:lnSpc>
-                          <a:spcPts val="1600"/>
-                        </a:lnSpc>
-                        <a:spcAft>
-                          <a:spcPts val="0"/>
-                        </a:spcAft>
-                        <a:defRPr sz="1200" b="0">
-                          <a:solidFill>
-                            <a:srgbClr val="21243A"/>
-                          </a:solidFill>
-                          <a:latin typeface="Arial"/>
-                        </a:defRPr>
-                      </a:pPr>
-                      <a:r>
-                        <a:t>2026-09-26T17:38:42+00:00 under method publication-repair-2026-09-24.3; that</a:t>
-                      </a:r>
-                    </a:p>
-                    <a:p>
-                      <a:pPr>
-                        <a:lnSpc>
-                          <a:spcPts val="1600"/>
-                        </a:lnSpc>
-                        <a:spcAft>
-                          <a:spcPts val="0"/>
-                        </a:spcAft>
-                        <a:defRPr sz="1200" b="0">
-                          <a:solidFill>
-                            <a:srgbClr val="21243A"/>
-                          </a:solidFill>
-                          <a:latin typeface="Arial"/>
-                        </a:defRPr>
-                      </a:pPr>
-                      <a:r>
-                        <a:t>report is preserved.</a:t>
-                      </a:r>
-                    </a:p>
-                  </a:txBody>
-                  <a:tcPr marL="82296" marR="82296" marT="64008" marB="64008">
-                    <a:solidFill>
-                      <a:srgbClr val="F1F7F7"/>
+                        <a:t>Ingestion note 4</a:t>
+                      </a:r>
+                    </a:p>
+                  </a:txBody>
+                  <a:tcPr marL="82296" marR="82296" marT="64008" marB="64008">
+                    <a:solidFill>
+                      <a:srgbClr val="FFFFFF"/>
+                    </a:solidFill>
+                  </a:tcPr>
+                </a:tc>
+                <a:tc>
+                  <a:txBody>
+                    <a:bodyPr wrap="none"/>
+                    <a:lstStyle/>
+                    <a:p>
+                      <a:pPr>
+                        <a:lnSpc>
+                          <a:spcPts val="1600"/>
+                        </a:lnSpc>
+                        <a:spcAft>
+                          <a:spcPts val="0"/>
+                        </a:spcAft>
+                        <a:defRPr sz="1200" b="0">
+                          <a:solidFill>
+                            <a:srgbClr val="21243A"/>
+                          </a:solidFill>
+                          <a:latin typeface="Arial"/>
+                        </a:defRPr>
+                      </a:pPr>
+                      <a:r>
+                        <a:t>Fresh provider replies acquired for eleven-examples-refresh-20260926-r1; report</a:t>
+                      </a:r>
+                    </a:p>
+                    <a:p>
+                      <a:pPr>
+                        <a:lnSpc>
+                          <a:spcPts val="1600"/>
+                        </a:lnSpc>
+                        <a:spcAft>
+                          <a:spcPts val="0"/>
+                        </a:spcAft>
+                        <a:defRPr sz="1200" b="0">
+                          <a:solidFill>
+                            <a:srgbClr val="21243A"/>
+                          </a:solidFill>
+                          <a:latin typeface="Arial"/>
+                        </a:defRPr>
+                      </a:pPr>
+                      <a:r>
+                        <a:t>assembled locally from the saved responses without further API calls.</a:t>
+                      </a:r>
+                    </a:p>
+                  </a:txBody>
+                  <a:tcPr marL="82296" marR="82296" marT="64008" marB="64008">
+                    <a:solidFill>
+                      <a:srgbClr val="FFFFFF"/>
                     </a:solidFill>
                   </a:tcPr>
                 </a:tc>
@@ -16344,132 +16325,6 @@
                         </a:defRPr>
                       </a:pPr>
                       <a:r>
-                        <a:t>Ingestion note 4</a:t>
-                      </a:r>
-                    </a:p>
-                  </a:txBody>
-                  <a:tcPr marL="82296" marR="82296" marT="64008" marB="64008">
-                    <a:solidFill>
-                      <a:srgbClr val="FFFFFF"/>
-                    </a:solidFill>
-                  </a:tcPr>
-                </a:tc>
-                <a:tc>
-                  <a:txBody>
-                    <a:bodyPr wrap="none"/>
-                    <a:lstStyle/>
-                    <a:p>
-                      <a:pPr>
-                        <a:lnSpc>
-                          <a:spcPts val="1600"/>
-                        </a:lnSpc>
-                        <a:spcAft>
-                          <a:spcPts val="0"/>
-                        </a:spcAft>
-                        <a:defRPr sz="1200" b="0">
-                          <a:solidFill>
-                            <a:srgbClr val="21243A"/>
-                          </a:solidFill>
-                          <a:latin typeface="Arial"/>
-                        </a:defRPr>
-                      </a:pPr>
-                      <a:r>
-                        <a:t>Method verdict-consistency-2026-09-26.1: directional model votes require</a:t>
-                      </a:r>
-                    </a:p>
-                    <a:p>
-                      <a:pPr>
-                        <a:lnSpc>
-                          <a:spcPts val="1600"/>
-                        </a:lnSpc>
-                        <a:spcAft>
-                          <a:spcPts val="0"/>
-                        </a:spcAft>
-                        <a:defRPr sz="1200" b="0">
-                          <a:solidFill>
-                            <a:srgbClr val="21243A"/>
-                          </a:solidFill>
-                          <a:latin typeface="Arial"/>
-                        </a:defRPr>
-                      </a:pPr>
-                      <a:r>
-                        <a:t>matching explicit verdicts and rating thresholds. Inconclusive replies retain their</a:t>
-                      </a:r>
-                    </a:p>
-                    <a:p>
-                      <a:pPr>
-                        <a:lnSpc>
-                          <a:spcPts val="1600"/>
-                        </a:lnSpc>
-                        <a:spcAft>
-                          <a:spcPts val="0"/>
-                        </a:spcAft>
-                        <a:defRPr sz="1200" b="0">
-                          <a:solidFill>
-                            <a:srgbClr val="21243A"/>
-                          </a:solidFill>
-                          <a:latin typeface="Arial"/>
-                        </a:defRPr>
-                      </a:pPr>
-                      <a:r>
-                        <a:t>ratings and remain undecided observations.</a:t>
-                      </a:r>
-                    </a:p>
-                  </a:txBody>
-                  <a:tcPr marL="82296" marR="82296" marT="64008" marB="64008">
-                    <a:solidFill>
-                      <a:srgbClr val="FFFFFF"/>
-                    </a:solidFill>
-                  </a:tcPr>
-                </a:tc>
-              </a:tr>
-            </a:tbl>
-          </a:graphicData>
-        </a:graphic>
-      </p:graphicFrame>
-      <p:graphicFrame>
-        <p:nvGraphicFramePr>
-          <p:cNvPr id="9" name="Table 8"/>
-          <p:cNvGraphicFramePr>
-            <a:graphicFrameLocks noGrp="1"/>
-          </p:cNvGraphicFramePr>
-          <p:nvPr/>
-        </p:nvGraphicFramePr>
-        <p:xfrm>
-          <a:off x="365760" y="3009392"/>
-          <a:ext cx="8412479" cy="959103"/>
-        </p:xfrm>
-        <a:graphic>
-          <a:graphicData uri="http://schemas.openxmlformats.org/drawingml/2006/table">
-            <a:tbl>
-              <a:tblPr firstRow="1" bandRow="1">
-                <a:tableStyleId>{5C22544A-7EE6-4342-B048-85BDC9FD1C3A}</a:tableStyleId>
-              </a:tblPr>
-              <a:tblGrid>
-                <a:gridCol w="2271369"/>
-                <a:gridCol w="6141110"/>
-              </a:tblGrid>
-              <a:tr h="959103">
-                <a:tc>
-                  <a:txBody>
-                    <a:bodyPr wrap="none"/>
-                    <a:lstStyle/>
-                    <a:p>
-                      <a:pPr>
-                        <a:lnSpc>
-                          <a:spcPts val="1600"/>
-                        </a:lnSpc>
-                        <a:spcAft>
-                          <a:spcPts val="0"/>
-                        </a:spcAft>
-                        <a:defRPr sz="1200" b="0">
-                          <a:solidFill>
-                            <a:srgbClr val="21243A"/>
-                          </a:solidFill>
-                          <a:latin typeface="Arial"/>
-                        </a:defRPr>
-                      </a:pPr>
-                      <a:r>
                         <a:t>Ingestion note 5</a:t>
                       </a:r>
                     </a:p>
@@ -16500,64 +16355,45 @@
                         </a:defRPr>
                       </a:pPr>
                       <a:r>
-                        <a:t>Presentation copy of saved report aac43583-5a80-4042-988f-028d0b7bfae8. The</a:t>
-                      </a:r>
-                    </a:p>
-                    <a:p>
-                      <a:pPr>
-                        <a:lnSpc>
-                          <a:spcPts val="1600"/>
-                        </a:lnSpc>
-                        <a:spcAft>
-                          <a:spcPts val="0"/>
-                        </a:spcAft>
-                        <a:defRPr sz="1200" b="0">
-                          <a:solidFill>
-                            <a:srgbClr val="21243A"/>
-                          </a:solidFill>
-                          <a:latin typeface="Arial"/>
-                        </a:defRPr>
-                      </a:pPr>
-                      <a:r>
-                        <a:t>descriptive filename replaces the earlier example ID for navigation. Original</a:t>
-                      </a:r>
-                    </a:p>
-                    <a:p>
-                      <a:pPr>
-                        <a:lnSpc>
-                          <a:spcPts val="1600"/>
-                        </a:lnSpc>
-                        <a:spcAft>
-                          <a:spcPts val="0"/>
-                        </a:spcAft>
-                        <a:defRPr sz="1200" b="0">
-                          <a:solidFill>
-                            <a:srgbClr val="21243A"/>
-                          </a:solidFill>
-                          <a:latin typeface="Arial"/>
-                        </a:defRPr>
-                      </a:pPr>
-                      <a:r>
-                        <a:t>analysis dates, provider replies, scores and acquisition context are retained; no</a:t>
-                      </a:r>
-                    </a:p>
-                    <a:p>
-                      <a:pPr>
-                        <a:lnSpc>
-                          <a:spcPts val="1600"/>
-                        </a:lnSpc>
-                        <a:spcAft>
-                          <a:spcPts val="0"/>
-                        </a:spcAft>
-                        <a:defRPr sz="1200" b="0">
-                          <a:solidFill>
-                            <a:srgbClr val="21243A"/>
-                          </a:solidFill>
-                          <a:latin typeface="Arial"/>
-                        </a:defRPr>
-                      </a:pPr>
-                      <a:r>
-                        <a:t>new model analysis.</a:t>
+                        <a:t>Provider latency values are restored from the acquisition receipts (maximum</a:t>
+                      </a:r>
+                    </a:p>
+                    <a:p>
+                      <a:pPr>
+                        <a:lnSpc>
+                          <a:spcPts val="1600"/>
+                        </a:lnSpc>
+                        <a:spcAft>
+                          <a:spcPts val="0"/>
+                        </a:spcAft>
+                        <a:defRPr sz="1200" b="0">
+                          <a:solidFill>
+                            <a:srgbClr val="21243A"/>
+                          </a:solidFill>
+                          <a:latin typeface="Arial"/>
+                        </a:defRPr>
+                      </a:pPr>
+                      <a:r>
+                        <a:t>sampled-frame latency per provider); raw replies and assessment results are</a:t>
+                      </a:r>
+                    </a:p>
+                    <a:p>
+                      <a:pPr>
+                        <a:lnSpc>
+                          <a:spcPts val="1600"/>
+                        </a:lnSpc>
+                        <a:spcAft>
+                          <a:spcPts val="0"/>
+                        </a:spcAft>
+                        <a:defRPr sz="1200" b="0">
+                          <a:solidFill>
+                            <a:srgbClr val="21243A"/>
+                          </a:solidFill>
+                          <a:latin typeface="Arial"/>
+                        </a:defRPr>
+                      </a:pPr>
+                      <a:r>
+                        <a:t>unchanged by this bookkeeping step.</a:t>
                       </a:r>
                     </a:p>
                   </a:txBody>
@@ -17013,7 +16849,7 @@
                         </a:defRPr>
                       </a:pPr>
                       <a:r>
-                        <a:t>inconclusive</a:t>
+                        <a:t>synthetic likely</a:t>
                       </a:r>
                     </a:p>
                   </a:txBody>
@@ -17043,7 +16879,7 @@
                         </a:defRPr>
                       </a:pPr>
                       <a:r>
-                        <a:t>55/100</a:t>
+                        <a:t>62/100</a:t>
                       </a:r>
                     </a:p>
                   </a:txBody>
@@ -17343,7 +17179,7 @@
                         </a:defRPr>
                       </a:pPr>
                       <a:r>
-                        <a:t>28/100</a:t>
+                        <a:t>30/100</a:t>
                       </a:r>
                     </a:p>
                   </a:txBody>
@@ -18269,7 +18105,7 @@
                         </a:defRPr>
                       </a:pPr>
                       <a:r>
-                        <a:t>inconclusive</a:t>
+                        <a:t>synthetic likely</a:t>
                       </a:r>
                     </a:p>
                   </a:txBody>
@@ -18470,7 +18306,7 @@
         </p:nvGraphicFramePr>
         <p:xfrm>
           <a:off x="365760" y="3797808"/>
-          <a:ext cx="8412479" cy="1365503"/>
+          <a:ext cx="8412479" cy="1568704"/>
         </p:xfrm>
         <a:graphic>
           <a:graphicData uri="http://schemas.openxmlformats.org/drawingml/2006/table">
@@ -18482,7 +18318,7 @@
                 <a:gridCol w="2271369"/>
                 <a:gridCol w="6141110"/>
               </a:tblGrid>
-              <a:tr h="1365503">
+              <a:tr h="1568704">
                 <a:tc>
                   <a:txBody>
                     <a:bodyPr wrap="none"/>
@@ -18533,102 +18369,121 @@
                         </a:defRPr>
                       </a:pPr>
                       <a:r>
-                        <a:t>Worst of 4 frames (figure p15): synthetic likelihood 55/100; tells: no camera-photo</a:t>
-                      </a:r>
-                    </a:p>
-                    <a:p>
-                      <a:pPr>
-                        <a:lnSpc>
-                          <a:spcPts val="1600"/>
-                        </a:lnSpc>
-                        <a:spcAft>
-                          <a:spcPts val="0"/>
-                        </a:spcAft>
-                        <a:defRPr sz="1200" b="0">
-                          <a:solidFill>
-                            <a:srgbClr val="21243A"/>
-                          </a:solidFill>
-                          <a:latin typeface="Arial"/>
-                        </a:defRPr>
-                      </a:pPr>
-                      <a:r>
-                        <a:t>content; digitally rendered slide graphic, so photographic forensics (grain, lens</a:t>
-                      </a:r>
-                    </a:p>
-                    <a:p>
-                      <a:pPr>
-                        <a:lnSpc>
-                          <a:spcPts val="1600"/>
-                        </a:lnSpc>
-                        <a:spcAft>
-                          <a:spcPts val="0"/>
-                        </a:spcAft>
-                        <a:defRPr sz="1200" b="0">
-                          <a:solidFill>
-                            <a:srgbClr val="21243A"/>
-                          </a:solidFill>
-                          <a:latin typeface="Arial"/>
-                        </a:defRPr>
-                      </a:pPr>
-                      <a:r>
-                        <a:t>blur, lighting) do not apply, irregular, non-geometric low-poly line networks with</a:t>
-                      </a:r>
-                    </a:p>
-                    <a:p>
-                      <a:pPr>
-                        <a:lnSpc>
-                          <a:spcPts val="1600"/>
-                        </a:lnSpc>
-                        <a:spcAft>
-                          <a:spcPts val="0"/>
-                        </a:spcAft>
-                        <a:defRPr sz="1200" b="0">
-                          <a:solidFill>
-                            <a:srgbClr val="21243A"/>
-                          </a:solidFill>
-                          <a:latin typeface="Arial"/>
-                        </a:defRPr>
-                      </a:pPr>
-                      <a:r>
-                        <a:t>inconsistent node joins and fading, typical of AI image-generator decorative</a:t>
-                      </a:r>
-                    </a:p>
-                    <a:p>
-                      <a:pPr>
-                        <a:lnSpc>
-                          <a:spcPts val="1600"/>
-                        </a:lnSpc>
-                        <a:spcAft>
-                          <a:spcPts val="0"/>
-                        </a:spcAft>
-                        <a:defRPr sz="1200" b="0">
-                          <a:solidFill>
-                            <a:srgbClr val="21243A"/>
-                          </a:solidFill>
-                          <a:latin typeface="Arial"/>
-                        </a:defRPr>
-                      </a:pPr>
-                      <a:r>
-                        <a:t>motifs, red-to-green left/right mirrored decoration with loosely matched</a:t>
-                      </a:r>
-                    </a:p>
-                    <a:p>
-                      <a:pPr>
-                        <a:lnSpc>
-                          <a:spcPts val="1600"/>
-                        </a:lnSpc>
-                        <a:spcAft>
-                          <a:spcPts val="0"/>
-                        </a:spcAft>
-                        <a:defRPr sz="1200" b="0">
-                          <a:solidFill>
-                            <a:srgbClr val="21243A"/>
-                          </a:solidFill>
-                          <a:latin typeface="Arial"/>
-                        </a:defRPr>
-                      </a:pPr>
-                      <a:r>
-                        <a:t>structure, heavy bold text with slightly soft drop-shadow/halo edges on headline</a:t>
+                        <a:t>Worst of 4 frames (figure p15): synthetic likelihood 62/100; tells: not a camera</a:t>
+                      </a:r>
+                    </a:p>
+                    <a:p>
+                      <a:pPr>
+                        <a:lnSpc>
+                          <a:spcPts val="1600"/>
+                        </a:lnSpc>
+                        <a:spcAft>
+                          <a:spcPts val="0"/>
+                        </a:spcAft>
+                        <a:defRPr sz="1200" b="0">
+                          <a:solidFill>
+                            <a:srgbClr val="21243A"/>
+                          </a:solidFill>
+                          <a:latin typeface="Arial"/>
+                        </a:defRPr>
+                      </a:pPr>
+                      <a:r>
+                        <a:t>photo: flat digital graphic/slide, so photographic forensics (sensor noise, lens blur,</a:t>
+                      </a:r>
+                    </a:p>
+                    <a:p>
+                      <a:pPr>
+                        <a:lnSpc>
+                          <a:spcPts val="1600"/>
+                        </a:lnSpc>
+                        <a:spcAft>
+                          <a:spcPts val="0"/>
+                        </a:spcAft>
+                        <a:defRPr sz="1200" b="0">
+                          <a:solidFill>
+                            <a:srgbClr val="21243A"/>
+                          </a:solidFill>
+                          <a:latin typeface="Arial"/>
+                        </a:defRPr>
+                      </a:pPr>
+                      <a:r>
+                        <a:t>lighting) do not apply, inconsistent centering of body text lines, with ragged,</a:t>
+                      </a:r>
+                    </a:p>
+                    <a:p>
+                      <a:pPr>
+                        <a:lnSpc>
+                          <a:spcPts val="1600"/>
+                        </a:lnSpc>
+                        <a:spcAft>
+                          <a:spcPts val="0"/>
+                        </a:spcAft>
+                        <a:defRPr sz="1200" b="0">
+                          <a:solidFill>
+                            <a:srgbClr val="21243A"/>
+                          </a:solidFill>
+                          <a:latin typeface="Arial"/>
+                        </a:defRPr>
+                      </a:pPr>
+                      <a:r>
+                        <a:t>uneven offsets unlike typical layout-software alignment, polygonal network</a:t>
+                      </a:r>
+                    </a:p>
+                    <a:p>
+                      <a:pPr>
+                        <a:lnSpc>
+                          <a:spcPts val="1600"/>
+                        </a:lnSpc>
+                        <a:spcAft>
+                          <a:spcPts val="0"/>
+                        </a:spcAft>
+                        <a:defRPr sz="1200" b="0">
+                          <a:solidFill>
+                            <a:srgbClr val="21243A"/>
+                          </a:solidFill>
+                          <a:latin typeface="Arial"/>
+                        </a:defRPr>
+                      </a:pPr>
+                      <a:r>
+                        <a:t>line-art with segments that end in mid-air, fade unevenly, and break into stray</a:t>
+                      </a:r>
+                    </a:p>
+                    <a:p>
+                      <a:pPr>
+                        <a:lnSpc>
+                          <a:spcPts val="1600"/>
+                        </a:lnSpc>
+                        <a:spcAft>
+                          <a:spcPts val="0"/>
+                        </a:spcAft>
+                        <a:defRPr sz="1200" b="0">
+                          <a:solidFill>
+                            <a:srgbClr val="21243A"/>
+                          </a:solidFill>
+                          <a:latin typeface="Arial"/>
+                        </a:defRPr>
+                      </a:pPr>
+                      <a:r>
+                        <a:t>dashed fragments on the left, faint mottled texture in the flat background,</a:t>
+                      </a:r>
+                    </a:p>
+                    <a:p>
+                      <a:pPr>
+                        <a:lnSpc>
+                          <a:spcPts val="1600"/>
+                        </a:lnSpc>
+                        <a:spcAft>
+                          <a:spcPts val="0"/>
+                        </a:spcAft>
+                        <a:defRPr sz="1200" b="0">
+                          <a:solidFill>
+                            <a:srgbClr val="21243A"/>
+                          </a:solidFill>
+                          <a:latin typeface="Arial"/>
+                        </a:defRPr>
+                      </a:pPr>
+                      <a:r>
+                        <a:t>atypical of vector-exported slides</a:t>
                       </a:r>
                     </a:p>
                   </a:txBody>
@@ -18652,7 +18507,7 @@
           <p:nvPr/>
         </p:nvGraphicFramePr>
         <p:xfrm>
-          <a:off x="365760" y="5163312"/>
+          <a:off x="365760" y="5366512"/>
           <a:ext cx="8412479" cy="349504"/>
         </p:xfrm>
         <a:graphic>
@@ -18716,101 +18571,13 @@
                         </a:defRPr>
                       </a:pPr>
                       <a:r>
-                        <a:t>Frame figure p1: 45/100</a:t>
+                        <a:t>Frame figure p1: 40/100</a:t>
                       </a:r>
                     </a:p>
                   </a:txBody>
                   <a:tcPr marL="82296" marR="82296" marT="64008" marB="64008">
                     <a:solidFill>
                       <a:srgbClr val="FFFFFF"/>
-                    </a:solidFill>
-                  </a:tcPr>
-                </a:tc>
-              </a:tr>
-            </a:tbl>
-          </a:graphicData>
-        </a:graphic>
-      </p:graphicFrame>
-      <p:graphicFrame>
-        <p:nvGraphicFramePr>
-          <p:cNvPr id="15" name="Table 14"/>
-          <p:cNvGraphicFramePr>
-            <a:graphicFrameLocks noGrp="1"/>
-          </p:cNvGraphicFramePr>
-          <p:nvPr/>
-        </p:nvGraphicFramePr>
-        <p:xfrm>
-          <a:off x="365760" y="5512816"/>
-          <a:ext cx="8412479" cy="349504"/>
-        </p:xfrm>
-        <a:graphic>
-          <a:graphicData uri="http://schemas.openxmlformats.org/drawingml/2006/table">
-            <a:tbl>
-              <a:tblPr firstRow="1" bandRow="1">
-                <a:tableStyleId>{5C22544A-7EE6-4342-B048-85BDC9FD1C3A}</a:tableStyleId>
-              </a:tblPr>
-              <a:tblGrid>
-                <a:gridCol w="2271369"/>
-                <a:gridCol w="6141110"/>
-              </a:tblGrid>
-              <a:tr h="349504">
-                <a:tc>
-                  <a:txBody>
-                    <a:bodyPr wrap="none"/>
-                    <a:lstStyle/>
-                    <a:p>
-                      <a:pPr>
-                        <a:lnSpc>
-                          <a:spcPts val="1600"/>
-                        </a:lnSpc>
-                        <a:spcAft>
-                          <a:spcPts val="0"/>
-                        </a:spcAft>
-                        <a:defRPr sz="1200" b="0">
-                          <a:solidFill>
-                            <a:srgbClr val="21243A"/>
-                          </a:solidFill>
-                          <a:latin typeface="Arial"/>
-                        </a:defRPr>
-                      </a:pPr>
-                      <a:r>
-                        <a:t>Evidence 2</a:t>
-                      </a:r>
-                    </a:p>
-                  </a:txBody>
-                  <a:tcPr marL="82296" marR="82296" marT="64008" marB="64008">
-                    <a:solidFill>
-                      <a:srgbClr val="F1F7F7"/>
-                    </a:solidFill>
-                  </a:tcPr>
-                </a:tc>
-                <a:tc>
-                  <a:txBody>
-                    <a:bodyPr wrap="none"/>
-                    <a:lstStyle/>
-                    <a:p>
-                      <a:pPr>
-                        <a:lnSpc>
-                          <a:spcPts val="1600"/>
-                        </a:lnSpc>
-                        <a:spcAft>
-                          <a:spcPts val="0"/>
-                        </a:spcAft>
-                        <a:defRPr sz="1200" b="0">
-                          <a:solidFill>
-                            <a:srgbClr val="21243A"/>
-                          </a:solidFill>
-                          <a:latin typeface="Arial"/>
-                        </a:defRPr>
-                      </a:pPr>
-                      <a:r>
-                        <a:t>Frame figure p6: 40/100</a:t>
-                      </a:r>
-                    </a:p>
-                  </a:txBody>
-                  <a:tcPr marL="82296" marR="82296" marT="64008" marB="64008">
-                    <a:solidFill>
-                      <a:srgbClr val="F1F7F7"/>
                     </a:solidFill>
                   </a:tcPr>
                 </a:tc>
@@ -19136,43 +18903,43 @@
                         </a:defRPr>
                       </a:pPr>
                       <a:r>
-                        <a:t>Evidence 3</a:t>
-                      </a:r>
-                    </a:p>
-                  </a:txBody>
-                  <a:tcPr marL="82296" marR="82296" marT="64008" marB="64008">
-                    <a:solidFill>
-                      <a:srgbClr val="FFFFFF"/>
-                    </a:solidFill>
-                  </a:tcPr>
-                </a:tc>
-                <a:tc>
-                  <a:txBody>
-                    <a:bodyPr wrap="none"/>
-                    <a:lstStyle/>
-                    <a:p>
-                      <a:pPr>
-                        <a:lnSpc>
-                          <a:spcPts val="1600"/>
-                        </a:lnSpc>
-                        <a:spcAft>
-                          <a:spcPts val="0"/>
-                        </a:spcAft>
-                        <a:defRPr sz="1200" b="0">
-                          <a:solidFill>
-                            <a:srgbClr val="21243A"/>
-                          </a:solidFill>
-                          <a:latin typeface="Arial"/>
-                        </a:defRPr>
-                      </a:pPr>
-                      <a:r>
-                        <a:t>Frame figure p10: 35/100</a:t>
-                      </a:r>
-                    </a:p>
-                  </a:txBody>
-                  <a:tcPr marL="82296" marR="82296" marT="64008" marB="64008">
-                    <a:solidFill>
-                      <a:srgbClr val="FFFFFF"/>
+                        <a:t>Evidence 2</a:t>
+                      </a:r>
+                    </a:p>
+                  </a:txBody>
+                  <a:tcPr marL="82296" marR="82296" marT="64008" marB="64008">
+                    <a:solidFill>
+                      <a:srgbClr val="F1F7F7"/>
+                    </a:solidFill>
+                  </a:tcPr>
+                </a:tc>
+                <a:tc>
+                  <a:txBody>
+                    <a:bodyPr wrap="none"/>
+                    <a:lstStyle/>
+                    <a:p>
+                      <a:pPr>
+                        <a:lnSpc>
+                          <a:spcPts val="1600"/>
+                        </a:lnSpc>
+                        <a:spcAft>
+                          <a:spcPts val="0"/>
+                        </a:spcAft>
+                        <a:defRPr sz="1200" b="0">
+                          <a:solidFill>
+                            <a:srgbClr val="21243A"/>
+                          </a:solidFill>
+                          <a:latin typeface="Arial"/>
+                        </a:defRPr>
+                      </a:pPr>
+                      <a:r>
+                        <a:t>Frame figure p6: 45/100</a:t>
+                      </a:r>
+                    </a:p>
+                  </a:txBody>
+                  <a:tcPr marL="82296" marR="82296" marT="64008" marB="64008">
+                    <a:solidFill>
+                      <a:srgbClr val="F1F7F7"/>
                     </a:solidFill>
                   </a:tcPr>
                 </a:tc>
@@ -19224,43 +18991,43 @@
                         </a:defRPr>
                       </a:pPr>
                       <a:r>
-                        <a:t>Evidence 4</a:t>
-                      </a:r>
-                    </a:p>
-                  </a:txBody>
-                  <a:tcPr marL="82296" marR="82296" marT="64008" marB="64008">
-                    <a:solidFill>
-                      <a:srgbClr val="F1F7F7"/>
-                    </a:solidFill>
-                  </a:tcPr>
-                </a:tc>
-                <a:tc>
-                  <a:txBody>
-                    <a:bodyPr wrap="none"/>
-                    <a:lstStyle/>
-                    <a:p>
-                      <a:pPr>
-                        <a:lnSpc>
-                          <a:spcPts val="1600"/>
-                        </a:lnSpc>
-                        <a:spcAft>
-                          <a:spcPts val="0"/>
-                        </a:spcAft>
-                        <a:defRPr sz="1200" b="0">
-                          <a:solidFill>
-                            <a:srgbClr val="21243A"/>
-                          </a:solidFill>
-                          <a:latin typeface="Arial"/>
-                        </a:defRPr>
-                      </a:pPr>
-                      <a:r>
-                        <a:t>Frame figure p15: 55/100</a:t>
-                      </a:r>
-                    </a:p>
-                  </a:txBody>
-                  <a:tcPr marL="82296" marR="82296" marT="64008" marB="64008">
-                    <a:solidFill>
-                      <a:srgbClr val="F1F7F7"/>
+                        <a:t>Evidence 3</a:t>
+                      </a:r>
+                    </a:p>
+                  </a:txBody>
+                  <a:tcPr marL="82296" marR="82296" marT="64008" marB="64008">
+                    <a:solidFill>
+                      <a:srgbClr val="FFFFFF"/>
+                    </a:solidFill>
+                  </a:tcPr>
+                </a:tc>
+                <a:tc>
+                  <a:txBody>
+                    <a:bodyPr wrap="none"/>
+                    <a:lstStyle/>
+                    <a:p>
+                      <a:pPr>
+                        <a:lnSpc>
+                          <a:spcPts val="1600"/>
+                        </a:lnSpc>
+                        <a:spcAft>
+                          <a:spcPts val="0"/>
+                        </a:spcAft>
+                        <a:defRPr sz="1200" b="0">
+                          <a:solidFill>
+                            <a:srgbClr val="21243A"/>
+                          </a:solidFill>
+                          <a:latin typeface="Arial"/>
+                        </a:defRPr>
+                      </a:pPr>
+                      <a:r>
+                        <a:t>Frame figure p10: 45/100</a:t>
+                      </a:r>
+                    </a:p>
+                  </a:txBody>
+                  <a:tcPr marL="82296" marR="82296" marT="64008" marB="64008">
+                    <a:solidFill>
+                      <a:srgbClr val="FFFFFF"/>
                     </a:solidFill>
                   </a:tcPr>
                 </a:tc>
@@ -19279,7 +19046,7 @@
         </p:nvGraphicFramePr>
         <p:xfrm>
           <a:off x="365760" y="2399792"/>
-          <a:ext cx="8412479" cy="552704"/>
+          <a:ext cx="8412479" cy="349504"/>
         </p:xfrm>
         <a:graphic>
           <a:graphicData uri="http://schemas.openxmlformats.org/drawingml/2006/table">
@@ -19291,83 +19058,64 @@
                 <a:gridCol w="2271369"/>
                 <a:gridCol w="6141110"/>
               </a:tblGrid>
-              <a:tr h="552704">
-                <a:tc>
-                  <a:txBody>
-                    <a:bodyPr wrap="none"/>
-                    <a:lstStyle/>
-                    <a:p>
-                      <a:pPr>
-                        <a:lnSpc>
-                          <a:spcPts val="1600"/>
-                        </a:lnSpc>
-                        <a:spcAft>
-                          <a:spcPts val="0"/>
-                        </a:spcAft>
-                        <a:defRPr sz="1200" b="0">
-                          <a:solidFill>
-                            <a:srgbClr val="21243A"/>
-                          </a:solidFill>
-                          <a:latin typeface="Arial"/>
-                        </a:defRPr>
-                      </a:pPr>
-                      <a:r>
-                        <a:t>Evidence 5</a:t>
-                      </a:r>
-                    </a:p>
-                  </a:txBody>
-                  <a:tcPr marL="82296" marR="82296" marT="64008" marB="64008">
-                    <a:solidFill>
-                      <a:srgbClr val="FFFFFF"/>
-                    </a:solidFill>
-                  </a:tcPr>
-                </a:tc>
-                <a:tc>
-                  <a:txBody>
-                    <a:bodyPr wrap="none"/>
-                    <a:lstStyle/>
-                    <a:p>
-                      <a:pPr>
-                        <a:lnSpc>
-                          <a:spcPts val="1600"/>
-                        </a:lnSpc>
-                        <a:spcAft>
-                          <a:spcPts val="0"/>
-                        </a:spcAft>
-                        <a:defRPr sz="1200" b="0">
-                          <a:solidFill>
-                            <a:srgbClr val="21243A"/>
-                          </a:solidFill>
-                          <a:latin typeface="Arial"/>
-                        </a:defRPr>
-                      </a:pPr>
-                      <a:r>
-                        <a:t>No camera-photo content; digitally rendered slide graphic, so photographic</a:t>
-                      </a:r>
-                    </a:p>
-                    <a:p>
-                      <a:pPr>
-                        <a:lnSpc>
-                          <a:spcPts val="1600"/>
-                        </a:lnSpc>
-                        <a:spcAft>
-                          <a:spcPts val="0"/>
-                        </a:spcAft>
-                        <a:defRPr sz="1200" b="0">
-                          <a:solidFill>
-                            <a:srgbClr val="21243A"/>
-                          </a:solidFill>
-                          <a:latin typeface="Arial"/>
-                        </a:defRPr>
-                      </a:pPr>
-                      <a:r>
-                        <a:t>forensics (grain, lens blur, lighting) do not apply</a:t>
-                      </a:r>
-                    </a:p>
-                  </a:txBody>
-                  <a:tcPr marL="82296" marR="82296" marT="64008" marB="64008">
-                    <a:solidFill>
-                      <a:srgbClr val="FFFFFF"/>
+              <a:tr h="349504">
+                <a:tc>
+                  <a:txBody>
+                    <a:bodyPr wrap="none"/>
+                    <a:lstStyle/>
+                    <a:p>
+                      <a:pPr>
+                        <a:lnSpc>
+                          <a:spcPts val="1600"/>
+                        </a:lnSpc>
+                        <a:spcAft>
+                          <a:spcPts val="0"/>
+                        </a:spcAft>
+                        <a:defRPr sz="1200" b="0">
+                          <a:solidFill>
+                            <a:srgbClr val="21243A"/>
+                          </a:solidFill>
+                          <a:latin typeface="Arial"/>
+                        </a:defRPr>
+                      </a:pPr>
+                      <a:r>
+                        <a:t>Evidence 4</a:t>
+                      </a:r>
+                    </a:p>
+                  </a:txBody>
+                  <a:tcPr marL="82296" marR="82296" marT="64008" marB="64008">
+                    <a:solidFill>
+                      <a:srgbClr val="F1F7F7"/>
+                    </a:solidFill>
+                  </a:tcPr>
+                </a:tc>
+                <a:tc>
+                  <a:txBody>
+                    <a:bodyPr wrap="none"/>
+                    <a:lstStyle/>
+                    <a:p>
+                      <a:pPr>
+                        <a:lnSpc>
+                          <a:spcPts val="1600"/>
+                        </a:lnSpc>
+                        <a:spcAft>
+                          <a:spcPts val="0"/>
+                        </a:spcAft>
+                        <a:defRPr sz="1200" b="0">
+                          <a:solidFill>
+                            <a:srgbClr val="21243A"/>
+                          </a:solidFill>
+                          <a:latin typeface="Arial"/>
+                        </a:defRPr>
+                      </a:pPr>
+                      <a:r>
+                        <a:t>Frame figure p15: 62/100</a:t>
+                      </a:r>
+                    </a:p>
+                  </a:txBody>
+                  <a:tcPr marL="82296" marR="82296" marT="64008" marB="64008">
+                    <a:solidFill>
+                      <a:srgbClr val="F1F7F7"/>
                     </a:solidFill>
                   </a:tcPr>
                 </a:tc>
@@ -19385,7 +19133,7 @@
           <p:nvPr/>
         </p:nvGraphicFramePr>
         <p:xfrm>
-          <a:off x="365760" y="2952496"/>
+          <a:off x="365760" y="2749296"/>
           <a:ext cx="8412479" cy="552704"/>
         </p:xfrm>
         <a:graphic>
@@ -19419,62 +19167,62 @@
                         </a:defRPr>
                       </a:pPr>
                       <a:r>
-                        <a:t>Evidence 6</a:t>
-                      </a:r>
-                    </a:p>
-                  </a:txBody>
-                  <a:tcPr marL="82296" marR="82296" marT="64008" marB="64008">
-                    <a:solidFill>
-                      <a:srgbClr val="F1F7F7"/>
-                    </a:solidFill>
-                  </a:tcPr>
-                </a:tc>
-                <a:tc>
-                  <a:txBody>
-                    <a:bodyPr wrap="none"/>
-                    <a:lstStyle/>
-                    <a:p>
-                      <a:pPr>
-                        <a:lnSpc>
-                          <a:spcPts val="1600"/>
-                        </a:lnSpc>
-                        <a:spcAft>
-                          <a:spcPts val="0"/>
-                        </a:spcAft>
-                        <a:defRPr sz="1200" b="0">
-                          <a:solidFill>
-                            <a:srgbClr val="21243A"/>
-                          </a:solidFill>
-                          <a:latin typeface="Arial"/>
-                        </a:defRPr>
-                      </a:pPr>
-                      <a:r>
-                        <a:t>Irregular, non-geometric low-poly line networks with inconsistent node joins and</a:t>
-                      </a:r>
-                    </a:p>
-                    <a:p>
-                      <a:pPr>
-                        <a:lnSpc>
-                          <a:spcPts val="1600"/>
-                        </a:lnSpc>
-                        <a:spcAft>
-                          <a:spcPts val="0"/>
-                        </a:spcAft>
-                        <a:defRPr sz="1200" b="0">
-                          <a:solidFill>
-                            <a:srgbClr val="21243A"/>
-                          </a:solidFill>
-                          <a:latin typeface="Arial"/>
-                        </a:defRPr>
-                      </a:pPr>
-                      <a:r>
-                        <a:t>fading, typical of AI image-generator decorative motifs</a:t>
-                      </a:r>
-                    </a:p>
-                  </a:txBody>
-                  <a:tcPr marL="82296" marR="82296" marT="64008" marB="64008">
-                    <a:solidFill>
-                      <a:srgbClr val="F1F7F7"/>
+                        <a:t>Evidence 5</a:t>
+                      </a:r>
+                    </a:p>
+                  </a:txBody>
+                  <a:tcPr marL="82296" marR="82296" marT="64008" marB="64008">
+                    <a:solidFill>
+                      <a:srgbClr val="FFFFFF"/>
+                    </a:solidFill>
+                  </a:tcPr>
+                </a:tc>
+                <a:tc>
+                  <a:txBody>
+                    <a:bodyPr wrap="none"/>
+                    <a:lstStyle/>
+                    <a:p>
+                      <a:pPr>
+                        <a:lnSpc>
+                          <a:spcPts val="1600"/>
+                        </a:lnSpc>
+                        <a:spcAft>
+                          <a:spcPts val="0"/>
+                        </a:spcAft>
+                        <a:defRPr sz="1200" b="0">
+                          <a:solidFill>
+                            <a:srgbClr val="21243A"/>
+                          </a:solidFill>
+                          <a:latin typeface="Arial"/>
+                        </a:defRPr>
+                      </a:pPr>
+                      <a:r>
+                        <a:t>Not a camera photo: flat digital graphic/slide, so photographic forensics (sensor</a:t>
+                      </a:r>
+                    </a:p>
+                    <a:p>
+                      <a:pPr>
+                        <a:lnSpc>
+                          <a:spcPts val="1600"/>
+                        </a:lnSpc>
+                        <a:spcAft>
+                          <a:spcPts val="0"/>
+                        </a:spcAft>
+                        <a:defRPr sz="1200" b="0">
+                          <a:solidFill>
+                            <a:srgbClr val="21243A"/>
+                          </a:solidFill>
+                          <a:latin typeface="Arial"/>
+                        </a:defRPr>
+                      </a:pPr>
+                      <a:r>
+                        <a:t>noise, lens blur, lighting) do not apply</a:t>
+                      </a:r>
+                    </a:p>
+                  </a:txBody>
+                  <a:tcPr marL="82296" marR="82296" marT="64008" marB="64008">
+                    <a:solidFill>
+                      <a:srgbClr val="FFFFFF"/>
                     </a:solidFill>
                   </a:tcPr>
                 </a:tc>
@@ -19492,8 +19240,8 @@
           <p:nvPr/>
         </p:nvGraphicFramePr>
         <p:xfrm>
-          <a:off x="365760" y="3505199"/>
-          <a:ext cx="8412479" cy="349504"/>
+          <a:off x="365760" y="3302000"/>
+          <a:ext cx="8412479" cy="552704"/>
         </p:xfrm>
         <a:graphic>
           <a:graphicData uri="http://schemas.openxmlformats.org/drawingml/2006/table">
@@ -19505,64 +19253,83 @@
                 <a:gridCol w="2271369"/>
                 <a:gridCol w="6141110"/>
               </a:tblGrid>
-              <a:tr h="349504">
-                <a:tc>
-                  <a:txBody>
-                    <a:bodyPr wrap="none"/>
-                    <a:lstStyle/>
-                    <a:p>
-                      <a:pPr>
-                        <a:lnSpc>
-                          <a:spcPts val="1600"/>
-                        </a:lnSpc>
-                        <a:spcAft>
-                          <a:spcPts val="0"/>
-                        </a:spcAft>
-                        <a:defRPr sz="1200" b="0">
-                          <a:solidFill>
-                            <a:srgbClr val="21243A"/>
-                          </a:solidFill>
-                          <a:latin typeface="Arial"/>
-                        </a:defRPr>
-                      </a:pPr>
-                      <a:r>
-                        <a:t>Evidence 7</a:t>
-                      </a:r>
-                    </a:p>
-                  </a:txBody>
-                  <a:tcPr marL="82296" marR="82296" marT="64008" marB="64008">
-                    <a:solidFill>
-                      <a:srgbClr val="FFFFFF"/>
-                    </a:solidFill>
-                  </a:tcPr>
-                </a:tc>
-                <a:tc>
-                  <a:txBody>
-                    <a:bodyPr wrap="none"/>
-                    <a:lstStyle/>
-                    <a:p>
-                      <a:pPr>
-                        <a:lnSpc>
-                          <a:spcPts val="1600"/>
-                        </a:lnSpc>
-                        <a:spcAft>
-                          <a:spcPts val="0"/>
-                        </a:spcAft>
-                        <a:defRPr sz="1200" b="0">
-                          <a:solidFill>
-                            <a:srgbClr val="21243A"/>
-                          </a:solidFill>
-                          <a:latin typeface="Arial"/>
-                        </a:defRPr>
-                      </a:pPr>
-                      <a:r>
-                        <a:t>Red-to-green left/right mirrored decoration with loosely matched structure</a:t>
-                      </a:r>
-                    </a:p>
-                  </a:txBody>
-                  <a:tcPr marL="82296" marR="82296" marT="64008" marB="64008">
-                    <a:solidFill>
-                      <a:srgbClr val="FFFFFF"/>
+              <a:tr h="552704">
+                <a:tc>
+                  <a:txBody>
+                    <a:bodyPr wrap="none"/>
+                    <a:lstStyle/>
+                    <a:p>
+                      <a:pPr>
+                        <a:lnSpc>
+                          <a:spcPts val="1600"/>
+                        </a:lnSpc>
+                        <a:spcAft>
+                          <a:spcPts val="0"/>
+                        </a:spcAft>
+                        <a:defRPr sz="1200" b="0">
+                          <a:solidFill>
+                            <a:srgbClr val="21243A"/>
+                          </a:solidFill>
+                          <a:latin typeface="Arial"/>
+                        </a:defRPr>
+                      </a:pPr>
+                      <a:r>
+                        <a:t>Evidence 6</a:t>
+                      </a:r>
+                    </a:p>
+                  </a:txBody>
+                  <a:tcPr marL="82296" marR="82296" marT="64008" marB="64008">
+                    <a:solidFill>
+                      <a:srgbClr val="F1F7F7"/>
+                    </a:solidFill>
+                  </a:tcPr>
+                </a:tc>
+                <a:tc>
+                  <a:txBody>
+                    <a:bodyPr wrap="none"/>
+                    <a:lstStyle/>
+                    <a:p>
+                      <a:pPr>
+                        <a:lnSpc>
+                          <a:spcPts val="1600"/>
+                        </a:lnSpc>
+                        <a:spcAft>
+                          <a:spcPts val="0"/>
+                        </a:spcAft>
+                        <a:defRPr sz="1200" b="0">
+                          <a:solidFill>
+                            <a:srgbClr val="21243A"/>
+                          </a:solidFill>
+                          <a:latin typeface="Arial"/>
+                        </a:defRPr>
+                      </a:pPr>
+                      <a:r>
+                        <a:t>Inconsistent centering of body text lines, with ragged, uneven offsets unlike</a:t>
+                      </a:r>
+                    </a:p>
+                    <a:p>
+                      <a:pPr>
+                        <a:lnSpc>
+                          <a:spcPts val="1600"/>
+                        </a:lnSpc>
+                        <a:spcAft>
+                          <a:spcPts val="0"/>
+                        </a:spcAft>
+                        <a:defRPr sz="1200" b="0">
+                          <a:solidFill>
+                            <a:srgbClr val="21243A"/>
+                          </a:solidFill>
+                          <a:latin typeface="Arial"/>
+                        </a:defRPr>
+                      </a:pPr>
+                      <a:r>
+                        <a:t>typical layout-software alignment</a:t>
+                      </a:r>
+                    </a:p>
+                  </a:txBody>
+                  <a:tcPr marL="82296" marR="82296" marT="64008" marB="64008">
+                    <a:solidFill>
+                      <a:srgbClr val="F1F7F7"/>
                     </a:solidFill>
                   </a:tcPr>
                 </a:tc>
@@ -19581,7 +19348,7 @@
         </p:nvGraphicFramePr>
         <p:xfrm>
           <a:off x="365760" y="3854704"/>
-          <a:ext cx="8412479" cy="349504"/>
+          <a:ext cx="8412479" cy="552704"/>
         </p:xfrm>
         <a:graphic>
           <a:graphicData uri="http://schemas.openxmlformats.org/drawingml/2006/table">
@@ -19593,64 +19360,83 @@
                 <a:gridCol w="2271369"/>
                 <a:gridCol w="6141110"/>
               </a:tblGrid>
-              <a:tr h="349504">
-                <a:tc>
-                  <a:txBody>
-                    <a:bodyPr wrap="none"/>
-                    <a:lstStyle/>
-                    <a:p>
-                      <a:pPr>
-                        <a:lnSpc>
-                          <a:spcPts val="1600"/>
-                        </a:lnSpc>
-                        <a:spcAft>
-                          <a:spcPts val="0"/>
-                        </a:spcAft>
-                        <a:defRPr sz="1200" b="0">
-                          <a:solidFill>
-                            <a:srgbClr val="21243A"/>
-                          </a:solidFill>
-                          <a:latin typeface="Arial"/>
-                        </a:defRPr>
-                      </a:pPr>
-                      <a:r>
-                        <a:t>Evidence 8</a:t>
-                      </a:r>
-                    </a:p>
-                  </a:txBody>
-                  <a:tcPr marL="82296" marR="82296" marT="64008" marB="64008">
-                    <a:solidFill>
-                      <a:srgbClr val="F1F7F7"/>
-                    </a:solidFill>
-                  </a:tcPr>
-                </a:tc>
-                <a:tc>
-                  <a:txBody>
-                    <a:bodyPr wrap="none"/>
-                    <a:lstStyle/>
-                    <a:p>
-                      <a:pPr>
-                        <a:lnSpc>
-                          <a:spcPts val="1600"/>
-                        </a:lnSpc>
-                        <a:spcAft>
-                          <a:spcPts val="0"/>
-                        </a:spcAft>
-                        <a:defRPr sz="1200" b="0">
-                          <a:solidFill>
-                            <a:srgbClr val="21243A"/>
-                          </a:solidFill>
-                          <a:latin typeface="Arial"/>
-                        </a:defRPr>
-                      </a:pPr>
-                      <a:r>
-                        <a:t>Heavy bold text with slightly soft drop-shadow/halo edges on headline</a:t>
-                      </a:r>
-                    </a:p>
-                  </a:txBody>
-                  <a:tcPr marL="82296" marR="82296" marT="64008" marB="64008">
-                    <a:solidFill>
-                      <a:srgbClr val="F1F7F7"/>
+              <a:tr h="552704">
+                <a:tc>
+                  <a:txBody>
+                    <a:bodyPr wrap="none"/>
+                    <a:lstStyle/>
+                    <a:p>
+                      <a:pPr>
+                        <a:lnSpc>
+                          <a:spcPts val="1600"/>
+                        </a:lnSpc>
+                        <a:spcAft>
+                          <a:spcPts val="0"/>
+                        </a:spcAft>
+                        <a:defRPr sz="1200" b="0">
+                          <a:solidFill>
+                            <a:srgbClr val="21243A"/>
+                          </a:solidFill>
+                          <a:latin typeface="Arial"/>
+                        </a:defRPr>
+                      </a:pPr>
+                      <a:r>
+                        <a:t>Evidence 7</a:t>
+                      </a:r>
+                    </a:p>
+                  </a:txBody>
+                  <a:tcPr marL="82296" marR="82296" marT="64008" marB="64008">
+                    <a:solidFill>
+                      <a:srgbClr val="FFFFFF"/>
+                    </a:solidFill>
+                  </a:tcPr>
+                </a:tc>
+                <a:tc>
+                  <a:txBody>
+                    <a:bodyPr wrap="none"/>
+                    <a:lstStyle/>
+                    <a:p>
+                      <a:pPr>
+                        <a:lnSpc>
+                          <a:spcPts val="1600"/>
+                        </a:lnSpc>
+                        <a:spcAft>
+                          <a:spcPts val="0"/>
+                        </a:spcAft>
+                        <a:defRPr sz="1200" b="0">
+                          <a:solidFill>
+                            <a:srgbClr val="21243A"/>
+                          </a:solidFill>
+                          <a:latin typeface="Arial"/>
+                        </a:defRPr>
+                      </a:pPr>
+                      <a:r>
+                        <a:t>Polygonal network line-art with segments that end in mid-air, fade unevenly, and</a:t>
+                      </a:r>
+                    </a:p>
+                    <a:p>
+                      <a:pPr>
+                        <a:lnSpc>
+                          <a:spcPts val="1600"/>
+                        </a:lnSpc>
+                        <a:spcAft>
+                          <a:spcPts val="0"/>
+                        </a:spcAft>
+                        <a:defRPr sz="1200" b="0">
+                          <a:solidFill>
+                            <a:srgbClr val="21243A"/>
+                          </a:solidFill>
+                          <a:latin typeface="Arial"/>
+                        </a:defRPr>
+                      </a:pPr>
+                      <a:r>
+                        <a:t>break into stray dashed fragments on the left</a:t>
+                      </a:r>
+                    </a:p>
+                  </a:txBody>
+                  <a:tcPr marL="82296" marR="82296" marT="64008" marB="64008">
+                    <a:solidFill>
+                      <a:srgbClr val="FFFFFF"/>
                     </a:solidFill>
                   </a:tcPr>
                 </a:tc>
@@ -19668,7 +19454,7 @@
           <p:nvPr/>
         </p:nvGraphicFramePr>
         <p:xfrm>
-          <a:off x="365760" y="4204208"/>
+          <a:off x="365760" y="4407408"/>
           <a:ext cx="8412479" cy="349504"/>
         </p:xfrm>
         <a:graphic>
@@ -19702,43 +19488,43 @@
                         </a:defRPr>
                       </a:pPr>
                       <a:r>
-                        <a:t>Evidence 9</a:t>
-                      </a:r>
-                    </a:p>
-                  </a:txBody>
-                  <a:tcPr marL="82296" marR="82296" marT="64008" marB="64008">
-                    <a:solidFill>
-                      <a:srgbClr val="FFFFFF"/>
-                    </a:solidFill>
-                  </a:tcPr>
-                </a:tc>
-                <a:tc>
-                  <a:txBody>
-                    <a:bodyPr wrap="none"/>
-                    <a:lstStyle/>
-                    <a:p>
-                      <a:pPr>
-                        <a:lnSpc>
-                          <a:spcPts val="1600"/>
-                        </a:lnSpc>
-                        <a:spcAft>
-                          <a:spcPts val="0"/>
-                        </a:spcAft>
-                        <a:defRPr sz="1200" b="0">
-                          <a:solidFill>
-                            <a:srgbClr val="21243A"/>
-                          </a:solidFill>
-                          <a:latin typeface="Arial"/>
-                        </a:defRPr>
-                      </a:pPr>
-                      <a:r>
-                        <a:t>Slightly uneven centred line breaks in body text</a:t>
-                      </a:r>
-                    </a:p>
-                  </a:txBody>
-                  <a:tcPr marL="82296" marR="82296" marT="64008" marB="64008">
-                    <a:solidFill>
-                      <a:srgbClr val="FFFFFF"/>
+                        <a:t>Evidence 8</a:t>
+                      </a:r>
+                    </a:p>
+                  </a:txBody>
+                  <a:tcPr marL="82296" marR="82296" marT="64008" marB="64008">
+                    <a:solidFill>
+                      <a:srgbClr val="F1F7F7"/>
+                    </a:solidFill>
+                  </a:tcPr>
+                </a:tc>
+                <a:tc>
+                  <a:txBody>
+                    <a:bodyPr wrap="none"/>
+                    <a:lstStyle/>
+                    <a:p>
+                      <a:pPr>
+                        <a:lnSpc>
+                          <a:spcPts val="1600"/>
+                        </a:lnSpc>
+                        <a:spcAft>
+                          <a:spcPts val="0"/>
+                        </a:spcAft>
+                        <a:defRPr sz="1200" b="0">
+                          <a:solidFill>
+                            <a:srgbClr val="21243A"/>
+                          </a:solidFill>
+                          <a:latin typeface="Arial"/>
+                        </a:defRPr>
+                      </a:pPr>
+                      <a:r>
+                        <a:t>Faint mottled texture in the flat background, atypical of vector-exported slides</a:t>
+                      </a:r>
+                    </a:p>
+                  </a:txBody>
+                  <a:tcPr marL="82296" marR="82296" marT="64008" marB="64008">
+                    <a:solidFill>
+                      <a:srgbClr val="F1F7F7"/>
                     </a:solidFill>
                   </a:tcPr>
                 </a:tc>
@@ -19756,7 +19542,7 @@
           <p:nvPr/>
         </p:nvGraphicFramePr>
         <p:xfrm>
-          <a:off x="365760" y="4553712"/>
+          <a:off x="365760" y="4756912"/>
           <a:ext cx="8412479" cy="552704"/>
         </p:xfrm>
         <a:graphic>
@@ -19790,62 +19576,62 @@
                         </a:defRPr>
                       </a:pPr>
                       <a:r>
-                        <a:t>Evidence 10</a:t>
-                      </a:r>
-                    </a:p>
-                  </a:txBody>
-                  <a:tcPr marL="82296" marR="82296" marT="64008" marB="64008">
-                    <a:solidFill>
-                      <a:srgbClr val="F1F7F7"/>
-                    </a:solidFill>
-                  </a:tcPr>
-                </a:tc>
-                <a:tc>
-                  <a:txBody>
-                    <a:bodyPr wrap="none"/>
-                    <a:lstStyle/>
-                    <a:p>
-                      <a:pPr>
-                        <a:lnSpc>
-                          <a:spcPts val="1600"/>
-                        </a:lnSpc>
-                        <a:spcAft>
-                          <a:spcPts val="0"/>
-                        </a:spcAft>
-                        <a:defRPr sz="1200" b="0">
-                          <a:solidFill>
-                            <a:srgbClr val="21243A"/>
-                          </a:solidFill>
-                          <a:latin typeface="Arial"/>
-                        </a:defRPr>
-                      </a:pPr>
-                      <a:r>
-                        <a:t>All text is correctly spelled and coherent, which is consistent with either modern</a:t>
-                      </a:r>
-                    </a:p>
-                    <a:p>
-                      <a:pPr>
-                        <a:lnSpc>
-                          <a:spcPts val="1600"/>
-                        </a:lnSpc>
-                        <a:spcAft>
-                          <a:spcPts val="0"/>
-                        </a:spcAft>
-                        <a:defRPr sz="1200" b="0">
-                          <a:solidFill>
-                            <a:srgbClr val="21243A"/>
-                          </a:solidFill>
-                          <a:latin typeface="Arial"/>
-                        </a:defRPr>
-                      </a:pPr>
-                      <a:r>
-                        <a:t>text-capable generators or conventional slide software</a:t>
-                      </a:r>
-                    </a:p>
-                  </a:txBody>
-                  <a:tcPr marL="82296" marR="82296" marT="64008" marB="64008">
-                    <a:solidFill>
-                      <a:srgbClr val="F1F7F7"/>
+                        <a:t>Evidence 9</a:t>
+                      </a:r>
+                    </a:p>
+                  </a:txBody>
+                  <a:tcPr marL="82296" marR="82296" marT="64008" marB="64008">
+                    <a:solidFill>
+                      <a:srgbClr val="FFFFFF"/>
+                    </a:solidFill>
+                  </a:tcPr>
+                </a:tc>
+                <a:tc>
+                  <a:txBody>
+                    <a:bodyPr wrap="none"/>
+                    <a:lstStyle/>
+                    <a:p>
+                      <a:pPr>
+                        <a:lnSpc>
+                          <a:spcPts val="1600"/>
+                        </a:lnSpc>
+                        <a:spcAft>
+                          <a:spcPts val="0"/>
+                        </a:spcAft>
+                        <a:defRPr sz="1200" b="0">
+                          <a:solidFill>
+                            <a:srgbClr val="21243A"/>
+                          </a:solidFill>
+                          <a:latin typeface="Arial"/>
+                        </a:defRPr>
+                      </a:pPr>
+                      <a:r>
+                        <a:t>1376x768 dimensions, which match a common native output size of some current</a:t>
+                      </a:r>
+                    </a:p>
+                    <a:p>
+                      <a:pPr>
+                        <a:lnSpc>
+                          <a:spcPts val="1600"/>
+                        </a:lnSpc>
+                        <a:spcAft>
+                          <a:spcPts val="0"/>
+                        </a:spcAft>
+                        <a:defRPr sz="1200" b="0">
+                          <a:solidFill>
+                            <a:srgbClr val="21243A"/>
+                          </a:solidFill>
+                          <a:latin typeface="Arial"/>
+                        </a:defRPr>
+                      </a:pPr>
+                      <a:r>
+                        <a:t>image generators</a:t>
+                      </a:r>
+                    </a:p>
+                  </a:txBody>
+                  <a:tcPr marL="82296" marR="82296" marT="64008" marB="64008">
+                    <a:solidFill>
+                      <a:srgbClr val="FFFFFF"/>
                     </a:solidFill>
                   </a:tcPr>
                 </a:tc>
@@ -19863,95 +19649,7 @@
           <p:nvPr/>
         </p:nvGraphicFramePr>
         <p:xfrm>
-          <a:off x="365760" y="5106416"/>
-          <a:ext cx="8412479" cy="349504"/>
-        </p:xfrm>
-        <a:graphic>
-          <a:graphicData uri="http://schemas.openxmlformats.org/drawingml/2006/table">
-            <a:tbl>
-              <a:tblPr firstRow="1" bandRow="1">
-                <a:tableStyleId>{5C22544A-7EE6-4342-B048-85BDC9FD1C3A}</a:tableStyleId>
-              </a:tblPr>
-              <a:tblGrid>
-                <a:gridCol w="2271369"/>
-                <a:gridCol w="6141110"/>
-              </a:tblGrid>
-              <a:tr h="349504">
-                <a:tc>
-                  <a:txBody>
-                    <a:bodyPr wrap="none"/>
-                    <a:lstStyle/>
-                    <a:p>
-                      <a:pPr>
-                        <a:lnSpc>
-                          <a:spcPts val="1600"/>
-                        </a:lnSpc>
-                        <a:spcAft>
-                          <a:spcPts val="0"/>
-                        </a:spcAft>
-                        <a:defRPr sz="1200" b="0">
-                          <a:solidFill>
-                            <a:srgbClr val="21243A"/>
-                          </a:solidFill>
-                          <a:latin typeface="Arial"/>
-                        </a:defRPr>
-                      </a:pPr>
-                      <a:r>
-                        <a:t>Evidence 11</a:t>
-                      </a:r>
-                    </a:p>
-                  </a:txBody>
-                  <a:tcPr marL="82296" marR="82296" marT="64008" marB="64008">
-                    <a:solidFill>
-                      <a:srgbClr val="FFFFFF"/>
-                    </a:solidFill>
-                  </a:tcPr>
-                </a:tc>
-                <a:tc>
-                  <a:txBody>
-                    <a:bodyPr wrap="none"/>
-                    <a:lstStyle/>
-                    <a:p>
-                      <a:pPr>
-                        <a:lnSpc>
-                          <a:spcPts val="1600"/>
-                        </a:lnSpc>
-                        <a:spcAft>
-                          <a:spcPts val="0"/>
-                        </a:spcAft>
-                        <a:defRPr sz="1200" b="0">
-                          <a:solidFill>
-                            <a:srgbClr val="21243A"/>
-                          </a:solidFill>
-                          <a:latin typeface="Arial"/>
-                        </a:defRPr>
-                      </a:pPr>
-                      <a:r>
-                        <a:t>Faint mottled background texture rather than flat vector fill</a:t>
-                      </a:r>
-                    </a:p>
-                  </a:txBody>
-                  <a:tcPr marL="82296" marR="82296" marT="64008" marB="64008">
-                    <a:solidFill>
-                      <a:srgbClr val="FFFFFF"/>
-                    </a:solidFill>
-                  </a:tcPr>
-                </a:tc>
-              </a:tr>
-            </a:tbl>
-          </a:graphicData>
-        </a:graphic>
-      </p:graphicFrame>
-      <p:graphicFrame>
-        <p:nvGraphicFramePr>
-          <p:cNvPr id="16" name="Table 15"/>
-          <p:cNvGraphicFramePr>
-            <a:graphicFrameLocks noGrp="1"/>
-          </p:cNvGraphicFramePr>
-          <p:nvPr/>
-        </p:nvGraphicFramePr>
-        <p:xfrm>
-          <a:off x="365760" y="5455920"/>
+          <a:off x="365760" y="5309616"/>
           <a:ext cx="8412479" cy="552704"/>
         </p:xfrm>
         <a:graphic>
@@ -19985,7 +19683,7 @@
                         </a:defRPr>
                       </a:pPr>
                       <a:r>
-                        <a:t>Evidence 12</a:t>
+                        <a:t>Evidence 10</a:t>
                       </a:r>
                     </a:p>
                   </a:txBody>
@@ -20015,26 +19713,26 @@
                         </a:defRPr>
                       </a:pPr>
                       <a:r>
-                        <a:t>Caveat: This is a text-and-graphic slide, likely extracted from a PDF, not a</a:t>
-                      </a:r>
-                    </a:p>
-                    <a:p>
-                      <a:pPr>
-                        <a:lnSpc>
-                          <a:spcPts val="1600"/>
-                        </a:lnSpc>
-                        <a:spcAft>
-                          <a:spcPts val="0"/>
-                        </a:spcAft>
-                        <a:defRPr sz="1200" b="0">
-                          <a:solidFill>
-                            <a:srgbClr val="21243A"/>
-                          </a:solidFill>
-                          <a:latin typeface="Arial"/>
-                        </a:defRPr>
-                      </a:pPr>
-                      <a:r>
-                        <a:t>photograph. Slides made in presentation software and slides from text-capable AI</a:t>
+                        <a:t>Heavy soft drop shadow on the headline, a stylistic pattern common in generated</a:t>
+                      </a:r>
+                    </a:p>
+                    <a:p>
+                      <a:pPr>
+                        <a:lnSpc>
+                          <a:spcPts val="1600"/>
+                        </a:lnSpc>
+                        <a:spcAft>
+                          <a:spcPts val="0"/>
+                        </a:spcAft>
+                        <a:defRPr sz="1200" b="0">
+                          <a:solidFill>
+                            <a:srgbClr val="21243A"/>
+                          </a:solidFill>
+                          <a:latin typeface="Arial"/>
+                        </a:defRPr>
+                      </a:pPr>
+                      <a:r>
+                        <a:t>slide imagery</a:t>
                       </a:r>
                     </a:p>
                   </a:txBody>
@@ -20333,7 +20031,7 @@
         </p:nvGraphicFramePr>
         <p:xfrm>
           <a:off x="365760" y="1700784"/>
-          <a:ext cx="8412479" cy="755904"/>
+          <a:ext cx="8412479" cy="552704"/>
         </p:xfrm>
         <a:graphic>
           <a:graphicData uri="http://schemas.openxmlformats.org/drawingml/2006/table">
@@ -20345,28 +20043,135 @@
                 <a:gridCol w="2271369"/>
                 <a:gridCol w="6141110"/>
               </a:tblGrid>
-              <a:tr h="755904">
-                <a:tc>
-                  <a:txBody>
-                    <a:bodyPr wrap="none"/>
-                    <a:lstStyle/>
-                    <a:p>
-                      <a:pPr>
-                        <a:lnSpc>
-                          <a:spcPts val="1600"/>
-                        </a:lnSpc>
-                        <a:spcAft>
-                          <a:spcPts val="0"/>
-                        </a:spcAft>
-                        <a:defRPr sz="1200" b="0">
-                          <a:solidFill>
-                            <a:srgbClr val="21243A"/>
-                          </a:solidFill>
-                          <a:latin typeface="Arial"/>
-                        </a:defRPr>
-                      </a:pPr>
-                      <a:r>
-                        <a:t>Continued</a:t>
+              <a:tr h="552704">
+                <a:tc>
+                  <a:txBody>
+                    <a:bodyPr wrap="none"/>
+                    <a:lstStyle/>
+                    <a:p>
+                      <a:pPr>
+                        <a:lnSpc>
+                          <a:spcPts val="1600"/>
+                        </a:lnSpc>
+                        <a:spcAft>
+                          <a:spcPts val="0"/>
+                        </a:spcAft>
+                        <a:defRPr sz="1200" b="0">
+                          <a:solidFill>
+                            <a:srgbClr val="21243A"/>
+                          </a:solidFill>
+                          <a:latin typeface="Arial"/>
+                        </a:defRPr>
+                      </a:pPr>
+                      <a:r>
+                        <a:t>Evidence 11</a:t>
+                      </a:r>
+                    </a:p>
+                  </a:txBody>
+                  <a:tcPr marL="82296" marR="82296" marT="64008" marB="64008">
+                    <a:solidFill>
+                      <a:srgbClr val="FFFFFF"/>
+                    </a:solidFill>
+                  </a:tcPr>
+                </a:tc>
+                <a:tc>
+                  <a:txBody>
+                    <a:bodyPr wrap="none"/>
+                    <a:lstStyle/>
+                    <a:p>
+                      <a:pPr>
+                        <a:lnSpc>
+                          <a:spcPts val="1600"/>
+                        </a:lnSpc>
+                        <a:spcAft>
+                          <a:spcPts val="0"/>
+                        </a:spcAft>
+                        <a:defRPr sz="1200" b="0">
+                          <a:solidFill>
+                            <a:srgbClr val="21243A"/>
+                          </a:solidFill>
+                          <a:latin typeface="Arial"/>
+                        </a:defRPr>
+                      </a:pPr>
+                      <a:r>
+                        <a:t>Text is fully legible and correctly spelled, which weighs against older generators</a:t>
+                      </a:r>
+                    </a:p>
+                    <a:p>
+                      <a:pPr>
+                        <a:lnSpc>
+                          <a:spcPts val="1600"/>
+                        </a:lnSpc>
+                        <a:spcAft>
+                          <a:spcPts val="0"/>
+                        </a:spcAft>
+                        <a:defRPr sz="1200" b="0">
+                          <a:solidFill>
+                            <a:srgbClr val="21243A"/>
+                          </a:solidFill>
+                          <a:latin typeface="Arial"/>
+                        </a:defRPr>
+                      </a:pPr>
+                      <a:r>
+                        <a:t>but not modern text-capable models</a:t>
+                      </a:r>
+                    </a:p>
+                  </a:txBody>
+                  <a:tcPr marL="82296" marR="82296" marT="64008" marB="64008">
+                    <a:solidFill>
+                      <a:srgbClr val="FFFFFF"/>
+                    </a:solidFill>
+                  </a:tcPr>
+                </a:tc>
+              </a:tr>
+            </a:tbl>
+          </a:graphicData>
+        </a:graphic>
+      </p:graphicFrame>
+      <p:graphicFrame>
+        <p:nvGraphicFramePr>
+          <p:cNvPr id="8" name="Table 7"/>
+          <p:cNvGraphicFramePr>
+            <a:graphicFrameLocks noGrp="1"/>
+          </p:cNvGraphicFramePr>
+          <p:nvPr/>
+        </p:nvGraphicFramePr>
+        <p:xfrm>
+          <a:off x="365760" y="2253488"/>
+          <a:ext cx="8412479" cy="959103"/>
+        </p:xfrm>
+        <a:graphic>
+          <a:graphicData uri="http://schemas.openxmlformats.org/drawingml/2006/table">
+            <a:tbl>
+              <a:tblPr firstRow="1" bandRow="1">
+                <a:tableStyleId>{5C22544A-7EE6-4342-B048-85BDC9FD1C3A}</a:tableStyleId>
+              </a:tblPr>
+              <a:tblGrid>
+                <a:gridCol w="2271369"/>
+                <a:gridCol w="6141110"/>
+              </a:tblGrid>
+              <a:tr h="959103">
+                <a:tc>
+                  <a:txBody>
+                    <a:bodyPr wrap="none"/>
+                    <a:lstStyle/>
+                    <a:p>
+                      <a:pPr>
+                        <a:lnSpc>
+                          <a:spcPts val="1600"/>
+                        </a:lnSpc>
+                        <a:spcAft>
+                          <a:spcPts val="0"/>
+                        </a:spcAft>
+                        <a:defRPr sz="1200" b="0">
+                          <a:solidFill>
+                            <a:srgbClr val="21243A"/>
+                          </a:solidFill>
+                          <a:latin typeface="Arial"/>
+                        </a:defRPr>
+                      </a:pPr>
+                      <a:r>
+                        <a:t>Evidence 12</a:t>
                       </a:r>
                     </a:p>
                   </a:txBody>
@@ -20396,45 +20201,64 @@
                         </a:defRPr>
                       </a:pPr>
                       <a:r>
-                        <a:t>image generators can look alike. The irregular network motifs and soft rendering</a:t>
-                      </a:r>
-                    </a:p>
-                    <a:p>
-                      <a:pPr>
-                        <a:lnSpc>
-                          <a:spcPts val="1600"/>
-                        </a:lnSpc>
-                        <a:spcAft>
-                          <a:spcPts val="0"/>
-                        </a:spcAft>
-                        <a:defRPr sz="1200" b="0">
-                          <a:solidFill>
-                            <a:srgbClr val="21243A"/>
-                          </a:solidFill>
-                          <a:latin typeface="Arial"/>
-                        </a:defRPr>
-                      </a:pPr>
-                      <a:r>
-                        <a:t>suggest possible AI generation, but they are not decisive. A human should check</a:t>
-                      </a:r>
-                    </a:p>
-                    <a:p>
-                      <a:pPr>
-                        <a:lnSpc>
-                          <a:spcPts val="1600"/>
-                        </a:lnSpc>
-                        <a:spcAft>
-                          <a:spcPts val="0"/>
-                        </a:spcAft>
-                        <a:defRPr sz="1200" b="0">
-                          <a:solidFill>
-                            <a:srgbClr val="21243A"/>
-                          </a:solidFill>
-                          <a:latin typeface="Arial"/>
-                        </a:defRPr>
-                      </a:pPr>
-                      <a:r>
-                        <a:t>the source PDF's metadata, fonts and vector layers, and the authoring tool.</a:t>
+                        <a:t>Caveat: Designed graphics from a PDF can be produced by ordinary layout tools</a:t>
+                      </a:r>
+                    </a:p>
+                    <a:p>
+                      <a:pPr>
+                        <a:lnSpc>
+                          <a:spcPts val="1600"/>
+                        </a:lnSpc>
+                        <a:spcAft>
+                          <a:spcPts val="0"/>
+                        </a:spcAft>
+                        <a:defRPr sz="1200" b="0">
+                          <a:solidFill>
+                            <a:srgbClr val="21243A"/>
+                          </a:solidFill>
+                          <a:latin typeface="Arial"/>
+                        </a:defRPr>
+                      </a:pPr>
+                      <a:r>
+                        <a:t>or by modern text-capable generators and look nearly identical. The layout</a:t>
+                      </a:r>
+                    </a:p>
+                    <a:p>
+                      <a:pPr>
+                        <a:lnSpc>
+                          <a:spcPts val="1600"/>
+                        </a:lnSpc>
+                        <a:spcAft>
+                          <a:spcPts val="0"/>
+                        </a:spcAft>
+                        <a:defRPr sz="1200" b="0">
+                          <a:solidFill>
+                            <a:srgbClr val="21243A"/>
+                          </a:solidFill>
+                          <a:latin typeface="Arial"/>
+                        </a:defRPr>
+                      </a:pPr>
+                      <a:r>
+                        <a:t>irregularities and image dimensions are suggestive only, so check the source PDF</a:t>
+                      </a:r>
+                    </a:p>
+                    <a:p>
+                      <a:pPr>
+                        <a:lnSpc>
+                          <a:spcPts val="1600"/>
+                        </a:lnSpc>
+                        <a:spcAft>
+                          <a:spcPts val="0"/>
+                        </a:spcAft>
+                        <a:defRPr sz="1200" b="0">
+                          <a:solidFill>
+                            <a:srgbClr val="21243A"/>
+                          </a:solidFill>
+                          <a:latin typeface="Arial"/>
+                        </a:defRPr>
+                      </a:pPr>
+                      <a:r>
+                        <a:t>metadata, its creation tool, and any C2PA/provenance data.</a:t>
                       </a:r>
                     </a:p>
                   </a:txBody>
@@ -21261,7 +21085,7 @@
         </p:nvGraphicFramePr>
         <p:xfrm>
           <a:off x="365760" y="3797808"/>
-          <a:ext cx="8412479" cy="1162304"/>
+          <a:ext cx="8412479" cy="959103"/>
         </p:xfrm>
         <a:graphic>
           <a:graphicData uri="http://schemas.openxmlformats.org/drawingml/2006/table">
@@ -21273,7 +21097,7 @@
                 <a:gridCol w="2271369"/>
                 <a:gridCol w="6141110"/>
               </a:tblGrid>
-              <a:tr h="1162304">
+              <a:tr h="959103">
                 <a:tc>
                   <a:txBody>
                     <a:bodyPr wrap="none"/>
@@ -21324,83 +21148,64 @@
                         </a:defRPr>
                       </a:pPr>
                       <a:r>
-                        <a:t>Worst of 4 frames (figure p6): synthetic likelihood 15/100; tells: Consistent, legible</a:t>
-                      </a:r>
-                    </a:p>
-                    <a:p>
-                      <a:pPr>
-                        <a:lnSpc>
-                          <a:spcPts val="1600"/>
-                        </a:lnSpc>
-                        <a:spcAft>
-                          <a:spcPts val="0"/>
-                        </a:spcAft>
-                        <a:defRPr sz="1200" b="0">
-                          <a:solidFill>
-                            <a:srgbClr val="21243A"/>
-                          </a:solidFill>
-                          <a:latin typeface="Arial"/>
-                        </a:defRPr>
-                      </a:pPr>
-                      <a:r>
-                        <a:t>typography throughout both columns, Regular rounded panels and aligned</a:t>
-                      </a:r>
-                    </a:p>
-                    <a:p>
-                      <a:pPr>
-                        <a:lnSpc>
-                          <a:spcPts val="1600"/>
-                        </a:lnSpc>
-                        <a:spcAft>
-                          <a:spcPts val="0"/>
-                        </a:spcAft>
-                        <a:defRPr sz="1200" b="0">
-                          <a:solidFill>
-                            <a:srgbClr val="21243A"/>
-                          </a:solidFill>
-                          <a:latin typeface="Arial"/>
-                        </a:defRPr>
-                      </a:pPr>
-                      <a:r>
-                        <a:t>borders characteristic of conventional slide design, No obvious malformed</a:t>
-                      </a:r>
-                    </a:p>
-                    <a:p>
-                      <a:pPr>
-                        <a:lnSpc>
-                          <a:spcPts val="1600"/>
-                        </a:lnSpc>
-                        <a:spcAft>
-                          <a:spcPts val="0"/>
-                        </a:spcAft>
-                        <a:defRPr sz="1200" b="0">
-                          <a:solidFill>
-                            <a:srgbClr val="21243A"/>
-                          </a:solidFill>
-                          <a:latin typeface="Arial"/>
-                        </a:defRPr>
-                      </a:pPr>
-                      <a:r>
-                        <a:t>lettering or incoherent graphic elements, Entire image is a text infographic, with</a:t>
-                      </a:r>
-                    </a:p>
-                    <a:p>
-                      <a:pPr>
-                        <a:lnSpc>
-                          <a:spcPts val="1600"/>
-                        </a:lnSpc>
-                        <a:spcAft>
-                          <a:spcPts val="0"/>
-                        </a:spcAft>
-                        <a:defRPr sz="1200" b="0">
-                          <a:solidFill>
-                            <a:srgbClr val="21243A"/>
-                          </a:solidFill>
-                          <a:latin typeface="Arial"/>
-                        </a:defRPr>
-                      </a:pPr>
-                      <a:r>
-                        <a:t>no photographic detail to assess</a:t>
+                        <a:t>Worst of 4 frames (figure p6): synthetic likelihood 15/100; tells: Legible, coherent</a:t>
+                      </a:r>
+                    </a:p>
+                    <a:p>
+                      <a:pPr>
+                        <a:lnSpc>
+                          <a:spcPts val="1600"/>
+                        </a:lnSpc>
+                        <a:spcAft>
+                          <a:spcPts val="0"/>
+                        </a:spcAft>
+                        <a:defRPr sz="1200" b="0">
+                          <a:solidFill>
+                            <a:srgbClr val="21243A"/>
+                          </a:solidFill>
+                          <a:latin typeface="Arial"/>
+                        </a:defRPr>
+                      </a:pPr>
+                      <a:r>
+                        <a:t>text with consistent repeated letterforms., Regular two-column layout with</a:t>
+                      </a:r>
+                    </a:p>
+                    <a:p>
+                      <a:pPr>
+                        <a:lnSpc>
+                          <a:spcPts val="1600"/>
+                        </a:lnSpc>
+                        <a:spcAft>
+                          <a:spcPts val="0"/>
+                        </a:spcAft>
+                        <a:defRPr sz="1200" b="0">
+                          <a:solidFill>
+                            <a:srgbClr val="21243A"/>
+                          </a:solidFill>
+                          <a:latin typeface="Arial"/>
+                        </a:defRPr>
+                      </a:pPr>
+                      <a:r>
+                        <a:t>aligned rounded panels., Consistent bold labels and uniform bullet styling., No</a:t>
+                      </a:r>
+                    </a:p>
+                    <a:p>
+                      <a:pPr>
+                        <a:lnSpc>
+                          <a:spcPts val="1600"/>
+                        </a:lnSpc>
+                        <a:spcAft>
+                          <a:spcPts val="0"/>
+                        </a:spcAft>
+                        <a:defRPr sz="1200" b="0">
+                          <a:solidFill>
+                            <a:srgbClr val="21243A"/>
+                          </a:solidFill>
+                          <a:latin typeface="Arial"/>
+                        </a:defRPr>
+                      </a:pPr>
+                      <a:r>
+                        <a:t>photographic base or identifiable inpainting boundaries.</a:t>
                       </a:r>
                     </a:p>
                   </a:txBody>
@@ -21424,7 +21229,7 @@
           <p:nvPr/>
         </p:nvGraphicFramePr>
         <p:xfrm>
-          <a:off x="365760" y="4960112"/>
+          <a:off x="365760" y="4756912"/>
           <a:ext cx="8412479" cy="349504"/>
         </p:xfrm>
         <a:graphic>
@@ -21488,7 +21293,7 @@
                         </a:defRPr>
                       </a:pPr>
                       <a:r>
-                        <a:t>Frame figure p1: 8/100</a:t>
+                        <a:t>Frame figure p1: 12/100</a:t>
                       </a:r>
                     </a:p>
                   </a:txBody>
@@ -21512,7 +21317,7 @@
           <p:nvPr/>
         </p:nvGraphicFramePr>
         <p:xfrm>
-          <a:off x="365760" y="5309616"/>
+          <a:off x="365760" y="5106416"/>
           <a:ext cx="8412479" cy="349504"/>
         </p:xfrm>
         <a:graphic>
@@ -21583,6 +21388,94 @@
                   <a:tcPr marL="82296" marR="82296" marT="64008" marB="64008">
                     <a:solidFill>
                       <a:srgbClr val="F1F7F7"/>
+                    </a:solidFill>
+                  </a:tcPr>
+                </a:tc>
+              </a:tr>
+            </a:tbl>
+          </a:graphicData>
+        </a:graphic>
+      </p:graphicFrame>
+      <p:graphicFrame>
+        <p:nvGraphicFramePr>
+          <p:cNvPr id="16" name="Table 15"/>
+          <p:cNvGraphicFramePr>
+            <a:graphicFrameLocks noGrp="1"/>
+          </p:cNvGraphicFramePr>
+          <p:nvPr/>
+        </p:nvGraphicFramePr>
+        <p:xfrm>
+          <a:off x="365760" y="5455920"/>
+          <a:ext cx="8412479" cy="349504"/>
+        </p:xfrm>
+        <a:graphic>
+          <a:graphicData uri="http://schemas.openxmlformats.org/drawingml/2006/table">
+            <a:tbl>
+              <a:tblPr firstRow="1" bandRow="1">
+                <a:tableStyleId>{5C22544A-7EE6-4342-B048-85BDC9FD1C3A}</a:tableStyleId>
+              </a:tblPr>
+              <a:tblGrid>
+                <a:gridCol w="2271369"/>
+                <a:gridCol w="6141110"/>
+              </a:tblGrid>
+              <a:tr h="349504">
+                <a:tc>
+                  <a:txBody>
+                    <a:bodyPr wrap="none"/>
+                    <a:lstStyle/>
+                    <a:p>
+                      <a:pPr>
+                        <a:lnSpc>
+                          <a:spcPts val="1600"/>
+                        </a:lnSpc>
+                        <a:spcAft>
+                          <a:spcPts val="0"/>
+                        </a:spcAft>
+                        <a:defRPr sz="1200" b="0">
+                          <a:solidFill>
+                            <a:srgbClr val="21243A"/>
+                          </a:solidFill>
+                          <a:latin typeface="Arial"/>
+                        </a:defRPr>
+                      </a:pPr>
+                      <a:r>
+                        <a:t>Evidence 3</a:t>
+                      </a:r>
+                    </a:p>
+                  </a:txBody>
+                  <a:tcPr marL="82296" marR="82296" marT="64008" marB="64008">
+                    <a:solidFill>
+                      <a:srgbClr val="FFFFFF"/>
+                    </a:solidFill>
+                  </a:tcPr>
+                </a:tc>
+                <a:tc>
+                  <a:txBody>
+                    <a:bodyPr wrap="none"/>
+                    <a:lstStyle/>
+                    <a:p>
+                      <a:pPr>
+                        <a:lnSpc>
+                          <a:spcPts val="1600"/>
+                        </a:lnSpc>
+                        <a:spcAft>
+                          <a:spcPts val="0"/>
+                        </a:spcAft>
+                        <a:defRPr sz="1200" b="0">
+                          <a:solidFill>
+                            <a:srgbClr val="21243A"/>
+                          </a:solidFill>
+                          <a:latin typeface="Arial"/>
+                        </a:defRPr>
+                      </a:pPr>
+                      <a:r>
+                        <a:t>Frame figure p10: 12/100</a:t>
+                      </a:r>
+                    </a:p>
+                  </a:txBody>
+                  <a:tcPr marL="82296" marR="82296" marT="64008" marB="64008">
+                    <a:solidFill>
+                      <a:srgbClr val="FFFFFF"/>
                     </a:solidFill>
                   </a:tcPr>
                 </a:tc>
@@ -21908,43 +21801,43 @@
                         </a:defRPr>
                       </a:pPr>
                       <a:r>
-                        <a:t>Evidence 3</a:t>
-                      </a:r>
-                    </a:p>
-                  </a:txBody>
-                  <a:tcPr marL="82296" marR="82296" marT="64008" marB="64008">
-                    <a:solidFill>
-                      <a:srgbClr val="FFFFFF"/>
-                    </a:solidFill>
-                  </a:tcPr>
-                </a:tc>
-                <a:tc>
-                  <a:txBody>
-                    <a:bodyPr wrap="none"/>
-                    <a:lstStyle/>
-                    <a:p>
-                      <a:pPr>
-                        <a:lnSpc>
-                          <a:spcPts val="1600"/>
-                        </a:lnSpc>
-                        <a:spcAft>
-                          <a:spcPts val="0"/>
-                        </a:spcAft>
-                        <a:defRPr sz="1200" b="0">
-                          <a:solidFill>
-                            <a:srgbClr val="21243A"/>
-                          </a:solidFill>
-                          <a:latin typeface="Arial"/>
-                        </a:defRPr>
-                      </a:pPr>
-                      <a:r>
-                        <a:t>Frame figure p10: 5/100</a:t>
-                      </a:r>
-                    </a:p>
-                  </a:txBody>
-                  <a:tcPr marL="82296" marR="82296" marT="64008" marB="64008">
-                    <a:solidFill>
-                      <a:srgbClr val="FFFFFF"/>
+                        <a:t>Evidence 4</a:t>
+                      </a:r>
+                    </a:p>
+                  </a:txBody>
+                  <a:tcPr marL="82296" marR="82296" marT="64008" marB="64008">
+                    <a:solidFill>
+                      <a:srgbClr val="F1F7F7"/>
+                    </a:solidFill>
+                  </a:tcPr>
+                </a:tc>
+                <a:tc>
+                  <a:txBody>
+                    <a:bodyPr wrap="none"/>
+                    <a:lstStyle/>
+                    <a:p>
+                      <a:pPr>
+                        <a:lnSpc>
+                          <a:spcPts val="1600"/>
+                        </a:lnSpc>
+                        <a:spcAft>
+                          <a:spcPts val="0"/>
+                        </a:spcAft>
+                        <a:defRPr sz="1200" b="0">
+                          <a:solidFill>
+                            <a:srgbClr val="21243A"/>
+                          </a:solidFill>
+                          <a:latin typeface="Arial"/>
+                        </a:defRPr>
+                      </a:pPr>
+                      <a:r>
+                        <a:t>Frame figure p15: 15/100</a:t>
+                      </a:r>
+                    </a:p>
+                  </a:txBody>
+                  <a:tcPr marL="82296" marR="82296" marT="64008" marB="64008">
+                    <a:solidFill>
+                      <a:srgbClr val="F1F7F7"/>
                     </a:solidFill>
                   </a:tcPr>
                 </a:tc>
@@ -21996,43 +21889,43 @@
                         </a:defRPr>
                       </a:pPr>
                       <a:r>
-                        <a:t>Evidence 4</a:t>
-                      </a:r>
-                    </a:p>
-                  </a:txBody>
-                  <a:tcPr marL="82296" marR="82296" marT="64008" marB="64008">
-                    <a:solidFill>
-                      <a:srgbClr val="F1F7F7"/>
-                    </a:solidFill>
-                  </a:tcPr>
-                </a:tc>
-                <a:tc>
-                  <a:txBody>
-                    <a:bodyPr wrap="none"/>
-                    <a:lstStyle/>
-                    <a:p>
-                      <a:pPr>
-                        <a:lnSpc>
-                          <a:spcPts val="1600"/>
-                        </a:lnSpc>
-                        <a:spcAft>
-                          <a:spcPts val="0"/>
-                        </a:spcAft>
-                        <a:defRPr sz="1200" b="0">
-                          <a:solidFill>
-                            <a:srgbClr val="21243A"/>
-                          </a:solidFill>
-                          <a:latin typeface="Arial"/>
-                        </a:defRPr>
-                      </a:pPr>
-                      <a:r>
-                        <a:t>Frame figure p15: 15/100</a:t>
-                      </a:r>
-                    </a:p>
-                  </a:txBody>
-                  <a:tcPr marL="82296" marR="82296" marT="64008" marB="64008">
-                    <a:solidFill>
-                      <a:srgbClr val="F1F7F7"/>
+                        <a:t>Evidence 5</a:t>
+                      </a:r>
+                    </a:p>
+                  </a:txBody>
+                  <a:tcPr marL="82296" marR="82296" marT="64008" marB="64008">
+                    <a:solidFill>
+                      <a:srgbClr val="FFFFFF"/>
+                    </a:solidFill>
+                  </a:tcPr>
+                </a:tc>
+                <a:tc>
+                  <a:txBody>
+                    <a:bodyPr wrap="none"/>
+                    <a:lstStyle/>
+                    <a:p>
+                      <a:pPr>
+                        <a:lnSpc>
+                          <a:spcPts val="1600"/>
+                        </a:lnSpc>
+                        <a:spcAft>
+                          <a:spcPts val="0"/>
+                        </a:spcAft>
+                        <a:defRPr sz="1200" b="0">
+                          <a:solidFill>
+                            <a:srgbClr val="21243A"/>
+                          </a:solidFill>
+                          <a:latin typeface="Arial"/>
+                        </a:defRPr>
+                      </a:pPr>
+                      <a:r>
+                        <a:t>Legible, coherent text with consistent repeated letterforms.</a:t>
+                      </a:r>
+                    </a:p>
+                  </a:txBody>
+                  <a:tcPr marL="82296" marR="82296" marT="64008" marB="64008">
+                    <a:solidFill>
+                      <a:srgbClr val="FFFFFF"/>
                     </a:solidFill>
                   </a:tcPr>
                 </a:tc>
@@ -22084,43 +21977,43 @@
                         </a:defRPr>
                       </a:pPr>
                       <a:r>
-                        <a:t>Evidence 5</a:t>
-                      </a:r>
-                    </a:p>
-                  </a:txBody>
-                  <a:tcPr marL="82296" marR="82296" marT="64008" marB="64008">
-                    <a:solidFill>
-                      <a:srgbClr val="FFFFFF"/>
-                    </a:solidFill>
-                  </a:tcPr>
-                </a:tc>
-                <a:tc>
-                  <a:txBody>
-                    <a:bodyPr wrap="none"/>
-                    <a:lstStyle/>
-                    <a:p>
-                      <a:pPr>
-                        <a:lnSpc>
-                          <a:spcPts val="1600"/>
-                        </a:lnSpc>
-                        <a:spcAft>
-                          <a:spcPts val="0"/>
-                        </a:spcAft>
-                        <a:defRPr sz="1200" b="0">
-                          <a:solidFill>
-                            <a:srgbClr val="21243A"/>
-                          </a:solidFill>
-                          <a:latin typeface="Arial"/>
-                        </a:defRPr>
-                      </a:pPr>
-                      <a:r>
-                        <a:t>Consistent, legible typography throughout both columns</a:t>
-                      </a:r>
-                    </a:p>
-                  </a:txBody>
-                  <a:tcPr marL="82296" marR="82296" marT="64008" marB="64008">
-                    <a:solidFill>
-                      <a:srgbClr val="FFFFFF"/>
+                        <a:t>Evidence 6</a:t>
+                      </a:r>
+                    </a:p>
+                  </a:txBody>
+                  <a:tcPr marL="82296" marR="82296" marT="64008" marB="64008">
+                    <a:solidFill>
+                      <a:srgbClr val="F1F7F7"/>
+                    </a:solidFill>
+                  </a:tcPr>
+                </a:tc>
+                <a:tc>
+                  <a:txBody>
+                    <a:bodyPr wrap="none"/>
+                    <a:lstStyle/>
+                    <a:p>
+                      <a:pPr>
+                        <a:lnSpc>
+                          <a:spcPts val="1600"/>
+                        </a:lnSpc>
+                        <a:spcAft>
+                          <a:spcPts val="0"/>
+                        </a:spcAft>
+                        <a:defRPr sz="1200" b="0">
+                          <a:solidFill>
+                            <a:srgbClr val="21243A"/>
+                          </a:solidFill>
+                          <a:latin typeface="Arial"/>
+                        </a:defRPr>
+                      </a:pPr>
+                      <a:r>
+                        <a:t>Regular two-column layout with aligned rounded panels.</a:t>
+                      </a:r>
+                    </a:p>
+                  </a:txBody>
+                  <a:tcPr marL="82296" marR="82296" marT="64008" marB="64008">
+                    <a:solidFill>
+                      <a:srgbClr val="F1F7F7"/>
                     </a:solidFill>
                   </a:tcPr>
                 </a:tc>
@@ -22139,7 +22032,7 @@
         </p:nvGraphicFramePr>
         <p:xfrm>
           <a:off x="365760" y="2749296"/>
-          <a:ext cx="8412479" cy="552704"/>
+          <a:ext cx="8412479" cy="349504"/>
         </p:xfrm>
         <a:graphic>
           <a:graphicData uri="http://schemas.openxmlformats.org/drawingml/2006/table">
@@ -22151,83 +22044,64 @@
                 <a:gridCol w="2271369"/>
                 <a:gridCol w="6141110"/>
               </a:tblGrid>
-              <a:tr h="552704">
-                <a:tc>
-                  <a:txBody>
-                    <a:bodyPr wrap="none"/>
-                    <a:lstStyle/>
-                    <a:p>
-                      <a:pPr>
-                        <a:lnSpc>
-                          <a:spcPts val="1600"/>
-                        </a:lnSpc>
-                        <a:spcAft>
-                          <a:spcPts val="0"/>
-                        </a:spcAft>
-                        <a:defRPr sz="1200" b="0">
-                          <a:solidFill>
-                            <a:srgbClr val="21243A"/>
-                          </a:solidFill>
-                          <a:latin typeface="Arial"/>
-                        </a:defRPr>
-                      </a:pPr>
-                      <a:r>
-                        <a:t>Evidence 6</a:t>
-                      </a:r>
-                    </a:p>
-                  </a:txBody>
-                  <a:tcPr marL="82296" marR="82296" marT="64008" marB="64008">
-                    <a:solidFill>
-                      <a:srgbClr val="F1F7F7"/>
-                    </a:solidFill>
-                  </a:tcPr>
-                </a:tc>
-                <a:tc>
-                  <a:txBody>
-                    <a:bodyPr wrap="none"/>
-                    <a:lstStyle/>
-                    <a:p>
-                      <a:pPr>
-                        <a:lnSpc>
-                          <a:spcPts val="1600"/>
-                        </a:lnSpc>
-                        <a:spcAft>
-                          <a:spcPts val="0"/>
-                        </a:spcAft>
-                        <a:defRPr sz="1200" b="0">
-                          <a:solidFill>
-                            <a:srgbClr val="21243A"/>
-                          </a:solidFill>
-                          <a:latin typeface="Arial"/>
-                        </a:defRPr>
-                      </a:pPr>
-                      <a:r>
-                        <a:t>Regular rounded panels and aligned borders characteristic of conventional slide</a:t>
-                      </a:r>
-                    </a:p>
-                    <a:p>
-                      <a:pPr>
-                        <a:lnSpc>
-                          <a:spcPts val="1600"/>
-                        </a:lnSpc>
-                        <a:spcAft>
-                          <a:spcPts val="0"/>
-                        </a:spcAft>
-                        <a:defRPr sz="1200" b="0">
-                          <a:solidFill>
-                            <a:srgbClr val="21243A"/>
-                          </a:solidFill>
-                          <a:latin typeface="Arial"/>
-                        </a:defRPr>
-                      </a:pPr>
-                      <a:r>
-                        <a:t>design</a:t>
-                      </a:r>
-                    </a:p>
-                  </a:txBody>
-                  <a:tcPr marL="82296" marR="82296" marT="64008" marB="64008">
-                    <a:solidFill>
-                      <a:srgbClr val="F1F7F7"/>
+              <a:tr h="349504">
+                <a:tc>
+                  <a:txBody>
+                    <a:bodyPr wrap="none"/>
+                    <a:lstStyle/>
+                    <a:p>
+                      <a:pPr>
+                        <a:lnSpc>
+                          <a:spcPts val="1600"/>
+                        </a:lnSpc>
+                        <a:spcAft>
+                          <a:spcPts val="0"/>
+                        </a:spcAft>
+                        <a:defRPr sz="1200" b="0">
+                          <a:solidFill>
+                            <a:srgbClr val="21243A"/>
+                          </a:solidFill>
+                          <a:latin typeface="Arial"/>
+                        </a:defRPr>
+                      </a:pPr>
+                      <a:r>
+                        <a:t>Evidence 7</a:t>
+                      </a:r>
+                    </a:p>
+                  </a:txBody>
+                  <a:tcPr marL="82296" marR="82296" marT="64008" marB="64008">
+                    <a:solidFill>
+                      <a:srgbClr val="FFFFFF"/>
+                    </a:solidFill>
+                  </a:tcPr>
+                </a:tc>
+                <a:tc>
+                  <a:txBody>
+                    <a:bodyPr wrap="none"/>
+                    <a:lstStyle/>
+                    <a:p>
+                      <a:pPr>
+                        <a:lnSpc>
+                          <a:spcPts val="1600"/>
+                        </a:lnSpc>
+                        <a:spcAft>
+                          <a:spcPts val="0"/>
+                        </a:spcAft>
+                        <a:defRPr sz="1200" b="0">
+                          <a:solidFill>
+                            <a:srgbClr val="21243A"/>
+                          </a:solidFill>
+                          <a:latin typeface="Arial"/>
+                        </a:defRPr>
+                      </a:pPr>
+                      <a:r>
+                        <a:t>Consistent bold labels and uniform bullet styling.</a:t>
+                      </a:r>
+                    </a:p>
+                  </a:txBody>
+                  <a:tcPr marL="82296" marR="82296" marT="64008" marB="64008">
+                    <a:solidFill>
+                      <a:srgbClr val="FFFFFF"/>
                     </a:solidFill>
                   </a:tcPr>
                 </a:tc>
@@ -22245,7 +22119,7 @@
           <p:nvPr/>
         </p:nvGraphicFramePr>
         <p:xfrm>
-          <a:off x="365760" y="3302000"/>
+          <a:off x="365760" y="3098800"/>
           <a:ext cx="8412479" cy="349504"/>
         </p:xfrm>
         <a:graphic>
@@ -22279,43 +22153,43 @@
                         </a:defRPr>
                       </a:pPr>
                       <a:r>
-                        <a:t>Evidence 7</a:t>
-                      </a:r>
-                    </a:p>
-                  </a:txBody>
-                  <a:tcPr marL="82296" marR="82296" marT="64008" marB="64008">
-                    <a:solidFill>
-                      <a:srgbClr val="FFFFFF"/>
-                    </a:solidFill>
-                  </a:tcPr>
-                </a:tc>
-                <a:tc>
-                  <a:txBody>
-                    <a:bodyPr wrap="none"/>
-                    <a:lstStyle/>
-                    <a:p>
-                      <a:pPr>
-                        <a:lnSpc>
-                          <a:spcPts val="1600"/>
-                        </a:lnSpc>
-                        <a:spcAft>
-                          <a:spcPts val="0"/>
-                        </a:spcAft>
-                        <a:defRPr sz="1200" b="0">
-                          <a:solidFill>
-                            <a:srgbClr val="21243A"/>
-                          </a:solidFill>
-                          <a:latin typeface="Arial"/>
-                        </a:defRPr>
-                      </a:pPr>
-                      <a:r>
-                        <a:t>No obvious malformed lettering or incoherent graphic elements</a:t>
-                      </a:r>
-                    </a:p>
-                  </a:txBody>
-                  <a:tcPr marL="82296" marR="82296" marT="64008" marB="64008">
-                    <a:solidFill>
-                      <a:srgbClr val="FFFFFF"/>
+                        <a:t>Evidence 8</a:t>
+                      </a:r>
+                    </a:p>
+                  </a:txBody>
+                  <a:tcPr marL="82296" marR="82296" marT="64008" marB="64008">
+                    <a:solidFill>
+                      <a:srgbClr val="F1F7F7"/>
+                    </a:solidFill>
+                  </a:tcPr>
+                </a:tc>
+                <a:tc>
+                  <a:txBody>
+                    <a:bodyPr wrap="none"/>
+                    <a:lstStyle/>
+                    <a:p>
+                      <a:pPr>
+                        <a:lnSpc>
+                          <a:spcPts val="1600"/>
+                        </a:lnSpc>
+                        <a:spcAft>
+                          <a:spcPts val="0"/>
+                        </a:spcAft>
+                        <a:defRPr sz="1200" b="0">
+                          <a:solidFill>
+                            <a:srgbClr val="21243A"/>
+                          </a:solidFill>
+                          <a:latin typeface="Arial"/>
+                        </a:defRPr>
+                      </a:pPr>
+                      <a:r>
+                        <a:t>No photographic base or identifiable inpainting boundaries.</a:t>
+                      </a:r>
+                    </a:p>
+                  </a:txBody>
+                  <a:tcPr marL="82296" marR="82296" marT="64008" marB="64008">
+                    <a:solidFill>
+                      <a:srgbClr val="F1F7F7"/>
                     </a:solidFill>
                   </a:tcPr>
                 </a:tc>
@@ -22333,8 +22207,8 @@
           <p:nvPr/>
         </p:nvGraphicFramePr>
         <p:xfrm>
-          <a:off x="365760" y="3651504"/>
-          <a:ext cx="8412479" cy="349504"/>
+          <a:off x="365760" y="3448304"/>
+          <a:ext cx="8412479" cy="755904"/>
         </p:xfrm>
         <a:graphic>
           <a:graphicData uri="http://schemas.openxmlformats.org/drawingml/2006/table">
@@ -22346,95 +22220,7 @@
                 <a:gridCol w="2271369"/>
                 <a:gridCol w="6141110"/>
               </a:tblGrid>
-              <a:tr h="349504">
-                <a:tc>
-                  <a:txBody>
-                    <a:bodyPr wrap="none"/>
-                    <a:lstStyle/>
-                    <a:p>
-                      <a:pPr>
-                        <a:lnSpc>
-                          <a:spcPts val="1600"/>
-                        </a:lnSpc>
-                        <a:spcAft>
-                          <a:spcPts val="0"/>
-                        </a:spcAft>
-                        <a:defRPr sz="1200" b="0">
-                          <a:solidFill>
-                            <a:srgbClr val="21243A"/>
-                          </a:solidFill>
-                          <a:latin typeface="Arial"/>
-                        </a:defRPr>
-                      </a:pPr>
-                      <a:r>
-                        <a:t>Evidence 8</a:t>
-                      </a:r>
-                    </a:p>
-                  </a:txBody>
-                  <a:tcPr marL="82296" marR="82296" marT="64008" marB="64008">
-                    <a:solidFill>
-                      <a:srgbClr val="F1F7F7"/>
-                    </a:solidFill>
-                  </a:tcPr>
-                </a:tc>
-                <a:tc>
-                  <a:txBody>
-                    <a:bodyPr wrap="none"/>
-                    <a:lstStyle/>
-                    <a:p>
-                      <a:pPr>
-                        <a:lnSpc>
-                          <a:spcPts val="1600"/>
-                        </a:lnSpc>
-                        <a:spcAft>
-                          <a:spcPts val="0"/>
-                        </a:spcAft>
-                        <a:defRPr sz="1200" b="0">
-                          <a:solidFill>
-                            <a:srgbClr val="21243A"/>
-                          </a:solidFill>
-                          <a:latin typeface="Arial"/>
-                        </a:defRPr>
-                      </a:pPr>
-                      <a:r>
-                        <a:t>Entire image is a text infographic, with no photographic detail to assess</a:t>
-                      </a:r>
-                    </a:p>
-                  </a:txBody>
-                  <a:tcPr marL="82296" marR="82296" marT="64008" marB="64008">
-                    <a:solidFill>
-                      <a:srgbClr val="F1F7F7"/>
-                    </a:solidFill>
-                  </a:tcPr>
-                </a:tc>
-              </a:tr>
-            </a:tbl>
-          </a:graphicData>
-        </a:graphic>
-      </p:graphicFrame>
-      <p:graphicFrame>
-        <p:nvGraphicFramePr>
-          <p:cNvPr id="13" name="Table 12"/>
-          <p:cNvGraphicFramePr>
-            <a:graphicFrameLocks noGrp="1"/>
-          </p:cNvGraphicFramePr>
-          <p:nvPr/>
-        </p:nvGraphicFramePr>
-        <p:xfrm>
-          <a:off x="365760" y="4001008"/>
-          <a:ext cx="8412479" cy="552704"/>
-        </p:xfrm>
-        <a:graphic>
-          <a:graphicData uri="http://schemas.openxmlformats.org/drawingml/2006/table">
-            <a:tbl>
-              <a:tblPr firstRow="1" bandRow="1">
-                <a:tableStyleId>{5C22544A-7EE6-4342-B048-85BDC9FD1C3A}</a:tableStyleId>
-              </a:tblPr>
-              <a:tblGrid>
-                <a:gridCol w="2271369"/>
-                <a:gridCol w="6141110"/>
-              </a:tblGrid>
-              <a:tr h="552704">
+              <a:tr h="755904">
                 <a:tc>
                   <a:txBody>
                     <a:bodyPr wrap="none"/>
@@ -22485,26 +22271,45 @@
                         </a:defRPr>
                       </a:pPr>
                       <a:r>
-                        <a:t>Caveat: A conventional infographic and an AI-assisted graphic can look identical;</a:t>
-                      </a:r>
-                    </a:p>
-                    <a:p>
-                      <a:pPr>
-                        <a:lnSpc>
-                          <a:spcPts val="1600"/>
-                        </a:lnSpc>
-                        <a:spcAft>
-                          <a:spcPts val="0"/>
-                        </a:spcAft>
-                        <a:defRPr sz="1200" b="0">
-                          <a:solidFill>
-                            <a:srgbClr val="21243A"/>
-                          </a:solidFill>
-                          <a:latin typeface="Arial"/>
-                        </a:defRPr>
-                      </a:pPr>
-                      <a:r>
-                        <a:t>source files or creation history are needed to establish provenance.</a:t>
+                        <a:t>Caveat: This is a designed infographic, not a camera photo; conventional design</a:t>
+                      </a:r>
+                    </a:p>
+                    <a:p>
+                      <a:pPr>
+                        <a:lnSpc>
+                          <a:spcPts val="1600"/>
+                        </a:lnSpc>
+                        <a:spcAft>
+                          <a:spcPts val="0"/>
+                        </a:spcAft>
+                        <a:defRPr sz="1200" b="0">
+                          <a:solidFill>
+                            <a:srgbClr val="21243A"/>
+                          </a:solidFill>
+                          <a:latin typeface="Arial"/>
+                        </a:defRPr>
+                      </a:pPr>
+                      <a:r>
+                        <a:t>and AI-assisted production cannot reliably be distinguished from the rendered</a:t>
+                      </a:r>
+                    </a:p>
+                    <a:p>
+                      <a:pPr>
+                        <a:lnSpc>
+                          <a:spcPts val="1600"/>
+                        </a:lnSpc>
+                        <a:spcAft>
+                          <a:spcPts val="0"/>
+                        </a:spcAft>
+                        <a:defRPr sz="1200" b="0">
+                          <a:solidFill>
+                            <a:srgbClr val="21243A"/>
+                          </a:solidFill>
+                          <a:latin typeface="Arial"/>
+                        </a:defRPr>
+                      </a:pPr>
+                      <a:r>
+                        <a:t>image alone.</a:t>
                       </a:r>
                     </a:p>
                   </a:txBody>
@@ -23394,45 +23199,45 @@
                         </a:defRPr>
                       </a:pPr>
                       <a:r>
-                        <a:t>Worst of 4 frames (figure p15): synthetic likelihood 28/100; tells: clean vector</a:t>
-                      </a:r>
-                    </a:p>
-                    <a:p>
-                      <a:pPr>
-                        <a:lnSpc>
-                          <a:spcPts val="1600"/>
-                        </a:lnSpc>
-                        <a:spcAft>
-                          <a:spcPts val="0"/>
-                        </a:spcAft>
-                        <a:defRPr sz="1200" b="0">
-                          <a:solidFill>
-                            <a:srgbClr val="21243A"/>
-                          </a:solidFill>
-                          <a:latin typeface="Arial"/>
-                        </a:defRPr>
-                      </a:pPr>
-                      <a:r>
-                        <a:t>typography, standard geometric graphic design elements, absence of diffusion</a:t>
-                      </a:r>
-                    </a:p>
-                    <a:p>
-                      <a:pPr>
-                        <a:lnSpc>
-                          <a:spcPts val="1600"/>
-                        </a:lnSpc>
-                        <a:spcAft>
-                          <a:spcPts val="0"/>
-                        </a:spcAft>
-                        <a:defRPr sz="1200" b="0">
-                          <a:solidFill>
-                            <a:srgbClr val="21243A"/>
-                          </a:solidFill>
-                          <a:latin typeface="Arial"/>
-                        </a:defRPr>
-                      </a:pPr>
-                      <a:r>
-                        <a:t>generation artifacts</a:t>
+                        <a:t>Worst of 4 frames (figure p15): synthetic likelihood 30/100; tells: sharp vector-style</a:t>
+                      </a:r>
+                    </a:p>
+                    <a:p>
+                      <a:pPr>
+                        <a:lnSpc>
+                          <a:spcPts val="1600"/>
+                        </a:lnSpc>
+                        <a:spcAft>
+                          <a:spcPts val="0"/>
+                        </a:spcAft>
+                        <a:defRPr sz="1200" b="0">
+                          <a:solidFill>
+                            <a:srgbClr val="21243A"/>
+                          </a:solidFill>
+                          <a:latin typeface="Arial"/>
+                        </a:defRPr>
+                      </a:pPr>
+                      <a:r>
+                        <a:t>geometric graphics, clean digital typography, standard graphic design layout</a:t>
+                      </a:r>
+                    </a:p>
+                    <a:p>
+                      <a:pPr>
+                        <a:lnSpc>
+                          <a:spcPts val="1600"/>
+                        </a:lnSpc>
+                        <a:spcAft>
+                          <a:spcPts val="0"/>
+                        </a:spcAft>
+                        <a:defRPr sz="1200" b="0">
+                          <a:solidFill>
+                            <a:srgbClr val="21243A"/>
+                          </a:solidFill>
+                          <a:latin typeface="Arial"/>
+                        </a:defRPr>
+                      </a:pPr>
+                      <a:r>
+                        <a:t>artifacts</a:t>
                       </a:r>
                     </a:p>
                   </a:txBody>
@@ -23520,7 +23325,7 @@
                         </a:defRPr>
                       </a:pPr>
                       <a:r>
-                        <a:t>Frame figure p1: 25/100</a:t>
+                        <a:t>Frame figure p1: 28/100</a:t>
                       </a:r>
                     </a:p>
                   </a:txBody>

--- a/site/showcase/exports/infographic.pptx
+++ b/site/showcase/exports/infographic.pptx
@@ -26,6 +26,7 @@
     <p:sldId id="274" r:id="rId26"/>
     <p:sldId id="275" r:id="rId27"/>
     <p:sldId id="276" r:id="rId28"/>
+    <p:sldId id="277" r:id="rId29"/>
   </p:sldIdLst>
   <p:sldSz cx="9144000" cy="6858000" type="screen4x3"/>
   <p:notesSz cx="6858000" cy="9144000"/>
@@ -1867,72 +1868,27 @@
           </a:p>
           <a:p>
             <a:r>
-              <a:t>File and analysis record</a:t>
-            </a:r>
-          </a:p>
-          <a:p>
-            <a:r>
-              <a:t>File | infographic.pdf</a:t>
-            </a:r>
-          </a:p>
-          <a:p>
-            <a:r>
-              <a:t>Analysis ID | f46ae041-994d-44fa-997c-8e6f23dcff90</a:t>
-            </a:r>
-          </a:p>
-          <a:p>
-            <a:r>
-              <a:t>Generated | 2026-09-26T22:31:05+00:00</a:t>
-            </a:r>
-          </a:p>
-          <a:p>
-            <a:r>
-              <a:t>Tool | SDA Vision 0.1.0</a:t>
-            </a:r>
-          </a:p>
-          <a:p>
-            <a:r>
-              <a:t>Models | claude-opus-5-5, gemini-3.8-flash, gpt-6-astra</a:t>
-            </a:r>
-          </a:p>
-          <a:p>
-            <a:r>
-              <a:t>Method version | pdf-preparation-2026-09-26.1</a:t>
-            </a:r>
-          </a:p>
-          <a:p>
-            <a:r>
-              <a:t>Analysis lens | general</a:t>
-            </a:r>
-          </a:p>
-          <a:p>
-            <a:r>
-              <a:t>Original SHA-256 | 02915f051b6eb2c9ef0c21f5bb20c4229ca21324bf20172f3867c32c299a5924</a:t>
-            </a:r>
-          </a:p>
-          <a:p>
-            <a:r>
-              <a:t>Ingestion note 1 | PDF preparation: pdf-input-2026-09-26.1 (pypdf text/figures; PDFium page rendering).</a:t>
-            </a:r>
-          </a:p>
-          <a:p>
-            <a:r>
-              <a:t>Ingestion note 2 | Extracted 4 embedded figure(s) of 15 found (figure mode).</a:t>
-            </a:r>
-          </a:p>
-          <a:p>
-            <a:r>
-              <a:t>Ingestion note 3 | No selectable text layer - vision models read the page/figure images.</a:t>
-            </a:r>
-          </a:p>
-          <a:p>
-            <a:r>
-              <a:t>Ingestion note 4 | Fresh provider replies acquired for eleven-examples-refresh-20260926-r1; report assembled locally from the saved responses without further API calls.</a:t>
-            </a:r>
-          </a:p>
-          <a:p>
-            <a:r>
-              <a:t>Ingestion note 5 | Provider latency values are restored from the acquisition receipts (maximum sampled-frame latency per provider); raw replies and assessment results are unchanged by this bookkeeping step.</a:t>
+              <a:t>Cite this analysis</a:t>
+            </a:r>
+          </a:p>
+          <a:p>
+            <a:r>
+              <a:t>Software (Harvard) | Martin, S. (2026) SDA Vision: Synthetic-media Discourse Analysis (version 0.1.0) [Computer software]. Manchester Metropolitan University. Available at: https://sdavision.io/</a:t>
+            </a:r>
+          </a:p>
+          <a:p>
+            <a:r>
+              <a:t>Software creator | Dr Sam Martin, Smart Data Research UK (UKRI) Fellow, Manchester Metropolitan University (MMU). ORCID: https://orcid.org/0000-0002-4466-8374.</a:t>
+            </a:r>
+          </a:p>
+          <a:p>
+            <a:r>
+              <a:t>Funding acknowledgement | This work was supported by Smart Data Research UK, a UKRI investment; Grant number UKRI4010.</a:t>
+            </a:r>
+          </a:p>
+          <a:p>
+            <a:r>
+              <a:t>Analysis record | File: infographic.pdf; media type: pdf; recorded at: 2026-09-26T22:31:05+00:00; models: claude-opus-5-5, gemini-3.8-flash, gpt-6-astra.</a:t>
             </a:r>
           </a:p>
         </p:txBody>
@@ -1958,6 +1914,146 @@
 </file>
 
 <file path=ppt/notesSlides/notesSlide21.xml><?xml version="1.0" encoding="utf-8"?>
+<p:notes xmlns:a="http://schemas.openxmlformats.org/drawingml/2006/main" xmlns:p="http://schemas.openxmlformats.org/presentationml/2006/main" xmlns:r="http://schemas.openxmlformats.org/officeDocument/2006/relationships">
+  <p:cSld>
+    <p:spTree>
+      <p:nvGrpSpPr>
+        <p:cNvPr id="1" name=""/>
+        <p:cNvGrpSpPr/>
+        <p:nvPr/>
+      </p:nvGrpSpPr>
+      <p:grpSpPr>
+        <a:xfrm>
+          <a:off x="0" y="0"/>
+          <a:ext cx="0" cy="0"/>
+          <a:chOff x="0" y="0"/>
+          <a:chExt cx="0" cy="0"/>
+        </a:xfrm>
+      </p:grpSpPr>
+      <p:sp>
+        <p:nvSpPr>
+          <p:cNvPr id="2" name="Slide Image Placeholder 1"/>
+          <p:cNvSpPr>
+            <a:spLocks noGrp="1"/>
+          </p:cNvSpPr>
+          <p:nvPr>
+            <p:ph type="sldImg" idx="2"/>
+          </p:nvPr>
+        </p:nvSpPr>
+        <p:spPr/>
+      </p:sp>
+      <p:sp>
+        <p:nvSpPr>
+          <p:cNvPr id="3" name="Notes Placeholder 2"/>
+          <p:cNvSpPr>
+            <a:spLocks noGrp="1"/>
+          </p:cNvSpPr>
+          <p:nvPr>
+            <p:ph type="body" idx="3" sz="quarter"/>
+          </p:nvPr>
+        </p:nvSpPr>
+        <p:spPr/>
+        <p:txBody>
+          <a:bodyPr/>
+          <a:lstStyle/>
+          <a:p>
+            <a:r>
+              <a:t>infographic.pdf</a:t>
+            </a:r>
+          </a:p>
+          <a:p>
+            <a:r>
+              <a:t>File and analysis record</a:t>
+            </a:r>
+          </a:p>
+          <a:p>
+            <a:r>
+              <a:t>File | infographic.pdf</a:t>
+            </a:r>
+          </a:p>
+          <a:p>
+            <a:r>
+              <a:t>Analysis ID | f46ae041-994d-44fa-997c-8e6f23dcff90</a:t>
+            </a:r>
+          </a:p>
+          <a:p>
+            <a:r>
+              <a:t>Generated | 2026-09-26T22:31:05+00:00</a:t>
+            </a:r>
+          </a:p>
+          <a:p>
+            <a:r>
+              <a:t>Tool | SDA Vision 0.1.0</a:t>
+            </a:r>
+          </a:p>
+          <a:p>
+            <a:r>
+              <a:t>Models | claude-opus-5-5, gemini-3.8-flash, gpt-6-astra</a:t>
+            </a:r>
+          </a:p>
+          <a:p>
+            <a:r>
+              <a:t>Method version | pdf-preparation-2026-09-26.1</a:t>
+            </a:r>
+          </a:p>
+          <a:p>
+            <a:r>
+              <a:t>Analysis lens | general</a:t>
+            </a:r>
+          </a:p>
+          <a:p>
+            <a:r>
+              <a:t>Original SHA-256 | 02915f051b6eb2c9ef0c21f5bb20c4229ca21324bf20172f3867c32c299a5924</a:t>
+            </a:r>
+          </a:p>
+          <a:p>
+            <a:r>
+              <a:t>Ingestion note 1 | PDF preparation: pdf-input-2026-09-26.1 (pypdf text/figures; PDFium page rendering).</a:t>
+            </a:r>
+          </a:p>
+          <a:p>
+            <a:r>
+              <a:t>Ingestion note 2 | Extracted 4 embedded figure(s) of 15 found (figure mode).</a:t>
+            </a:r>
+          </a:p>
+          <a:p>
+            <a:r>
+              <a:t>Ingestion note 3 | No selectable text layer - vision models read the page/figure images.</a:t>
+            </a:r>
+          </a:p>
+          <a:p>
+            <a:r>
+              <a:t>Ingestion note 4 | Fresh provider replies acquired for eleven-examples-refresh-20260926-r1; report assembled locally from the saved responses without further API calls.</a:t>
+            </a:r>
+          </a:p>
+          <a:p>
+            <a:r>
+              <a:t>Ingestion note 5 | Provider latency values are restored from the acquisition receipts (maximum sampled-frame latency per provider); raw replies and assessment results are unchanged by this bookkeeping step.</a:t>
+            </a:r>
+          </a:p>
+        </p:txBody>
+      </p:sp>
+      <p:sp>
+        <p:nvSpPr>
+          <p:cNvPr id="4" name="Slide Number Placeholder 3"/>
+          <p:cNvSpPr>
+            <a:spLocks noGrp="1"/>
+          </p:cNvSpPr>
+          <p:nvPr>
+            <p:ph type="sldNum" idx="5" sz="quarter"/>
+          </p:nvPr>
+        </p:nvSpPr>
+        <p:spPr/>
+      </p:sp>
+    </p:spTree>
+  </p:cSld>
+  <p:clrMapOvr>
+    <a:masterClrMapping/>
+  </p:clrMapOvr>
+</p:notes>
+</file>
+
+<file path=ppt/notesSlides/notesSlide22.xml><?xml version="1.0" encoding="utf-8"?>
 <p:notes xmlns:a="http://schemas.openxmlformats.org/drawingml/2006/main" xmlns:p="http://schemas.openxmlformats.org/presentationml/2006/main" xmlns:r="http://schemas.openxmlformats.org/officeDocument/2006/relationships">
   <p:cSld>
     <p:spTree>
@@ -14737,7 +14833,7 @@
               </a:defRPr>
             </a:pPr>
             <a:r>
-              <a:t>File and analysis record</a:t>
+              <a:t>Cite this analysis</a:t>
             </a:r>
           </a:p>
         </p:txBody>
@@ -14924,7 +15020,7 @@
         </p:nvGraphicFramePr>
         <p:xfrm>
           <a:off x="365760" y="1700784"/>
-          <a:ext cx="8412479" cy="349504"/>
+          <a:ext cx="8412479" cy="755904"/>
         </p:xfrm>
         <a:graphic>
           <a:graphicData uri="http://schemas.openxmlformats.org/drawingml/2006/table">
@@ -14936,28 +15032,28 @@
                 <a:gridCol w="2271369"/>
                 <a:gridCol w="6141110"/>
               </a:tblGrid>
-              <a:tr h="349504">
-                <a:tc>
-                  <a:txBody>
-                    <a:bodyPr wrap="none"/>
-                    <a:lstStyle/>
-                    <a:p>
-                      <a:pPr>
-                        <a:lnSpc>
-                          <a:spcPts val="1600"/>
-                        </a:lnSpc>
-                        <a:spcAft>
-                          <a:spcPts val="0"/>
-                        </a:spcAft>
-                        <a:defRPr sz="1200" b="0">
-                          <a:solidFill>
-                            <a:srgbClr val="21243A"/>
-                          </a:solidFill>
-                          <a:latin typeface="Arial"/>
-                        </a:defRPr>
-                      </a:pPr>
-                      <a:r>
-                        <a:t>File</a:t>
+              <a:tr h="755904">
+                <a:tc>
+                  <a:txBody>
+                    <a:bodyPr wrap="none"/>
+                    <a:lstStyle/>
+                    <a:p>
+                      <a:pPr>
+                        <a:lnSpc>
+                          <a:spcPts val="1600"/>
+                        </a:lnSpc>
+                        <a:spcAft>
+                          <a:spcPts val="0"/>
+                        </a:spcAft>
+                        <a:defRPr sz="1200" b="0">
+                          <a:solidFill>
+                            <a:srgbClr val="21243A"/>
+                          </a:solidFill>
+                          <a:latin typeface="Arial"/>
+                        </a:defRPr>
+                      </a:pPr>
+                      <a:r>
+                        <a:t>Software (Harvard)</a:t>
                       </a:r>
                     </a:p>
                   </a:txBody>
@@ -14987,7 +15083,45 @@
                         </a:defRPr>
                       </a:pPr>
                       <a:r>
-                        <a:t>infographic.pdf</a:t>
+                        <a:t>Martin, S. (2026) SDA Vision: Synthetic-media Discourse Analysis (version 0.1.0)</a:t>
+                      </a:r>
+                    </a:p>
+                    <a:p>
+                      <a:pPr>
+                        <a:lnSpc>
+                          <a:spcPts val="1600"/>
+                        </a:lnSpc>
+                        <a:spcAft>
+                          <a:spcPts val="0"/>
+                        </a:spcAft>
+                        <a:defRPr sz="1200" b="0">
+                          <a:solidFill>
+                            <a:srgbClr val="21243A"/>
+                          </a:solidFill>
+                          <a:latin typeface="Arial"/>
+                        </a:defRPr>
+                      </a:pPr>
+                      <a:r>
+                        <a:t>[Computer software]. Manchester Metropolitan University. Available at:</a:t>
+                      </a:r>
+                    </a:p>
+                    <a:p>
+                      <a:pPr>
+                        <a:lnSpc>
+                          <a:spcPts val="1600"/>
+                        </a:lnSpc>
+                        <a:spcAft>
+                          <a:spcPts val="0"/>
+                        </a:spcAft>
+                        <a:defRPr sz="1200" b="0">
+                          <a:solidFill>
+                            <a:srgbClr val="21243A"/>
+                          </a:solidFill>
+                          <a:latin typeface="Arial"/>
+                        </a:defRPr>
+                      </a:pPr>
+                      <a:r>
+                        <a:t>https://sdavision.io/</a:t>
                       </a:r>
                     </a:p>
                   </a:txBody>
@@ -15011,8 +15145,8 @@
           <p:nvPr/>
         </p:nvGraphicFramePr>
         <p:xfrm>
-          <a:off x="365760" y="2050288"/>
-          <a:ext cx="8412479" cy="349504"/>
+          <a:off x="365760" y="2456688"/>
+          <a:ext cx="8412479" cy="552704"/>
         </p:xfrm>
         <a:graphic>
           <a:graphicData uri="http://schemas.openxmlformats.org/drawingml/2006/table">
@@ -15024,28 +15158,28 @@
                 <a:gridCol w="2271369"/>
                 <a:gridCol w="6141110"/>
               </a:tblGrid>
-              <a:tr h="349504">
-                <a:tc>
-                  <a:txBody>
-                    <a:bodyPr wrap="none"/>
-                    <a:lstStyle/>
-                    <a:p>
-                      <a:pPr>
-                        <a:lnSpc>
-                          <a:spcPts val="1600"/>
-                        </a:lnSpc>
-                        <a:spcAft>
-                          <a:spcPts val="0"/>
-                        </a:spcAft>
-                        <a:defRPr sz="1200" b="0">
-                          <a:solidFill>
-                            <a:srgbClr val="21243A"/>
-                          </a:solidFill>
-                          <a:latin typeface="Arial"/>
-                        </a:defRPr>
-                      </a:pPr>
-                      <a:r>
-                        <a:t>Analysis ID</a:t>
+              <a:tr h="552704">
+                <a:tc>
+                  <a:txBody>
+                    <a:bodyPr wrap="none"/>
+                    <a:lstStyle/>
+                    <a:p>
+                      <a:pPr>
+                        <a:lnSpc>
+                          <a:spcPts val="1600"/>
+                        </a:lnSpc>
+                        <a:spcAft>
+                          <a:spcPts val="0"/>
+                        </a:spcAft>
+                        <a:defRPr sz="1200" b="0">
+                          <a:solidFill>
+                            <a:srgbClr val="21243A"/>
+                          </a:solidFill>
+                          <a:latin typeface="Arial"/>
+                        </a:defRPr>
+                      </a:pPr>
+                      <a:r>
+                        <a:t>Software creator</a:t>
                       </a:r>
                     </a:p>
                   </a:txBody>
@@ -15075,7 +15209,26 @@
                         </a:defRPr>
                       </a:pPr>
                       <a:r>
-                        <a:t>f46ae041-994d-44fa-997c-8e6f23dcff90</a:t>
+                        <a:t>Dr Sam Martin, Smart Data Research UK (UKRI) Fellow, Manchester Metropolitan</a:t>
+                      </a:r>
+                    </a:p>
+                    <a:p>
+                      <a:pPr>
+                        <a:lnSpc>
+                          <a:spcPts val="1600"/>
+                        </a:lnSpc>
+                        <a:spcAft>
+                          <a:spcPts val="0"/>
+                        </a:spcAft>
+                        <a:defRPr sz="1200" b="0">
+                          <a:solidFill>
+                            <a:srgbClr val="21243A"/>
+                          </a:solidFill>
+                          <a:latin typeface="Arial"/>
+                        </a:defRPr>
+                      </a:pPr>
+                      <a:r>
+                        <a:t>University (MMU). ORCID: https://orcid.org/0000-0002-4466-8374.</a:t>
                       </a:r>
                     </a:p>
                   </a:txBody>
@@ -15099,8 +15252,8 @@
           <p:nvPr/>
         </p:nvGraphicFramePr>
         <p:xfrm>
-          <a:off x="365760" y="2399792"/>
-          <a:ext cx="8412479" cy="349504"/>
+          <a:off x="365760" y="3009392"/>
+          <a:ext cx="8412479" cy="552704"/>
         </p:xfrm>
         <a:graphic>
           <a:graphicData uri="http://schemas.openxmlformats.org/drawingml/2006/table">
@@ -15112,28 +15265,28 @@
                 <a:gridCol w="2271369"/>
                 <a:gridCol w="6141110"/>
               </a:tblGrid>
-              <a:tr h="349504">
-                <a:tc>
-                  <a:txBody>
-                    <a:bodyPr wrap="none"/>
-                    <a:lstStyle/>
-                    <a:p>
-                      <a:pPr>
-                        <a:lnSpc>
-                          <a:spcPts val="1600"/>
-                        </a:lnSpc>
-                        <a:spcAft>
-                          <a:spcPts val="0"/>
-                        </a:spcAft>
-                        <a:defRPr sz="1200" b="0">
-                          <a:solidFill>
-                            <a:srgbClr val="21243A"/>
-                          </a:solidFill>
-                          <a:latin typeface="Arial"/>
-                        </a:defRPr>
-                      </a:pPr>
-                      <a:r>
-                        <a:t>Generated</a:t>
+              <a:tr h="552704">
+                <a:tc>
+                  <a:txBody>
+                    <a:bodyPr wrap="none"/>
+                    <a:lstStyle/>
+                    <a:p>
+                      <a:pPr>
+                        <a:lnSpc>
+                          <a:spcPts val="1600"/>
+                        </a:lnSpc>
+                        <a:spcAft>
+                          <a:spcPts val="0"/>
+                        </a:spcAft>
+                        <a:defRPr sz="1200" b="0">
+                          <a:solidFill>
+                            <a:srgbClr val="21243A"/>
+                          </a:solidFill>
+                          <a:latin typeface="Arial"/>
+                        </a:defRPr>
+                      </a:pPr>
+                      <a:r>
+                        <a:t>Funding acknowledgement</a:t>
                       </a:r>
                     </a:p>
                   </a:txBody>
@@ -15163,7 +15316,26 @@
                         </a:defRPr>
                       </a:pPr>
                       <a:r>
-                        <a:t>2026-09-26T22:31:05+00:00</a:t>
+                        <a:t>This work was supported by Smart Data Research UK, a UKRI investment; Grant</a:t>
+                      </a:r>
+                    </a:p>
+                    <a:p>
+                      <a:pPr>
+                        <a:lnSpc>
+                          <a:spcPts val="1600"/>
+                        </a:lnSpc>
+                        <a:spcAft>
+                          <a:spcPts val="0"/>
+                        </a:spcAft>
+                        <a:defRPr sz="1200" b="0">
+                          <a:solidFill>
+                            <a:srgbClr val="21243A"/>
+                          </a:solidFill>
+                          <a:latin typeface="Arial"/>
+                        </a:defRPr>
+                      </a:pPr>
+                      <a:r>
+                        <a:t>number UKRI4010.</a:t>
                       </a:r>
                     </a:p>
                   </a:txBody>
@@ -15187,447 +15359,7 @@
           <p:nvPr/>
         </p:nvGraphicFramePr>
         <p:xfrm>
-          <a:off x="365760" y="2749296"/>
-          <a:ext cx="8412479" cy="349504"/>
-        </p:xfrm>
-        <a:graphic>
-          <a:graphicData uri="http://schemas.openxmlformats.org/drawingml/2006/table">
-            <a:tbl>
-              <a:tblPr firstRow="1" bandRow="1">
-                <a:tableStyleId>{5C22544A-7EE6-4342-B048-85BDC9FD1C3A}</a:tableStyleId>
-              </a:tblPr>
-              <a:tblGrid>
-                <a:gridCol w="2271369"/>
-                <a:gridCol w="6141110"/>
-              </a:tblGrid>
-              <a:tr h="349504">
-                <a:tc>
-                  <a:txBody>
-                    <a:bodyPr wrap="none"/>
-                    <a:lstStyle/>
-                    <a:p>
-                      <a:pPr>
-                        <a:lnSpc>
-                          <a:spcPts val="1600"/>
-                        </a:lnSpc>
-                        <a:spcAft>
-                          <a:spcPts val="0"/>
-                        </a:spcAft>
-                        <a:defRPr sz="1200" b="0">
-                          <a:solidFill>
-                            <a:srgbClr val="21243A"/>
-                          </a:solidFill>
-                          <a:latin typeface="Arial"/>
-                        </a:defRPr>
-                      </a:pPr>
-                      <a:r>
-                        <a:t>Tool</a:t>
-                      </a:r>
-                    </a:p>
-                  </a:txBody>
-                  <a:tcPr marL="82296" marR="82296" marT="64008" marB="64008">
-                    <a:solidFill>
-                      <a:srgbClr val="FFFFFF"/>
-                    </a:solidFill>
-                  </a:tcPr>
-                </a:tc>
-                <a:tc>
-                  <a:txBody>
-                    <a:bodyPr wrap="none"/>
-                    <a:lstStyle/>
-                    <a:p>
-                      <a:pPr>
-                        <a:lnSpc>
-                          <a:spcPts val="1600"/>
-                        </a:lnSpc>
-                        <a:spcAft>
-                          <a:spcPts val="0"/>
-                        </a:spcAft>
-                        <a:defRPr sz="1200" b="0">
-                          <a:solidFill>
-                            <a:srgbClr val="21243A"/>
-                          </a:solidFill>
-                          <a:latin typeface="Arial"/>
-                        </a:defRPr>
-                      </a:pPr>
-                      <a:r>
-                        <a:t>SDA Vision 0.1.0</a:t>
-                      </a:r>
-                    </a:p>
-                  </a:txBody>
-                  <a:tcPr marL="82296" marR="82296" marT="64008" marB="64008">
-                    <a:solidFill>
-                      <a:srgbClr val="FFFFFF"/>
-                    </a:solidFill>
-                  </a:tcPr>
-                </a:tc>
-              </a:tr>
-            </a:tbl>
-          </a:graphicData>
-        </a:graphic>
-      </p:graphicFrame>
-      <p:graphicFrame>
-        <p:nvGraphicFramePr>
-          <p:cNvPr id="11" name="Table 10"/>
-          <p:cNvGraphicFramePr>
-            <a:graphicFrameLocks noGrp="1"/>
-          </p:cNvGraphicFramePr>
-          <p:nvPr/>
-        </p:nvGraphicFramePr>
-        <p:xfrm>
-          <a:off x="365760" y="3098800"/>
-          <a:ext cx="8412479" cy="349504"/>
-        </p:xfrm>
-        <a:graphic>
-          <a:graphicData uri="http://schemas.openxmlformats.org/drawingml/2006/table">
-            <a:tbl>
-              <a:tblPr firstRow="1" bandRow="1">
-                <a:tableStyleId>{5C22544A-7EE6-4342-B048-85BDC9FD1C3A}</a:tableStyleId>
-              </a:tblPr>
-              <a:tblGrid>
-                <a:gridCol w="2271369"/>
-                <a:gridCol w="6141110"/>
-              </a:tblGrid>
-              <a:tr h="349504">
-                <a:tc>
-                  <a:txBody>
-                    <a:bodyPr wrap="none"/>
-                    <a:lstStyle/>
-                    <a:p>
-                      <a:pPr>
-                        <a:lnSpc>
-                          <a:spcPts val="1600"/>
-                        </a:lnSpc>
-                        <a:spcAft>
-                          <a:spcPts val="0"/>
-                        </a:spcAft>
-                        <a:defRPr sz="1200" b="0">
-                          <a:solidFill>
-                            <a:srgbClr val="21243A"/>
-                          </a:solidFill>
-                          <a:latin typeface="Arial"/>
-                        </a:defRPr>
-                      </a:pPr>
-                      <a:r>
-                        <a:t>Models</a:t>
-                      </a:r>
-                    </a:p>
-                  </a:txBody>
-                  <a:tcPr marL="82296" marR="82296" marT="64008" marB="64008">
-                    <a:solidFill>
-                      <a:srgbClr val="F1F7F7"/>
-                    </a:solidFill>
-                  </a:tcPr>
-                </a:tc>
-                <a:tc>
-                  <a:txBody>
-                    <a:bodyPr wrap="none"/>
-                    <a:lstStyle/>
-                    <a:p>
-                      <a:pPr>
-                        <a:lnSpc>
-                          <a:spcPts val="1600"/>
-                        </a:lnSpc>
-                        <a:spcAft>
-                          <a:spcPts val="0"/>
-                        </a:spcAft>
-                        <a:defRPr sz="1200" b="0">
-                          <a:solidFill>
-                            <a:srgbClr val="21243A"/>
-                          </a:solidFill>
-                          <a:latin typeface="Arial"/>
-                        </a:defRPr>
-                      </a:pPr>
-                      <a:r>
-                        <a:t>claude-opus-5-5, gemini-3.8-flash, gpt-6-astra</a:t>
-                      </a:r>
-                    </a:p>
-                  </a:txBody>
-                  <a:tcPr marL="82296" marR="82296" marT="64008" marB="64008">
-                    <a:solidFill>
-                      <a:srgbClr val="F1F7F7"/>
-                    </a:solidFill>
-                  </a:tcPr>
-                </a:tc>
-              </a:tr>
-            </a:tbl>
-          </a:graphicData>
-        </a:graphic>
-      </p:graphicFrame>
-      <p:graphicFrame>
-        <p:nvGraphicFramePr>
-          <p:cNvPr id="12" name="Table 11"/>
-          <p:cNvGraphicFramePr>
-            <a:graphicFrameLocks noGrp="1"/>
-          </p:cNvGraphicFramePr>
-          <p:nvPr/>
-        </p:nvGraphicFramePr>
-        <p:xfrm>
-          <a:off x="365760" y="3448304"/>
-          <a:ext cx="8412479" cy="349504"/>
-        </p:xfrm>
-        <a:graphic>
-          <a:graphicData uri="http://schemas.openxmlformats.org/drawingml/2006/table">
-            <a:tbl>
-              <a:tblPr firstRow="1" bandRow="1">
-                <a:tableStyleId>{5C22544A-7EE6-4342-B048-85BDC9FD1C3A}</a:tableStyleId>
-              </a:tblPr>
-              <a:tblGrid>
-                <a:gridCol w="2271369"/>
-                <a:gridCol w="6141110"/>
-              </a:tblGrid>
-              <a:tr h="349504">
-                <a:tc>
-                  <a:txBody>
-                    <a:bodyPr wrap="none"/>
-                    <a:lstStyle/>
-                    <a:p>
-                      <a:pPr>
-                        <a:lnSpc>
-                          <a:spcPts val="1600"/>
-                        </a:lnSpc>
-                        <a:spcAft>
-                          <a:spcPts val="0"/>
-                        </a:spcAft>
-                        <a:defRPr sz="1200" b="0">
-                          <a:solidFill>
-                            <a:srgbClr val="21243A"/>
-                          </a:solidFill>
-                          <a:latin typeface="Arial"/>
-                        </a:defRPr>
-                      </a:pPr>
-                      <a:r>
-                        <a:t>Method version</a:t>
-                      </a:r>
-                    </a:p>
-                  </a:txBody>
-                  <a:tcPr marL="82296" marR="82296" marT="64008" marB="64008">
-                    <a:solidFill>
-                      <a:srgbClr val="FFFFFF"/>
-                    </a:solidFill>
-                  </a:tcPr>
-                </a:tc>
-                <a:tc>
-                  <a:txBody>
-                    <a:bodyPr wrap="none"/>
-                    <a:lstStyle/>
-                    <a:p>
-                      <a:pPr>
-                        <a:lnSpc>
-                          <a:spcPts val="1600"/>
-                        </a:lnSpc>
-                        <a:spcAft>
-                          <a:spcPts val="0"/>
-                        </a:spcAft>
-                        <a:defRPr sz="1200" b="0">
-                          <a:solidFill>
-                            <a:srgbClr val="21243A"/>
-                          </a:solidFill>
-                          <a:latin typeface="Arial"/>
-                        </a:defRPr>
-                      </a:pPr>
-                      <a:r>
-                        <a:t>pdf-preparation-2026-09-26.1</a:t>
-                      </a:r>
-                    </a:p>
-                  </a:txBody>
-                  <a:tcPr marL="82296" marR="82296" marT="64008" marB="64008">
-                    <a:solidFill>
-                      <a:srgbClr val="FFFFFF"/>
-                    </a:solidFill>
-                  </a:tcPr>
-                </a:tc>
-              </a:tr>
-            </a:tbl>
-          </a:graphicData>
-        </a:graphic>
-      </p:graphicFrame>
-      <p:graphicFrame>
-        <p:nvGraphicFramePr>
-          <p:cNvPr id="13" name="Table 12"/>
-          <p:cNvGraphicFramePr>
-            <a:graphicFrameLocks noGrp="1"/>
-          </p:cNvGraphicFramePr>
-          <p:nvPr/>
-        </p:nvGraphicFramePr>
-        <p:xfrm>
-          <a:off x="365760" y="3797808"/>
-          <a:ext cx="8412479" cy="349504"/>
-        </p:xfrm>
-        <a:graphic>
-          <a:graphicData uri="http://schemas.openxmlformats.org/drawingml/2006/table">
-            <a:tbl>
-              <a:tblPr firstRow="1" bandRow="1">
-                <a:tableStyleId>{5C22544A-7EE6-4342-B048-85BDC9FD1C3A}</a:tableStyleId>
-              </a:tblPr>
-              <a:tblGrid>
-                <a:gridCol w="2271369"/>
-                <a:gridCol w="6141110"/>
-              </a:tblGrid>
-              <a:tr h="349504">
-                <a:tc>
-                  <a:txBody>
-                    <a:bodyPr wrap="none"/>
-                    <a:lstStyle/>
-                    <a:p>
-                      <a:pPr>
-                        <a:lnSpc>
-                          <a:spcPts val="1600"/>
-                        </a:lnSpc>
-                        <a:spcAft>
-                          <a:spcPts val="0"/>
-                        </a:spcAft>
-                        <a:defRPr sz="1200" b="0">
-                          <a:solidFill>
-                            <a:srgbClr val="21243A"/>
-                          </a:solidFill>
-                          <a:latin typeface="Arial"/>
-                        </a:defRPr>
-                      </a:pPr>
-                      <a:r>
-                        <a:t>Analysis lens</a:t>
-                      </a:r>
-                    </a:p>
-                  </a:txBody>
-                  <a:tcPr marL="82296" marR="82296" marT="64008" marB="64008">
-                    <a:solidFill>
-                      <a:srgbClr val="F1F7F7"/>
-                    </a:solidFill>
-                  </a:tcPr>
-                </a:tc>
-                <a:tc>
-                  <a:txBody>
-                    <a:bodyPr wrap="none"/>
-                    <a:lstStyle/>
-                    <a:p>
-                      <a:pPr>
-                        <a:lnSpc>
-                          <a:spcPts val="1600"/>
-                        </a:lnSpc>
-                        <a:spcAft>
-                          <a:spcPts val="0"/>
-                        </a:spcAft>
-                        <a:defRPr sz="1200" b="0">
-                          <a:solidFill>
-                            <a:srgbClr val="21243A"/>
-                          </a:solidFill>
-                          <a:latin typeface="Arial"/>
-                        </a:defRPr>
-                      </a:pPr>
-                      <a:r>
-                        <a:t>general</a:t>
-                      </a:r>
-                    </a:p>
-                  </a:txBody>
-                  <a:tcPr marL="82296" marR="82296" marT="64008" marB="64008">
-                    <a:solidFill>
-                      <a:srgbClr val="F1F7F7"/>
-                    </a:solidFill>
-                  </a:tcPr>
-                </a:tc>
-              </a:tr>
-            </a:tbl>
-          </a:graphicData>
-        </a:graphic>
-      </p:graphicFrame>
-      <p:graphicFrame>
-        <p:nvGraphicFramePr>
-          <p:cNvPr id="14" name="Table 13"/>
-          <p:cNvGraphicFramePr>
-            <a:graphicFrameLocks noGrp="1"/>
-          </p:cNvGraphicFramePr>
-          <p:nvPr/>
-        </p:nvGraphicFramePr>
-        <p:xfrm>
-          <a:off x="365760" y="4147312"/>
-          <a:ext cx="8412479" cy="349504"/>
-        </p:xfrm>
-        <a:graphic>
-          <a:graphicData uri="http://schemas.openxmlformats.org/drawingml/2006/table">
-            <a:tbl>
-              <a:tblPr firstRow="1" bandRow="1">
-                <a:tableStyleId>{5C22544A-7EE6-4342-B048-85BDC9FD1C3A}</a:tableStyleId>
-              </a:tblPr>
-              <a:tblGrid>
-                <a:gridCol w="2271369"/>
-                <a:gridCol w="6141110"/>
-              </a:tblGrid>
-              <a:tr h="349504">
-                <a:tc>
-                  <a:txBody>
-                    <a:bodyPr wrap="none"/>
-                    <a:lstStyle/>
-                    <a:p>
-                      <a:pPr>
-                        <a:lnSpc>
-                          <a:spcPts val="1600"/>
-                        </a:lnSpc>
-                        <a:spcAft>
-                          <a:spcPts val="0"/>
-                        </a:spcAft>
-                        <a:defRPr sz="1200" b="0">
-                          <a:solidFill>
-                            <a:srgbClr val="21243A"/>
-                          </a:solidFill>
-                          <a:latin typeface="Arial"/>
-                        </a:defRPr>
-                      </a:pPr>
-                      <a:r>
-                        <a:t>Original SHA-256</a:t>
-                      </a:r>
-                    </a:p>
-                  </a:txBody>
-                  <a:tcPr marL="82296" marR="82296" marT="64008" marB="64008">
-                    <a:solidFill>
-                      <a:srgbClr val="FFFFFF"/>
-                    </a:solidFill>
-                  </a:tcPr>
-                </a:tc>
-                <a:tc>
-                  <a:txBody>
-                    <a:bodyPr wrap="none"/>
-                    <a:lstStyle/>
-                    <a:p>
-                      <a:pPr>
-                        <a:lnSpc>
-                          <a:spcPts val="1600"/>
-                        </a:lnSpc>
-                        <a:spcAft>
-                          <a:spcPts val="0"/>
-                        </a:spcAft>
-                        <a:defRPr sz="1200" b="0">
-                          <a:solidFill>
-                            <a:srgbClr val="21243A"/>
-                          </a:solidFill>
-                          <a:latin typeface="Arial"/>
-                        </a:defRPr>
-                      </a:pPr>
-                      <a:r>
-                        <a:t>02915f051b6eb2c9ef0c21f5bb20c4229ca21324bf20172f3867c32c299a5924</a:t>
-                      </a:r>
-                    </a:p>
-                  </a:txBody>
-                  <a:tcPr marL="82296" marR="82296" marT="64008" marB="64008">
-                    <a:solidFill>
-                      <a:srgbClr val="FFFFFF"/>
-                    </a:solidFill>
-                  </a:tcPr>
-                </a:tc>
-              </a:tr>
-            </a:tbl>
-          </a:graphicData>
-        </a:graphic>
-      </p:graphicFrame>
-      <p:graphicFrame>
-        <p:nvGraphicFramePr>
-          <p:cNvPr id="15" name="Table 14"/>
-          <p:cNvGraphicFramePr>
-            <a:graphicFrameLocks noGrp="1"/>
-          </p:cNvGraphicFramePr>
-          <p:nvPr/>
-        </p:nvGraphicFramePr>
-        <p:xfrm>
-          <a:off x="365760" y="4496816"/>
+          <a:off x="365760" y="3562095"/>
           <a:ext cx="8412479" cy="552704"/>
         </p:xfrm>
         <a:graphic>
@@ -15661,114 +15393,7 @@
                         </a:defRPr>
                       </a:pPr>
                       <a:r>
-                        <a:t>Ingestion note 1</a:t>
-                      </a:r>
-                    </a:p>
-                  </a:txBody>
-                  <a:tcPr marL="82296" marR="82296" marT="64008" marB="64008">
-                    <a:solidFill>
-                      <a:srgbClr val="F1F7F7"/>
-                    </a:solidFill>
-                  </a:tcPr>
-                </a:tc>
-                <a:tc>
-                  <a:txBody>
-                    <a:bodyPr wrap="none"/>
-                    <a:lstStyle/>
-                    <a:p>
-                      <a:pPr>
-                        <a:lnSpc>
-                          <a:spcPts val="1600"/>
-                        </a:lnSpc>
-                        <a:spcAft>
-                          <a:spcPts val="0"/>
-                        </a:spcAft>
-                        <a:defRPr sz="1200" b="0">
-                          <a:solidFill>
-                            <a:srgbClr val="21243A"/>
-                          </a:solidFill>
-                          <a:latin typeface="Arial"/>
-                        </a:defRPr>
-                      </a:pPr>
-                      <a:r>
-                        <a:t>PDF preparation: pdf-input-2026-09-26.1 (pypdf text/figures; PDFium page</a:t>
-                      </a:r>
-                    </a:p>
-                    <a:p>
-                      <a:pPr>
-                        <a:lnSpc>
-                          <a:spcPts val="1600"/>
-                        </a:lnSpc>
-                        <a:spcAft>
-                          <a:spcPts val="0"/>
-                        </a:spcAft>
-                        <a:defRPr sz="1200" b="0">
-                          <a:solidFill>
-                            <a:srgbClr val="21243A"/>
-                          </a:solidFill>
-                          <a:latin typeface="Arial"/>
-                        </a:defRPr>
-                      </a:pPr>
-                      <a:r>
-                        <a:t>rendering).</a:t>
-                      </a:r>
-                    </a:p>
-                  </a:txBody>
-                  <a:tcPr marL="82296" marR="82296" marT="64008" marB="64008">
-                    <a:solidFill>
-                      <a:srgbClr val="F1F7F7"/>
-                    </a:solidFill>
-                  </a:tcPr>
-                </a:tc>
-              </a:tr>
-            </a:tbl>
-          </a:graphicData>
-        </a:graphic>
-      </p:graphicFrame>
-      <p:graphicFrame>
-        <p:nvGraphicFramePr>
-          <p:cNvPr id="16" name="Table 15"/>
-          <p:cNvGraphicFramePr>
-            <a:graphicFrameLocks noGrp="1"/>
-          </p:cNvGraphicFramePr>
-          <p:nvPr/>
-        </p:nvGraphicFramePr>
-        <p:xfrm>
-          <a:off x="365760" y="5049520"/>
-          <a:ext cx="8412479" cy="349504"/>
-        </p:xfrm>
-        <a:graphic>
-          <a:graphicData uri="http://schemas.openxmlformats.org/drawingml/2006/table">
-            <a:tbl>
-              <a:tblPr firstRow="1" bandRow="1">
-                <a:tableStyleId>{5C22544A-7EE6-4342-B048-85BDC9FD1C3A}</a:tableStyleId>
-              </a:tblPr>
-              <a:tblGrid>
-                <a:gridCol w="2271369"/>
-                <a:gridCol w="6141110"/>
-              </a:tblGrid>
-              <a:tr h="349504">
-                <a:tc>
-                  <a:txBody>
-                    <a:bodyPr wrap="none"/>
-                    <a:lstStyle/>
-                    <a:p>
-                      <a:pPr>
-                        <a:lnSpc>
-                          <a:spcPts val="1600"/>
-                        </a:lnSpc>
-                        <a:spcAft>
-                          <a:spcPts val="0"/>
-                        </a:spcAft>
-                        <a:defRPr sz="1200" b="0">
-                          <a:solidFill>
-                            <a:srgbClr val="21243A"/>
-                          </a:solidFill>
-                          <a:latin typeface="Arial"/>
-                        </a:defRPr>
-                      </a:pPr>
-                      <a:r>
-                        <a:t>Ingestion note 2</a:t>
+                        <a:t>Analysis record</a:t>
                       </a:r>
                     </a:p>
                   </a:txBody>
@@ -15798,101 +15423,32 @@
                         </a:defRPr>
                       </a:pPr>
                       <a:r>
-                        <a:t>Extracted 4 embedded figure(s) of 15 found (figure mode).</a:t>
+                        <a:t>File: infographic.pdf; media type: pdf; recorded at: 2026-09-26T22:31:05+00:00;</a:t>
+                      </a:r>
+                    </a:p>
+                    <a:p>
+                      <a:pPr>
+                        <a:lnSpc>
+                          <a:spcPts val="1600"/>
+                        </a:lnSpc>
+                        <a:spcAft>
+                          <a:spcPts val="0"/>
+                        </a:spcAft>
+                        <a:defRPr sz="1200" b="0">
+                          <a:solidFill>
+                            <a:srgbClr val="21243A"/>
+                          </a:solidFill>
+                          <a:latin typeface="Arial"/>
+                        </a:defRPr>
+                      </a:pPr>
+                      <a:r>
+                        <a:t>models: claude-opus-5-5, gemini-3.8-flash, gpt-6-astra.</a:t>
                       </a:r>
                     </a:p>
                   </a:txBody>
                   <a:tcPr marL="82296" marR="82296" marT="64008" marB="64008">
                     <a:solidFill>
                       <a:srgbClr val="FFFFFF"/>
-                    </a:solidFill>
-                  </a:tcPr>
-                </a:tc>
-              </a:tr>
-            </a:tbl>
-          </a:graphicData>
-        </a:graphic>
-      </p:graphicFrame>
-      <p:graphicFrame>
-        <p:nvGraphicFramePr>
-          <p:cNvPr id="17" name="Table 16"/>
-          <p:cNvGraphicFramePr>
-            <a:graphicFrameLocks noGrp="1"/>
-          </p:cNvGraphicFramePr>
-          <p:nvPr/>
-        </p:nvGraphicFramePr>
-        <p:xfrm>
-          <a:off x="365760" y="5399024"/>
-          <a:ext cx="8412479" cy="349504"/>
-        </p:xfrm>
-        <a:graphic>
-          <a:graphicData uri="http://schemas.openxmlformats.org/drawingml/2006/table">
-            <a:tbl>
-              <a:tblPr firstRow="1" bandRow="1">
-                <a:tableStyleId>{5C22544A-7EE6-4342-B048-85BDC9FD1C3A}</a:tableStyleId>
-              </a:tblPr>
-              <a:tblGrid>
-                <a:gridCol w="2271369"/>
-                <a:gridCol w="6141110"/>
-              </a:tblGrid>
-              <a:tr h="349504">
-                <a:tc>
-                  <a:txBody>
-                    <a:bodyPr wrap="none"/>
-                    <a:lstStyle/>
-                    <a:p>
-                      <a:pPr>
-                        <a:lnSpc>
-                          <a:spcPts val="1600"/>
-                        </a:lnSpc>
-                        <a:spcAft>
-                          <a:spcPts val="0"/>
-                        </a:spcAft>
-                        <a:defRPr sz="1200" b="0">
-                          <a:solidFill>
-                            <a:srgbClr val="21243A"/>
-                          </a:solidFill>
-                          <a:latin typeface="Arial"/>
-                        </a:defRPr>
-                      </a:pPr>
-                      <a:r>
-                        <a:t>Ingestion note 3</a:t>
-                      </a:r>
-                    </a:p>
-                  </a:txBody>
-                  <a:tcPr marL="82296" marR="82296" marT="64008" marB="64008">
-                    <a:solidFill>
-                      <a:srgbClr val="F1F7F7"/>
-                    </a:solidFill>
-                  </a:tcPr>
-                </a:tc>
-                <a:tc>
-                  <a:txBody>
-                    <a:bodyPr wrap="none"/>
-                    <a:lstStyle/>
-                    <a:p>
-                      <a:pPr>
-                        <a:lnSpc>
-                          <a:spcPts val="1600"/>
-                        </a:lnSpc>
-                        <a:spcAft>
-                          <a:spcPts val="0"/>
-                        </a:spcAft>
-                        <a:defRPr sz="1200" b="0">
-                          <a:solidFill>
-                            <a:srgbClr val="21243A"/>
-                          </a:solidFill>
-                          <a:latin typeface="Arial"/>
-                        </a:defRPr>
-                      </a:pPr>
-                      <a:r>
-                        <a:t>No selectable text layer - vision models read the page/figure images.</a:t>
-                      </a:r>
-                    </a:p>
-                  </a:txBody>
-                  <a:tcPr marL="82296" marR="82296" marT="64008" marB="64008">
-                    <a:solidFill>
-                      <a:srgbClr val="F1F7F7"/>
                     </a:solidFill>
                   </a:tcPr>
                 </a:tc>
@@ -15998,7 +15554,7 @@
               </a:defRPr>
             </a:pPr>
             <a:r>
-              <a:t>File and analysis record (continued)</a:t>
+              <a:t>File and analysis record</a:t>
             </a:r>
           </a:p>
         </p:txBody>
@@ -16083,6 +15639,1267 @@
             </a:pPr>
             <a:r>
               <a:t>21</a:t>
+            </a:r>
+          </a:p>
+        </p:txBody>
+      </p:sp>
+      <p:graphicFrame>
+        <p:nvGraphicFramePr>
+          <p:cNvPr id="6" name="Table 5"/>
+          <p:cNvGraphicFramePr>
+            <a:graphicFrameLocks noGrp="1"/>
+          </p:cNvGraphicFramePr>
+          <p:nvPr/>
+        </p:nvGraphicFramePr>
+        <p:xfrm>
+          <a:off x="365760" y="1353312"/>
+          <a:ext cx="8412479" cy="347472"/>
+        </p:xfrm>
+        <a:graphic>
+          <a:graphicData uri="http://schemas.openxmlformats.org/drawingml/2006/table">
+            <a:tbl>
+              <a:tblPr firstRow="1" bandRow="1">
+                <a:tableStyleId>{5C22544A-7EE6-4342-B048-85BDC9FD1C3A}</a:tableStyleId>
+              </a:tblPr>
+              <a:tblGrid>
+                <a:gridCol w="2271369"/>
+                <a:gridCol w="6141110"/>
+              </a:tblGrid>
+              <a:tr h="347472">
+                <a:tc>
+                  <a:txBody>
+                    <a:bodyPr wrap="none"/>
+                    <a:lstStyle/>
+                    <a:p>
+                      <a:pPr>
+                        <a:lnSpc>
+                          <a:spcPts val="1600"/>
+                        </a:lnSpc>
+                        <a:spcAft>
+                          <a:spcPts val="0"/>
+                        </a:spcAft>
+                        <a:defRPr sz="1200" b="1">
+                          <a:solidFill>
+                            <a:srgbClr val="FFFFFF"/>
+                          </a:solidFill>
+                          <a:latin typeface="Arial"/>
+                        </a:defRPr>
+                      </a:pPr>
+                      <a:r>
+                        <a:t>Field</a:t>
+                      </a:r>
+                    </a:p>
+                  </a:txBody>
+                  <a:tcPr marL="82296" marR="82296" marT="64008" marB="64008">
+                    <a:solidFill>
+                      <a:srgbClr val="16787C"/>
+                    </a:solidFill>
+                  </a:tcPr>
+                </a:tc>
+                <a:tc>
+                  <a:txBody>
+                    <a:bodyPr wrap="none"/>
+                    <a:lstStyle/>
+                    <a:p>
+                      <a:pPr>
+                        <a:lnSpc>
+                          <a:spcPts val="1600"/>
+                        </a:lnSpc>
+                        <a:spcAft>
+                          <a:spcPts val="0"/>
+                        </a:spcAft>
+                        <a:defRPr sz="1200" b="1">
+                          <a:solidFill>
+                            <a:srgbClr val="FFFFFF"/>
+                          </a:solidFill>
+                          <a:latin typeface="Arial"/>
+                        </a:defRPr>
+                      </a:pPr>
+                      <a:r>
+                        <a:t>Recorded detail</a:t>
+                      </a:r>
+                    </a:p>
+                  </a:txBody>
+                  <a:tcPr marL="82296" marR="82296" marT="64008" marB="64008">
+                    <a:solidFill>
+                      <a:srgbClr val="16787C"/>
+                    </a:solidFill>
+                  </a:tcPr>
+                </a:tc>
+              </a:tr>
+            </a:tbl>
+          </a:graphicData>
+        </a:graphic>
+      </p:graphicFrame>
+      <p:graphicFrame>
+        <p:nvGraphicFramePr>
+          <p:cNvPr id="7" name="Table 6"/>
+          <p:cNvGraphicFramePr>
+            <a:graphicFrameLocks noGrp="1"/>
+          </p:cNvGraphicFramePr>
+          <p:nvPr/>
+        </p:nvGraphicFramePr>
+        <p:xfrm>
+          <a:off x="365760" y="1700784"/>
+          <a:ext cx="8412479" cy="349504"/>
+        </p:xfrm>
+        <a:graphic>
+          <a:graphicData uri="http://schemas.openxmlformats.org/drawingml/2006/table">
+            <a:tbl>
+              <a:tblPr firstRow="1" bandRow="1">
+                <a:tableStyleId>{5C22544A-7EE6-4342-B048-85BDC9FD1C3A}</a:tableStyleId>
+              </a:tblPr>
+              <a:tblGrid>
+                <a:gridCol w="2271369"/>
+                <a:gridCol w="6141110"/>
+              </a:tblGrid>
+              <a:tr h="349504">
+                <a:tc>
+                  <a:txBody>
+                    <a:bodyPr wrap="none"/>
+                    <a:lstStyle/>
+                    <a:p>
+                      <a:pPr>
+                        <a:lnSpc>
+                          <a:spcPts val="1600"/>
+                        </a:lnSpc>
+                        <a:spcAft>
+                          <a:spcPts val="0"/>
+                        </a:spcAft>
+                        <a:defRPr sz="1200" b="0">
+                          <a:solidFill>
+                            <a:srgbClr val="21243A"/>
+                          </a:solidFill>
+                          <a:latin typeface="Arial"/>
+                        </a:defRPr>
+                      </a:pPr>
+                      <a:r>
+                        <a:t>File</a:t>
+                      </a:r>
+                    </a:p>
+                  </a:txBody>
+                  <a:tcPr marL="82296" marR="82296" marT="64008" marB="64008">
+                    <a:solidFill>
+                      <a:srgbClr val="F1F7F7"/>
+                    </a:solidFill>
+                  </a:tcPr>
+                </a:tc>
+                <a:tc>
+                  <a:txBody>
+                    <a:bodyPr wrap="none"/>
+                    <a:lstStyle/>
+                    <a:p>
+                      <a:pPr>
+                        <a:lnSpc>
+                          <a:spcPts val="1600"/>
+                        </a:lnSpc>
+                        <a:spcAft>
+                          <a:spcPts val="0"/>
+                        </a:spcAft>
+                        <a:defRPr sz="1200" b="0">
+                          <a:solidFill>
+                            <a:srgbClr val="21243A"/>
+                          </a:solidFill>
+                          <a:latin typeface="Arial"/>
+                        </a:defRPr>
+                      </a:pPr>
+                      <a:r>
+                        <a:t>infographic.pdf</a:t>
+                      </a:r>
+                    </a:p>
+                  </a:txBody>
+                  <a:tcPr marL="82296" marR="82296" marT="64008" marB="64008">
+                    <a:solidFill>
+                      <a:srgbClr val="F1F7F7"/>
+                    </a:solidFill>
+                  </a:tcPr>
+                </a:tc>
+              </a:tr>
+            </a:tbl>
+          </a:graphicData>
+        </a:graphic>
+      </p:graphicFrame>
+      <p:graphicFrame>
+        <p:nvGraphicFramePr>
+          <p:cNvPr id="8" name="Table 7"/>
+          <p:cNvGraphicFramePr>
+            <a:graphicFrameLocks noGrp="1"/>
+          </p:cNvGraphicFramePr>
+          <p:nvPr/>
+        </p:nvGraphicFramePr>
+        <p:xfrm>
+          <a:off x="365760" y="2050288"/>
+          <a:ext cx="8412479" cy="349504"/>
+        </p:xfrm>
+        <a:graphic>
+          <a:graphicData uri="http://schemas.openxmlformats.org/drawingml/2006/table">
+            <a:tbl>
+              <a:tblPr firstRow="1" bandRow="1">
+                <a:tableStyleId>{5C22544A-7EE6-4342-B048-85BDC9FD1C3A}</a:tableStyleId>
+              </a:tblPr>
+              <a:tblGrid>
+                <a:gridCol w="2271369"/>
+                <a:gridCol w="6141110"/>
+              </a:tblGrid>
+              <a:tr h="349504">
+                <a:tc>
+                  <a:txBody>
+                    <a:bodyPr wrap="none"/>
+                    <a:lstStyle/>
+                    <a:p>
+                      <a:pPr>
+                        <a:lnSpc>
+                          <a:spcPts val="1600"/>
+                        </a:lnSpc>
+                        <a:spcAft>
+                          <a:spcPts val="0"/>
+                        </a:spcAft>
+                        <a:defRPr sz="1200" b="0">
+                          <a:solidFill>
+                            <a:srgbClr val="21243A"/>
+                          </a:solidFill>
+                          <a:latin typeface="Arial"/>
+                        </a:defRPr>
+                      </a:pPr>
+                      <a:r>
+                        <a:t>Analysis ID</a:t>
+                      </a:r>
+                    </a:p>
+                  </a:txBody>
+                  <a:tcPr marL="82296" marR="82296" marT="64008" marB="64008">
+                    <a:solidFill>
+                      <a:srgbClr val="FFFFFF"/>
+                    </a:solidFill>
+                  </a:tcPr>
+                </a:tc>
+                <a:tc>
+                  <a:txBody>
+                    <a:bodyPr wrap="none"/>
+                    <a:lstStyle/>
+                    <a:p>
+                      <a:pPr>
+                        <a:lnSpc>
+                          <a:spcPts val="1600"/>
+                        </a:lnSpc>
+                        <a:spcAft>
+                          <a:spcPts val="0"/>
+                        </a:spcAft>
+                        <a:defRPr sz="1200" b="0">
+                          <a:solidFill>
+                            <a:srgbClr val="21243A"/>
+                          </a:solidFill>
+                          <a:latin typeface="Arial"/>
+                        </a:defRPr>
+                      </a:pPr>
+                      <a:r>
+                        <a:t>f46ae041-994d-44fa-997c-8e6f23dcff90</a:t>
+                      </a:r>
+                    </a:p>
+                  </a:txBody>
+                  <a:tcPr marL="82296" marR="82296" marT="64008" marB="64008">
+                    <a:solidFill>
+                      <a:srgbClr val="FFFFFF"/>
+                    </a:solidFill>
+                  </a:tcPr>
+                </a:tc>
+              </a:tr>
+            </a:tbl>
+          </a:graphicData>
+        </a:graphic>
+      </p:graphicFrame>
+      <p:graphicFrame>
+        <p:nvGraphicFramePr>
+          <p:cNvPr id="9" name="Table 8"/>
+          <p:cNvGraphicFramePr>
+            <a:graphicFrameLocks noGrp="1"/>
+          </p:cNvGraphicFramePr>
+          <p:nvPr/>
+        </p:nvGraphicFramePr>
+        <p:xfrm>
+          <a:off x="365760" y="2399792"/>
+          <a:ext cx="8412479" cy="349504"/>
+        </p:xfrm>
+        <a:graphic>
+          <a:graphicData uri="http://schemas.openxmlformats.org/drawingml/2006/table">
+            <a:tbl>
+              <a:tblPr firstRow="1" bandRow="1">
+                <a:tableStyleId>{5C22544A-7EE6-4342-B048-85BDC9FD1C3A}</a:tableStyleId>
+              </a:tblPr>
+              <a:tblGrid>
+                <a:gridCol w="2271369"/>
+                <a:gridCol w="6141110"/>
+              </a:tblGrid>
+              <a:tr h="349504">
+                <a:tc>
+                  <a:txBody>
+                    <a:bodyPr wrap="none"/>
+                    <a:lstStyle/>
+                    <a:p>
+                      <a:pPr>
+                        <a:lnSpc>
+                          <a:spcPts val="1600"/>
+                        </a:lnSpc>
+                        <a:spcAft>
+                          <a:spcPts val="0"/>
+                        </a:spcAft>
+                        <a:defRPr sz="1200" b="0">
+                          <a:solidFill>
+                            <a:srgbClr val="21243A"/>
+                          </a:solidFill>
+                          <a:latin typeface="Arial"/>
+                        </a:defRPr>
+                      </a:pPr>
+                      <a:r>
+                        <a:t>Generated</a:t>
+                      </a:r>
+                    </a:p>
+                  </a:txBody>
+                  <a:tcPr marL="82296" marR="82296" marT="64008" marB="64008">
+                    <a:solidFill>
+                      <a:srgbClr val="F1F7F7"/>
+                    </a:solidFill>
+                  </a:tcPr>
+                </a:tc>
+                <a:tc>
+                  <a:txBody>
+                    <a:bodyPr wrap="none"/>
+                    <a:lstStyle/>
+                    <a:p>
+                      <a:pPr>
+                        <a:lnSpc>
+                          <a:spcPts val="1600"/>
+                        </a:lnSpc>
+                        <a:spcAft>
+                          <a:spcPts val="0"/>
+                        </a:spcAft>
+                        <a:defRPr sz="1200" b="0">
+                          <a:solidFill>
+                            <a:srgbClr val="21243A"/>
+                          </a:solidFill>
+                          <a:latin typeface="Arial"/>
+                        </a:defRPr>
+                      </a:pPr>
+                      <a:r>
+                        <a:t>2026-09-26T22:31:05+00:00</a:t>
+                      </a:r>
+                    </a:p>
+                  </a:txBody>
+                  <a:tcPr marL="82296" marR="82296" marT="64008" marB="64008">
+                    <a:solidFill>
+                      <a:srgbClr val="F1F7F7"/>
+                    </a:solidFill>
+                  </a:tcPr>
+                </a:tc>
+              </a:tr>
+            </a:tbl>
+          </a:graphicData>
+        </a:graphic>
+      </p:graphicFrame>
+      <p:graphicFrame>
+        <p:nvGraphicFramePr>
+          <p:cNvPr id="10" name="Table 9"/>
+          <p:cNvGraphicFramePr>
+            <a:graphicFrameLocks noGrp="1"/>
+          </p:cNvGraphicFramePr>
+          <p:nvPr/>
+        </p:nvGraphicFramePr>
+        <p:xfrm>
+          <a:off x="365760" y="2749296"/>
+          <a:ext cx="8412479" cy="349504"/>
+        </p:xfrm>
+        <a:graphic>
+          <a:graphicData uri="http://schemas.openxmlformats.org/drawingml/2006/table">
+            <a:tbl>
+              <a:tblPr firstRow="1" bandRow="1">
+                <a:tableStyleId>{5C22544A-7EE6-4342-B048-85BDC9FD1C3A}</a:tableStyleId>
+              </a:tblPr>
+              <a:tblGrid>
+                <a:gridCol w="2271369"/>
+                <a:gridCol w="6141110"/>
+              </a:tblGrid>
+              <a:tr h="349504">
+                <a:tc>
+                  <a:txBody>
+                    <a:bodyPr wrap="none"/>
+                    <a:lstStyle/>
+                    <a:p>
+                      <a:pPr>
+                        <a:lnSpc>
+                          <a:spcPts val="1600"/>
+                        </a:lnSpc>
+                        <a:spcAft>
+                          <a:spcPts val="0"/>
+                        </a:spcAft>
+                        <a:defRPr sz="1200" b="0">
+                          <a:solidFill>
+                            <a:srgbClr val="21243A"/>
+                          </a:solidFill>
+                          <a:latin typeface="Arial"/>
+                        </a:defRPr>
+                      </a:pPr>
+                      <a:r>
+                        <a:t>Tool</a:t>
+                      </a:r>
+                    </a:p>
+                  </a:txBody>
+                  <a:tcPr marL="82296" marR="82296" marT="64008" marB="64008">
+                    <a:solidFill>
+                      <a:srgbClr val="FFFFFF"/>
+                    </a:solidFill>
+                  </a:tcPr>
+                </a:tc>
+                <a:tc>
+                  <a:txBody>
+                    <a:bodyPr wrap="none"/>
+                    <a:lstStyle/>
+                    <a:p>
+                      <a:pPr>
+                        <a:lnSpc>
+                          <a:spcPts val="1600"/>
+                        </a:lnSpc>
+                        <a:spcAft>
+                          <a:spcPts val="0"/>
+                        </a:spcAft>
+                        <a:defRPr sz="1200" b="0">
+                          <a:solidFill>
+                            <a:srgbClr val="21243A"/>
+                          </a:solidFill>
+                          <a:latin typeface="Arial"/>
+                        </a:defRPr>
+                      </a:pPr>
+                      <a:r>
+                        <a:t>SDA Vision 0.1.0</a:t>
+                      </a:r>
+                    </a:p>
+                  </a:txBody>
+                  <a:tcPr marL="82296" marR="82296" marT="64008" marB="64008">
+                    <a:solidFill>
+                      <a:srgbClr val="FFFFFF"/>
+                    </a:solidFill>
+                  </a:tcPr>
+                </a:tc>
+              </a:tr>
+            </a:tbl>
+          </a:graphicData>
+        </a:graphic>
+      </p:graphicFrame>
+      <p:graphicFrame>
+        <p:nvGraphicFramePr>
+          <p:cNvPr id="11" name="Table 10"/>
+          <p:cNvGraphicFramePr>
+            <a:graphicFrameLocks noGrp="1"/>
+          </p:cNvGraphicFramePr>
+          <p:nvPr/>
+        </p:nvGraphicFramePr>
+        <p:xfrm>
+          <a:off x="365760" y="3098800"/>
+          <a:ext cx="8412479" cy="349504"/>
+        </p:xfrm>
+        <a:graphic>
+          <a:graphicData uri="http://schemas.openxmlformats.org/drawingml/2006/table">
+            <a:tbl>
+              <a:tblPr firstRow="1" bandRow="1">
+                <a:tableStyleId>{5C22544A-7EE6-4342-B048-85BDC9FD1C3A}</a:tableStyleId>
+              </a:tblPr>
+              <a:tblGrid>
+                <a:gridCol w="2271369"/>
+                <a:gridCol w="6141110"/>
+              </a:tblGrid>
+              <a:tr h="349504">
+                <a:tc>
+                  <a:txBody>
+                    <a:bodyPr wrap="none"/>
+                    <a:lstStyle/>
+                    <a:p>
+                      <a:pPr>
+                        <a:lnSpc>
+                          <a:spcPts val="1600"/>
+                        </a:lnSpc>
+                        <a:spcAft>
+                          <a:spcPts val="0"/>
+                        </a:spcAft>
+                        <a:defRPr sz="1200" b="0">
+                          <a:solidFill>
+                            <a:srgbClr val="21243A"/>
+                          </a:solidFill>
+                          <a:latin typeface="Arial"/>
+                        </a:defRPr>
+                      </a:pPr>
+                      <a:r>
+                        <a:t>Models</a:t>
+                      </a:r>
+                    </a:p>
+                  </a:txBody>
+                  <a:tcPr marL="82296" marR="82296" marT="64008" marB="64008">
+                    <a:solidFill>
+                      <a:srgbClr val="F1F7F7"/>
+                    </a:solidFill>
+                  </a:tcPr>
+                </a:tc>
+                <a:tc>
+                  <a:txBody>
+                    <a:bodyPr wrap="none"/>
+                    <a:lstStyle/>
+                    <a:p>
+                      <a:pPr>
+                        <a:lnSpc>
+                          <a:spcPts val="1600"/>
+                        </a:lnSpc>
+                        <a:spcAft>
+                          <a:spcPts val="0"/>
+                        </a:spcAft>
+                        <a:defRPr sz="1200" b="0">
+                          <a:solidFill>
+                            <a:srgbClr val="21243A"/>
+                          </a:solidFill>
+                          <a:latin typeface="Arial"/>
+                        </a:defRPr>
+                      </a:pPr>
+                      <a:r>
+                        <a:t>claude-opus-5-5, gemini-3.8-flash, gpt-6-astra</a:t>
+                      </a:r>
+                    </a:p>
+                  </a:txBody>
+                  <a:tcPr marL="82296" marR="82296" marT="64008" marB="64008">
+                    <a:solidFill>
+                      <a:srgbClr val="F1F7F7"/>
+                    </a:solidFill>
+                  </a:tcPr>
+                </a:tc>
+              </a:tr>
+            </a:tbl>
+          </a:graphicData>
+        </a:graphic>
+      </p:graphicFrame>
+      <p:graphicFrame>
+        <p:nvGraphicFramePr>
+          <p:cNvPr id="12" name="Table 11"/>
+          <p:cNvGraphicFramePr>
+            <a:graphicFrameLocks noGrp="1"/>
+          </p:cNvGraphicFramePr>
+          <p:nvPr/>
+        </p:nvGraphicFramePr>
+        <p:xfrm>
+          <a:off x="365760" y="3448304"/>
+          <a:ext cx="8412479" cy="349504"/>
+        </p:xfrm>
+        <a:graphic>
+          <a:graphicData uri="http://schemas.openxmlformats.org/drawingml/2006/table">
+            <a:tbl>
+              <a:tblPr firstRow="1" bandRow="1">
+                <a:tableStyleId>{5C22544A-7EE6-4342-B048-85BDC9FD1C3A}</a:tableStyleId>
+              </a:tblPr>
+              <a:tblGrid>
+                <a:gridCol w="2271369"/>
+                <a:gridCol w="6141110"/>
+              </a:tblGrid>
+              <a:tr h="349504">
+                <a:tc>
+                  <a:txBody>
+                    <a:bodyPr wrap="none"/>
+                    <a:lstStyle/>
+                    <a:p>
+                      <a:pPr>
+                        <a:lnSpc>
+                          <a:spcPts val="1600"/>
+                        </a:lnSpc>
+                        <a:spcAft>
+                          <a:spcPts val="0"/>
+                        </a:spcAft>
+                        <a:defRPr sz="1200" b="0">
+                          <a:solidFill>
+                            <a:srgbClr val="21243A"/>
+                          </a:solidFill>
+                          <a:latin typeface="Arial"/>
+                        </a:defRPr>
+                      </a:pPr>
+                      <a:r>
+                        <a:t>Method version</a:t>
+                      </a:r>
+                    </a:p>
+                  </a:txBody>
+                  <a:tcPr marL="82296" marR="82296" marT="64008" marB="64008">
+                    <a:solidFill>
+                      <a:srgbClr val="FFFFFF"/>
+                    </a:solidFill>
+                  </a:tcPr>
+                </a:tc>
+                <a:tc>
+                  <a:txBody>
+                    <a:bodyPr wrap="none"/>
+                    <a:lstStyle/>
+                    <a:p>
+                      <a:pPr>
+                        <a:lnSpc>
+                          <a:spcPts val="1600"/>
+                        </a:lnSpc>
+                        <a:spcAft>
+                          <a:spcPts val="0"/>
+                        </a:spcAft>
+                        <a:defRPr sz="1200" b="0">
+                          <a:solidFill>
+                            <a:srgbClr val="21243A"/>
+                          </a:solidFill>
+                          <a:latin typeface="Arial"/>
+                        </a:defRPr>
+                      </a:pPr>
+                      <a:r>
+                        <a:t>pdf-preparation-2026-09-26.1</a:t>
+                      </a:r>
+                    </a:p>
+                  </a:txBody>
+                  <a:tcPr marL="82296" marR="82296" marT="64008" marB="64008">
+                    <a:solidFill>
+                      <a:srgbClr val="FFFFFF"/>
+                    </a:solidFill>
+                  </a:tcPr>
+                </a:tc>
+              </a:tr>
+            </a:tbl>
+          </a:graphicData>
+        </a:graphic>
+      </p:graphicFrame>
+      <p:graphicFrame>
+        <p:nvGraphicFramePr>
+          <p:cNvPr id="13" name="Table 12"/>
+          <p:cNvGraphicFramePr>
+            <a:graphicFrameLocks noGrp="1"/>
+          </p:cNvGraphicFramePr>
+          <p:nvPr/>
+        </p:nvGraphicFramePr>
+        <p:xfrm>
+          <a:off x="365760" y="3797808"/>
+          <a:ext cx="8412479" cy="349504"/>
+        </p:xfrm>
+        <a:graphic>
+          <a:graphicData uri="http://schemas.openxmlformats.org/drawingml/2006/table">
+            <a:tbl>
+              <a:tblPr firstRow="1" bandRow="1">
+                <a:tableStyleId>{5C22544A-7EE6-4342-B048-85BDC9FD1C3A}</a:tableStyleId>
+              </a:tblPr>
+              <a:tblGrid>
+                <a:gridCol w="2271369"/>
+                <a:gridCol w="6141110"/>
+              </a:tblGrid>
+              <a:tr h="349504">
+                <a:tc>
+                  <a:txBody>
+                    <a:bodyPr wrap="none"/>
+                    <a:lstStyle/>
+                    <a:p>
+                      <a:pPr>
+                        <a:lnSpc>
+                          <a:spcPts val="1600"/>
+                        </a:lnSpc>
+                        <a:spcAft>
+                          <a:spcPts val="0"/>
+                        </a:spcAft>
+                        <a:defRPr sz="1200" b="0">
+                          <a:solidFill>
+                            <a:srgbClr val="21243A"/>
+                          </a:solidFill>
+                          <a:latin typeface="Arial"/>
+                        </a:defRPr>
+                      </a:pPr>
+                      <a:r>
+                        <a:t>Analysis lens</a:t>
+                      </a:r>
+                    </a:p>
+                  </a:txBody>
+                  <a:tcPr marL="82296" marR="82296" marT="64008" marB="64008">
+                    <a:solidFill>
+                      <a:srgbClr val="F1F7F7"/>
+                    </a:solidFill>
+                  </a:tcPr>
+                </a:tc>
+                <a:tc>
+                  <a:txBody>
+                    <a:bodyPr wrap="none"/>
+                    <a:lstStyle/>
+                    <a:p>
+                      <a:pPr>
+                        <a:lnSpc>
+                          <a:spcPts val="1600"/>
+                        </a:lnSpc>
+                        <a:spcAft>
+                          <a:spcPts val="0"/>
+                        </a:spcAft>
+                        <a:defRPr sz="1200" b="0">
+                          <a:solidFill>
+                            <a:srgbClr val="21243A"/>
+                          </a:solidFill>
+                          <a:latin typeface="Arial"/>
+                        </a:defRPr>
+                      </a:pPr>
+                      <a:r>
+                        <a:t>general</a:t>
+                      </a:r>
+                    </a:p>
+                  </a:txBody>
+                  <a:tcPr marL="82296" marR="82296" marT="64008" marB="64008">
+                    <a:solidFill>
+                      <a:srgbClr val="F1F7F7"/>
+                    </a:solidFill>
+                  </a:tcPr>
+                </a:tc>
+              </a:tr>
+            </a:tbl>
+          </a:graphicData>
+        </a:graphic>
+      </p:graphicFrame>
+      <p:graphicFrame>
+        <p:nvGraphicFramePr>
+          <p:cNvPr id="14" name="Table 13"/>
+          <p:cNvGraphicFramePr>
+            <a:graphicFrameLocks noGrp="1"/>
+          </p:cNvGraphicFramePr>
+          <p:nvPr/>
+        </p:nvGraphicFramePr>
+        <p:xfrm>
+          <a:off x="365760" y="4147312"/>
+          <a:ext cx="8412479" cy="349504"/>
+        </p:xfrm>
+        <a:graphic>
+          <a:graphicData uri="http://schemas.openxmlformats.org/drawingml/2006/table">
+            <a:tbl>
+              <a:tblPr firstRow="1" bandRow="1">
+                <a:tableStyleId>{5C22544A-7EE6-4342-B048-85BDC9FD1C3A}</a:tableStyleId>
+              </a:tblPr>
+              <a:tblGrid>
+                <a:gridCol w="2271369"/>
+                <a:gridCol w="6141110"/>
+              </a:tblGrid>
+              <a:tr h="349504">
+                <a:tc>
+                  <a:txBody>
+                    <a:bodyPr wrap="none"/>
+                    <a:lstStyle/>
+                    <a:p>
+                      <a:pPr>
+                        <a:lnSpc>
+                          <a:spcPts val="1600"/>
+                        </a:lnSpc>
+                        <a:spcAft>
+                          <a:spcPts val="0"/>
+                        </a:spcAft>
+                        <a:defRPr sz="1200" b="0">
+                          <a:solidFill>
+                            <a:srgbClr val="21243A"/>
+                          </a:solidFill>
+                          <a:latin typeface="Arial"/>
+                        </a:defRPr>
+                      </a:pPr>
+                      <a:r>
+                        <a:t>Original SHA-256</a:t>
+                      </a:r>
+                    </a:p>
+                  </a:txBody>
+                  <a:tcPr marL="82296" marR="82296" marT="64008" marB="64008">
+                    <a:solidFill>
+                      <a:srgbClr val="FFFFFF"/>
+                    </a:solidFill>
+                  </a:tcPr>
+                </a:tc>
+                <a:tc>
+                  <a:txBody>
+                    <a:bodyPr wrap="none"/>
+                    <a:lstStyle/>
+                    <a:p>
+                      <a:pPr>
+                        <a:lnSpc>
+                          <a:spcPts val="1600"/>
+                        </a:lnSpc>
+                        <a:spcAft>
+                          <a:spcPts val="0"/>
+                        </a:spcAft>
+                        <a:defRPr sz="1200" b="0">
+                          <a:solidFill>
+                            <a:srgbClr val="21243A"/>
+                          </a:solidFill>
+                          <a:latin typeface="Arial"/>
+                        </a:defRPr>
+                      </a:pPr>
+                      <a:r>
+                        <a:t>02915f051b6eb2c9ef0c21f5bb20c4229ca21324bf20172f3867c32c299a5924</a:t>
+                      </a:r>
+                    </a:p>
+                  </a:txBody>
+                  <a:tcPr marL="82296" marR="82296" marT="64008" marB="64008">
+                    <a:solidFill>
+                      <a:srgbClr val="FFFFFF"/>
+                    </a:solidFill>
+                  </a:tcPr>
+                </a:tc>
+              </a:tr>
+            </a:tbl>
+          </a:graphicData>
+        </a:graphic>
+      </p:graphicFrame>
+      <p:graphicFrame>
+        <p:nvGraphicFramePr>
+          <p:cNvPr id="15" name="Table 14"/>
+          <p:cNvGraphicFramePr>
+            <a:graphicFrameLocks noGrp="1"/>
+          </p:cNvGraphicFramePr>
+          <p:nvPr/>
+        </p:nvGraphicFramePr>
+        <p:xfrm>
+          <a:off x="365760" y="4496816"/>
+          <a:ext cx="8412479" cy="552704"/>
+        </p:xfrm>
+        <a:graphic>
+          <a:graphicData uri="http://schemas.openxmlformats.org/drawingml/2006/table">
+            <a:tbl>
+              <a:tblPr firstRow="1" bandRow="1">
+                <a:tableStyleId>{5C22544A-7EE6-4342-B048-85BDC9FD1C3A}</a:tableStyleId>
+              </a:tblPr>
+              <a:tblGrid>
+                <a:gridCol w="2271369"/>
+                <a:gridCol w="6141110"/>
+              </a:tblGrid>
+              <a:tr h="552704">
+                <a:tc>
+                  <a:txBody>
+                    <a:bodyPr wrap="none"/>
+                    <a:lstStyle/>
+                    <a:p>
+                      <a:pPr>
+                        <a:lnSpc>
+                          <a:spcPts val="1600"/>
+                        </a:lnSpc>
+                        <a:spcAft>
+                          <a:spcPts val="0"/>
+                        </a:spcAft>
+                        <a:defRPr sz="1200" b="0">
+                          <a:solidFill>
+                            <a:srgbClr val="21243A"/>
+                          </a:solidFill>
+                          <a:latin typeface="Arial"/>
+                        </a:defRPr>
+                      </a:pPr>
+                      <a:r>
+                        <a:t>Ingestion note 1</a:t>
+                      </a:r>
+                    </a:p>
+                  </a:txBody>
+                  <a:tcPr marL="82296" marR="82296" marT="64008" marB="64008">
+                    <a:solidFill>
+                      <a:srgbClr val="F1F7F7"/>
+                    </a:solidFill>
+                  </a:tcPr>
+                </a:tc>
+                <a:tc>
+                  <a:txBody>
+                    <a:bodyPr wrap="none"/>
+                    <a:lstStyle/>
+                    <a:p>
+                      <a:pPr>
+                        <a:lnSpc>
+                          <a:spcPts val="1600"/>
+                        </a:lnSpc>
+                        <a:spcAft>
+                          <a:spcPts val="0"/>
+                        </a:spcAft>
+                        <a:defRPr sz="1200" b="0">
+                          <a:solidFill>
+                            <a:srgbClr val="21243A"/>
+                          </a:solidFill>
+                          <a:latin typeface="Arial"/>
+                        </a:defRPr>
+                      </a:pPr>
+                      <a:r>
+                        <a:t>PDF preparation: pdf-input-2026-09-26.1 (pypdf text/figures; PDFium page</a:t>
+                      </a:r>
+                    </a:p>
+                    <a:p>
+                      <a:pPr>
+                        <a:lnSpc>
+                          <a:spcPts val="1600"/>
+                        </a:lnSpc>
+                        <a:spcAft>
+                          <a:spcPts val="0"/>
+                        </a:spcAft>
+                        <a:defRPr sz="1200" b="0">
+                          <a:solidFill>
+                            <a:srgbClr val="21243A"/>
+                          </a:solidFill>
+                          <a:latin typeface="Arial"/>
+                        </a:defRPr>
+                      </a:pPr>
+                      <a:r>
+                        <a:t>rendering).</a:t>
+                      </a:r>
+                    </a:p>
+                  </a:txBody>
+                  <a:tcPr marL="82296" marR="82296" marT="64008" marB="64008">
+                    <a:solidFill>
+                      <a:srgbClr val="F1F7F7"/>
+                    </a:solidFill>
+                  </a:tcPr>
+                </a:tc>
+              </a:tr>
+            </a:tbl>
+          </a:graphicData>
+        </a:graphic>
+      </p:graphicFrame>
+      <p:graphicFrame>
+        <p:nvGraphicFramePr>
+          <p:cNvPr id="16" name="Table 15"/>
+          <p:cNvGraphicFramePr>
+            <a:graphicFrameLocks noGrp="1"/>
+          </p:cNvGraphicFramePr>
+          <p:nvPr/>
+        </p:nvGraphicFramePr>
+        <p:xfrm>
+          <a:off x="365760" y="5049520"/>
+          <a:ext cx="8412479" cy="349504"/>
+        </p:xfrm>
+        <a:graphic>
+          <a:graphicData uri="http://schemas.openxmlformats.org/drawingml/2006/table">
+            <a:tbl>
+              <a:tblPr firstRow="1" bandRow="1">
+                <a:tableStyleId>{5C22544A-7EE6-4342-B048-85BDC9FD1C3A}</a:tableStyleId>
+              </a:tblPr>
+              <a:tblGrid>
+                <a:gridCol w="2271369"/>
+                <a:gridCol w="6141110"/>
+              </a:tblGrid>
+              <a:tr h="349504">
+                <a:tc>
+                  <a:txBody>
+                    <a:bodyPr wrap="none"/>
+                    <a:lstStyle/>
+                    <a:p>
+                      <a:pPr>
+                        <a:lnSpc>
+                          <a:spcPts val="1600"/>
+                        </a:lnSpc>
+                        <a:spcAft>
+                          <a:spcPts val="0"/>
+                        </a:spcAft>
+                        <a:defRPr sz="1200" b="0">
+                          <a:solidFill>
+                            <a:srgbClr val="21243A"/>
+                          </a:solidFill>
+                          <a:latin typeface="Arial"/>
+                        </a:defRPr>
+                      </a:pPr>
+                      <a:r>
+                        <a:t>Ingestion note 2</a:t>
+                      </a:r>
+                    </a:p>
+                  </a:txBody>
+                  <a:tcPr marL="82296" marR="82296" marT="64008" marB="64008">
+                    <a:solidFill>
+                      <a:srgbClr val="FFFFFF"/>
+                    </a:solidFill>
+                  </a:tcPr>
+                </a:tc>
+                <a:tc>
+                  <a:txBody>
+                    <a:bodyPr wrap="none"/>
+                    <a:lstStyle/>
+                    <a:p>
+                      <a:pPr>
+                        <a:lnSpc>
+                          <a:spcPts val="1600"/>
+                        </a:lnSpc>
+                        <a:spcAft>
+                          <a:spcPts val="0"/>
+                        </a:spcAft>
+                        <a:defRPr sz="1200" b="0">
+                          <a:solidFill>
+                            <a:srgbClr val="21243A"/>
+                          </a:solidFill>
+                          <a:latin typeface="Arial"/>
+                        </a:defRPr>
+                      </a:pPr>
+                      <a:r>
+                        <a:t>Extracted 4 embedded figure(s) of 15 found (figure mode).</a:t>
+                      </a:r>
+                    </a:p>
+                  </a:txBody>
+                  <a:tcPr marL="82296" marR="82296" marT="64008" marB="64008">
+                    <a:solidFill>
+                      <a:srgbClr val="FFFFFF"/>
+                    </a:solidFill>
+                  </a:tcPr>
+                </a:tc>
+              </a:tr>
+            </a:tbl>
+          </a:graphicData>
+        </a:graphic>
+      </p:graphicFrame>
+      <p:graphicFrame>
+        <p:nvGraphicFramePr>
+          <p:cNvPr id="17" name="Table 16"/>
+          <p:cNvGraphicFramePr>
+            <a:graphicFrameLocks noGrp="1"/>
+          </p:cNvGraphicFramePr>
+          <p:nvPr/>
+        </p:nvGraphicFramePr>
+        <p:xfrm>
+          <a:off x="365760" y="5399024"/>
+          <a:ext cx="8412479" cy="349504"/>
+        </p:xfrm>
+        <a:graphic>
+          <a:graphicData uri="http://schemas.openxmlformats.org/drawingml/2006/table">
+            <a:tbl>
+              <a:tblPr firstRow="1" bandRow="1">
+                <a:tableStyleId>{5C22544A-7EE6-4342-B048-85BDC9FD1C3A}</a:tableStyleId>
+              </a:tblPr>
+              <a:tblGrid>
+                <a:gridCol w="2271369"/>
+                <a:gridCol w="6141110"/>
+              </a:tblGrid>
+              <a:tr h="349504">
+                <a:tc>
+                  <a:txBody>
+                    <a:bodyPr wrap="none"/>
+                    <a:lstStyle/>
+                    <a:p>
+                      <a:pPr>
+                        <a:lnSpc>
+                          <a:spcPts val="1600"/>
+                        </a:lnSpc>
+                        <a:spcAft>
+                          <a:spcPts val="0"/>
+                        </a:spcAft>
+                        <a:defRPr sz="1200" b="0">
+                          <a:solidFill>
+                            <a:srgbClr val="21243A"/>
+                          </a:solidFill>
+                          <a:latin typeface="Arial"/>
+                        </a:defRPr>
+                      </a:pPr>
+                      <a:r>
+                        <a:t>Ingestion note 3</a:t>
+                      </a:r>
+                    </a:p>
+                  </a:txBody>
+                  <a:tcPr marL="82296" marR="82296" marT="64008" marB="64008">
+                    <a:solidFill>
+                      <a:srgbClr val="F1F7F7"/>
+                    </a:solidFill>
+                  </a:tcPr>
+                </a:tc>
+                <a:tc>
+                  <a:txBody>
+                    <a:bodyPr wrap="none"/>
+                    <a:lstStyle/>
+                    <a:p>
+                      <a:pPr>
+                        <a:lnSpc>
+                          <a:spcPts val="1600"/>
+                        </a:lnSpc>
+                        <a:spcAft>
+                          <a:spcPts val="0"/>
+                        </a:spcAft>
+                        <a:defRPr sz="1200" b="0">
+                          <a:solidFill>
+                            <a:srgbClr val="21243A"/>
+                          </a:solidFill>
+                          <a:latin typeface="Arial"/>
+                        </a:defRPr>
+                      </a:pPr>
+                      <a:r>
+                        <a:t>No selectable text layer - vision models read the page/figure images.</a:t>
+                      </a:r>
+                    </a:p>
+                  </a:txBody>
+                  <a:tcPr marL="82296" marR="82296" marT="64008" marB="64008">
+                    <a:solidFill>
+                      <a:srgbClr val="F1F7F7"/>
+                    </a:solidFill>
+                  </a:tcPr>
+                </a:tc>
+              </a:tr>
+            </a:tbl>
+          </a:graphicData>
+        </a:graphic>
+      </p:graphicFrame>
+    </p:spTree>
+  </p:cSld>
+  <p:clrMapOvr>
+    <a:masterClrMapping/>
+  </p:clrMapOvr>
+</p:sld>
+</file>
+
+<file path=ppt/slides/slide22.xml><?xml version="1.0" encoding="utf-8"?>
+<p:sld xmlns:a="http://schemas.openxmlformats.org/drawingml/2006/main" xmlns:p="http://schemas.openxmlformats.org/presentationml/2006/main" xmlns:r="http://schemas.openxmlformats.org/officeDocument/2006/relationships">
+  <p:cSld>
+    <p:spTree>
+      <p:nvGrpSpPr>
+        <p:cNvPr id="1" name=""/>
+        <p:cNvGrpSpPr/>
+        <p:nvPr/>
+      </p:nvGrpSpPr>
+      <p:grpSpPr/>
+      <p:sp>
+        <p:nvSpPr>
+          <p:cNvPr id="2" name="TextBox 1"/>
+          <p:cNvSpPr txBox="1"/>
+          <p:nvPr/>
+        </p:nvSpPr>
+        <p:spPr>
+          <a:xfrm>
+            <a:off x="365760" y="219456"/>
+            <a:ext cx="8412480" cy="228600"/>
+          </a:xfrm>
+          <a:prstGeom prst="rect">
+            <a:avLst/>
+          </a:prstGeom>
+          <a:noFill/>
+        </p:spPr>
+        <p:txBody>
+          <a:bodyPr wrap="square" lIns="0" rIns="0" tIns="0" bIns="0">
+            <a:spAutoFit/>
+          </a:bodyPr>
+          <a:lstStyle/>
+          <a:p>
+            <a:pPr>
+              <a:lnSpc>
+                <a:spcPct val="115000"/>
+              </a:lnSpc>
+              <a:spcAft>
+                <a:spcPts val="0"/>
+              </a:spcAft>
+              <a:defRPr sz="1100" b="1">
+                <a:solidFill>
+                  <a:srgbClr val="C5006A"/>
+                </a:solidFill>
+                <a:latin typeface="Arial"/>
+              </a:defRPr>
+            </a:pPr>
+            <a:r>
+              <a:t>SDA VISION / RESEARCH REPORT</a:t>
+            </a:r>
+          </a:p>
+        </p:txBody>
+      </p:sp>
+      <p:sp>
+        <p:nvSpPr>
+          <p:cNvPr id="3" name="TextBox 2"/>
+          <p:cNvSpPr txBox="1"/>
+          <p:nvPr/>
+        </p:nvSpPr>
+        <p:spPr>
+          <a:xfrm>
+            <a:off x="365760" y="658368"/>
+            <a:ext cx="8412480" cy="612648"/>
+          </a:xfrm>
+          <a:prstGeom prst="rect">
+            <a:avLst/>
+          </a:prstGeom>
+          <a:noFill/>
+        </p:spPr>
+        <p:txBody>
+          <a:bodyPr wrap="square" lIns="0" rIns="0" tIns="0" bIns="0">
+            <a:spAutoFit/>
+          </a:bodyPr>
+          <a:lstStyle/>
+          <a:p>
+            <a:pPr>
+              <a:lnSpc>
+                <a:spcPct val="115000"/>
+              </a:lnSpc>
+              <a:spcAft>
+                <a:spcPts val="0"/>
+              </a:spcAft>
+              <a:defRPr sz="2200" b="1">
+                <a:solidFill>
+                  <a:srgbClr val="21243A"/>
+                </a:solidFill>
+                <a:latin typeface="Arial"/>
+              </a:defRPr>
+            </a:pPr>
+            <a:r>
+              <a:t>File and analysis record (continued)</a:t>
+            </a:r>
+          </a:p>
+        </p:txBody>
+      </p:sp>
+      <p:sp>
+        <p:nvSpPr>
+          <p:cNvPr id="4" name="TextBox 3"/>
+          <p:cNvSpPr txBox="1"/>
+          <p:nvPr/>
+        </p:nvSpPr>
+        <p:spPr>
+          <a:xfrm>
+            <a:off x="365760" y="6291072"/>
+            <a:ext cx="8001000" cy="365760"/>
+          </a:xfrm>
+          <a:prstGeom prst="rect">
+            <a:avLst/>
+          </a:prstGeom>
+          <a:noFill/>
+        </p:spPr>
+        <p:txBody>
+          <a:bodyPr wrap="square" lIns="0" rIns="0" tIns="0" bIns="0">
+            <a:spAutoFit/>
+          </a:bodyPr>
+          <a:lstStyle/>
+          <a:p>
+            <a:pPr>
+              <a:lnSpc>
+                <a:spcPct val="115000"/>
+              </a:lnSpc>
+              <a:spcAft>
+                <a:spcPts val="0"/>
+              </a:spcAft>
+              <a:defRPr sz="800" b="0">
+                <a:solidFill>
+                  <a:srgbClr val="545B6D"/>
+                </a:solidFill>
+                <a:latin typeface="Arial"/>
+              </a:defRPr>
+            </a:pPr>
+            <a:r>
+              <a:t>Research assessment. Ratings are not calibrated probabilities.</a:t>
+            </a:r>
+          </a:p>
+        </p:txBody>
+      </p:sp>
+      <p:sp>
+        <p:nvSpPr>
+          <p:cNvPr id="5" name="TextBox 4"/>
+          <p:cNvSpPr txBox="1"/>
+          <p:nvPr/>
+        </p:nvSpPr>
+        <p:spPr>
+          <a:xfrm>
+            <a:off x="8394192" y="6318504"/>
+            <a:ext cx="365760" cy="228600"/>
+          </a:xfrm>
+          <a:prstGeom prst="rect">
+            <a:avLst/>
+          </a:prstGeom>
+          <a:noFill/>
+        </p:spPr>
+        <p:txBody>
+          <a:bodyPr wrap="square" lIns="0" rIns="0" tIns="0" bIns="0">
+            <a:spAutoFit/>
+          </a:bodyPr>
+          <a:lstStyle/>
+          <a:p>
+            <a:pPr>
+              <a:lnSpc>
+                <a:spcPct val="115000"/>
+              </a:lnSpc>
+              <a:spcAft>
+                <a:spcPts val="0"/>
+              </a:spcAft>
+              <a:defRPr sz="900" b="0">
+                <a:solidFill>
+                  <a:srgbClr val="545B6D"/>
+                </a:solidFill>
+                <a:latin typeface="Arial"/>
+              </a:defRPr>
+            </a:pPr>
+            <a:r>
+              <a:t>22</a:t>
             </a:r>
           </a:p>
         </p:txBody>

--- a/site/showcase/exports/infographic.pptx
+++ b/site/showcase/exports/infographic.pptx
@@ -1873,7 +1873,7 @@
           </a:p>
           <a:p>
             <a:r>
-              <a:t>Software (Harvard) | Martin, S. (2026) SDA Vision: Synthetic-media Discourse Analysis (version 0.1.0) [Computer software]. Manchester Metropolitan University. Available at: https://sdavision.io/</a:t>
+              <a:t>Software citation | Martin, S. (2026) SDA Vision: Synthetic-media Discourse Analysis (version 0.1.0) [Computer software]. Manchester Metropolitan University. Available at: https://sdavision.io/</a:t>
             </a:r>
           </a:p>
           <a:p>
@@ -15053,7 +15053,7 @@
                         </a:defRPr>
                       </a:pPr>
                       <a:r>
-                        <a:t>Software (Harvard)</a:t>
+                        <a:t>Software citation</a:t>
                       </a:r>
                     </a:p>
                   </a:txBody>

--- a/site/showcase/exports/infographic.pptx
+++ b/site/showcase/exports/infographic.pptx
@@ -26,7 +26,6 @@
     <p:sldId id="274" r:id="rId26"/>
     <p:sldId id="275" r:id="rId27"/>
     <p:sldId id="276" r:id="rId28"/>
-    <p:sldId id="277" r:id="rId29"/>
   </p:sldIdLst>
   <p:sldSz cx="9144000" cy="6858000" type="screen4x3"/>
   <p:notesSz cx="6858000" cy="9144000"/>
@@ -1868,27 +1867,72 @@
           </a:p>
           <a:p>
             <a:r>
-              <a:t>Cite this analysis</a:t>
-            </a:r>
-          </a:p>
-          <a:p>
-            <a:r>
-              <a:t>Software citation | Martin, S. (2026) SDA Vision: Synthetic-media Discourse Analysis (version 0.1.0) [Computer software]. Manchester Metropolitan University. Available at: https://sdavision.io/</a:t>
-            </a:r>
-          </a:p>
-          <a:p>
-            <a:r>
-              <a:t>Software creator | Dr Sam Martin, Smart Data Research UK (UKRI) Fellow, Manchester Metropolitan University (MMU). ORCID: https://orcid.org/0000-0002-4466-8374.</a:t>
-            </a:r>
-          </a:p>
-          <a:p>
-            <a:r>
-              <a:t>Funding acknowledgement | This work was supported by Smart Data Research UK, a UKRI investment; Grant number UKRI4010.</a:t>
-            </a:r>
-          </a:p>
-          <a:p>
-            <a:r>
-              <a:t>Analysis record | File: infographic.pdf; media type: pdf; recorded at: 2026-09-26T22:31:05+00:00; models: claude-opus-5-5, gemini-3.8-flash, gpt-6-astra.</a:t>
+              <a:t>File and analysis record</a:t>
+            </a:r>
+          </a:p>
+          <a:p>
+            <a:r>
+              <a:t>File | infographic.pdf</a:t>
+            </a:r>
+          </a:p>
+          <a:p>
+            <a:r>
+              <a:t>Analysis ID | f46ae041-994d-44fa-997c-8e6f23dcff90</a:t>
+            </a:r>
+          </a:p>
+          <a:p>
+            <a:r>
+              <a:t>Generated | 2026-09-26T22:31:05+00:00</a:t>
+            </a:r>
+          </a:p>
+          <a:p>
+            <a:r>
+              <a:t>Tool | SDA Vision 0.1.0</a:t>
+            </a:r>
+          </a:p>
+          <a:p>
+            <a:r>
+              <a:t>Models | claude-opus-5-5, gemini-3.8-flash, gpt-6-astra</a:t>
+            </a:r>
+          </a:p>
+          <a:p>
+            <a:r>
+              <a:t>Method version | pdf-preparation-2026-09-26.1</a:t>
+            </a:r>
+          </a:p>
+          <a:p>
+            <a:r>
+              <a:t>Analysis lens | general</a:t>
+            </a:r>
+          </a:p>
+          <a:p>
+            <a:r>
+              <a:t>Original SHA-256 | 02915f051b6eb2c9ef0c21f5bb20c4229ca21324bf20172f3867c32c299a5924</a:t>
+            </a:r>
+          </a:p>
+          <a:p>
+            <a:r>
+              <a:t>Ingestion note 1 | PDF preparation: pdf-input-2026-09-26.1 (pypdf text/figures; PDFium page rendering).</a:t>
+            </a:r>
+          </a:p>
+          <a:p>
+            <a:r>
+              <a:t>Ingestion note 2 | Extracted 4 embedded figure(s) of 15 found (figure mode).</a:t>
+            </a:r>
+          </a:p>
+          <a:p>
+            <a:r>
+              <a:t>Ingestion note 3 | No selectable text layer - vision models read the page/figure images.</a:t>
+            </a:r>
+          </a:p>
+          <a:p>
+            <a:r>
+              <a:t>Ingestion note 4 | Fresh provider replies acquired for eleven-examples-refresh-20260926-r1; report assembled locally from the saved responses without further API calls.</a:t>
+            </a:r>
+          </a:p>
+          <a:p>
+            <a:r>
+              <a:t>Ingestion note 5 | Provider latency values are restored from the acquisition receipts (maximum sampled-frame latency per provider); raw replies and assessment results are unchanged by this bookkeeping step.</a:t>
             </a:r>
           </a:p>
         </p:txBody>
@@ -1914,146 +1958,6 @@
 </file>
 
 <file path=ppt/notesSlides/notesSlide21.xml><?xml version="1.0" encoding="utf-8"?>
-<p:notes xmlns:a="http://schemas.openxmlformats.org/drawingml/2006/main" xmlns:p="http://schemas.openxmlformats.org/presentationml/2006/main" xmlns:r="http://schemas.openxmlformats.org/officeDocument/2006/relationships">
-  <p:cSld>
-    <p:spTree>
-      <p:nvGrpSpPr>
-        <p:cNvPr id="1" name=""/>
-        <p:cNvGrpSpPr/>
-        <p:nvPr/>
-      </p:nvGrpSpPr>
-      <p:grpSpPr>
-        <a:xfrm>
-          <a:off x="0" y="0"/>
-          <a:ext cx="0" cy="0"/>
-          <a:chOff x="0" y="0"/>
-          <a:chExt cx="0" cy="0"/>
-        </a:xfrm>
-      </p:grpSpPr>
-      <p:sp>
-        <p:nvSpPr>
-          <p:cNvPr id="2" name="Slide Image Placeholder 1"/>
-          <p:cNvSpPr>
-            <a:spLocks noGrp="1"/>
-          </p:cNvSpPr>
-          <p:nvPr>
-            <p:ph type="sldImg" idx="2"/>
-          </p:nvPr>
-        </p:nvSpPr>
-        <p:spPr/>
-      </p:sp>
-      <p:sp>
-        <p:nvSpPr>
-          <p:cNvPr id="3" name="Notes Placeholder 2"/>
-          <p:cNvSpPr>
-            <a:spLocks noGrp="1"/>
-          </p:cNvSpPr>
-          <p:nvPr>
-            <p:ph type="body" idx="3" sz="quarter"/>
-          </p:nvPr>
-        </p:nvSpPr>
-        <p:spPr/>
-        <p:txBody>
-          <a:bodyPr/>
-          <a:lstStyle/>
-          <a:p>
-            <a:r>
-              <a:t>infographic.pdf</a:t>
-            </a:r>
-          </a:p>
-          <a:p>
-            <a:r>
-              <a:t>File and analysis record</a:t>
-            </a:r>
-          </a:p>
-          <a:p>
-            <a:r>
-              <a:t>File | infographic.pdf</a:t>
-            </a:r>
-          </a:p>
-          <a:p>
-            <a:r>
-              <a:t>Analysis ID | f46ae041-994d-44fa-997c-8e6f23dcff90</a:t>
-            </a:r>
-          </a:p>
-          <a:p>
-            <a:r>
-              <a:t>Generated | 2026-09-26T22:31:05+00:00</a:t>
-            </a:r>
-          </a:p>
-          <a:p>
-            <a:r>
-              <a:t>Tool | SDA Vision 0.1.0</a:t>
-            </a:r>
-          </a:p>
-          <a:p>
-            <a:r>
-              <a:t>Models | claude-opus-5-5, gemini-3.8-flash, gpt-6-astra</a:t>
-            </a:r>
-          </a:p>
-          <a:p>
-            <a:r>
-              <a:t>Method version | pdf-preparation-2026-09-26.1</a:t>
-            </a:r>
-          </a:p>
-          <a:p>
-            <a:r>
-              <a:t>Analysis lens | general</a:t>
-            </a:r>
-          </a:p>
-          <a:p>
-            <a:r>
-              <a:t>Original SHA-256 | 02915f051b6eb2c9ef0c21f5bb20c4229ca21324bf20172f3867c32c299a5924</a:t>
-            </a:r>
-          </a:p>
-          <a:p>
-            <a:r>
-              <a:t>Ingestion note 1 | PDF preparation: pdf-input-2026-09-26.1 (pypdf text/figures; PDFium page rendering).</a:t>
-            </a:r>
-          </a:p>
-          <a:p>
-            <a:r>
-              <a:t>Ingestion note 2 | Extracted 4 embedded figure(s) of 15 found (figure mode).</a:t>
-            </a:r>
-          </a:p>
-          <a:p>
-            <a:r>
-              <a:t>Ingestion note 3 | No selectable text layer - vision models read the page/figure images.</a:t>
-            </a:r>
-          </a:p>
-          <a:p>
-            <a:r>
-              <a:t>Ingestion note 4 | Fresh provider replies acquired for eleven-examples-refresh-20260926-r1; report assembled locally from the saved responses without further API calls.</a:t>
-            </a:r>
-          </a:p>
-          <a:p>
-            <a:r>
-              <a:t>Ingestion note 5 | Provider latency values are restored from the acquisition receipts (maximum sampled-frame latency per provider); raw replies and assessment results are unchanged by this bookkeeping step.</a:t>
-            </a:r>
-          </a:p>
-        </p:txBody>
-      </p:sp>
-      <p:sp>
-        <p:nvSpPr>
-          <p:cNvPr id="4" name="Slide Number Placeholder 3"/>
-          <p:cNvSpPr>
-            <a:spLocks noGrp="1"/>
-          </p:cNvSpPr>
-          <p:nvPr>
-            <p:ph type="sldNum" idx="5" sz="quarter"/>
-          </p:nvPr>
-        </p:nvSpPr>
-        <p:spPr/>
-      </p:sp>
-    </p:spTree>
-  </p:cSld>
-  <p:clrMapOvr>
-    <a:masterClrMapping/>
-  </p:clrMapOvr>
-</p:notes>
-</file>
-
-<file path=ppt/notesSlides/notesSlide22.xml><?xml version="1.0" encoding="utf-8"?>
 <p:notes xmlns:a="http://schemas.openxmlformats.org/drawingml/2006/main" xmlns:p="http://schemas.openxmlformats.org/presentationml/2006/main" xmlns:r="http://schemas.openxmlformats.org/officeDocument/2006/relationships">
   <p:cSld>
     <p:spTree>
@@ -14833,7 +14737,7 @@
               </a:defRPr>
             </a:pPr>
             <a:r>
-              <a:t>Cite this analysis</a:t>
+              <a:t>File and analysis record</a:t>
             </a:r>
           </a:p>
         </p:txBody>
@@ -15020,7 +14924,7 @@
         </p:nvGraphicFramePr>
         <p:xfrm>
           <a:off x="365760" y="1700784"/>
-          <a:ext cx="8412479" cy="755904"/>
+          <a:ext cx="8412479" cy="349504"/>
         </p:xfrm>
         <a:graphic>
           <a:graphicData uri="http://schemas.openxmlformats.org/drawingml/2006/table">
@@ -15032,28 +14936,28 @@
                 <a:gridCol w="2271369"/>
                 <a:gridCol w="6141110"/>
               </a:tblGrid>
-              <a:tr h="755904">
-                <a:tc>
-                  <a:txBody>
-                    <a:bodyPr wrap="none"/>
-                    <a:lstStyle/>
-                    <a:p>
-                      <a:pPr>
-                        <a:lnSpc>
-                          <a:spcPts val="1600"/>
-                        </a:lnSpc>
-                        <a:spcAft>
-                          <a:spcPts val="0"/>
-                        </a:spcAft>
-                        <a:defRPr sz="1200" b="0">
-                          <a:solidFill>
-                            <a:srgbClr val="21243A"/>
-                          </a:solidFill>
-                          <a:latin typeface="Arial"/>
-                        </a:defRPr>
-                      </a:pPr>
-                      <a:r>
-                        <a:t>Software citation</a:t>
+              <a:tr h="349504">
+                <a:tc>
+                  <a:txBody>
+                    <a:bodyPr wrap="none"/>
+                    <a:lstStyle/>
+                    <a:p>
+                      <a:pPr>
+                        <a:lnSpc>
+                          <a:spcPts val="1600"/>
+                        </a:lnSpc>
+                        <a:spcAft>
+                          <a:spcPts val="0"/>
+                        </a:spcAft>
+                        <a:defRPr sz="1200" b="0">
+                          <a:solidFill>
+                            <a:srgbClr val="21243A"/>
+                          </a:solidFill>
+                          <a:latin typeface="Arial"/>
+                        </a:defRPr>
+                      </a:pPr>
+                      <a:r>
+                        <a:t>File</a:t>
                       </a:r>
                     </a:p>
                   </a:txBody>
@@ -15083,45 +14987,7 @@
                         </a:defRPr>
                       </a:pPr>
                       <a:r>
-                        <a:t>Martin, S. (2026) SDA Vision: Synthetic-media Discourse Analysis (version 0.1.0)</a:t>
-                      </a:r>
-                    </a:p>
-                    <a:p>
-                      <a:pPr>
-                        <a:lnSpc>
-                          <a:spcPts val="1600"/>
-                        </a:lnSpc>
-                        <a:spcAft>
-                          <a:spcPts val="0"/>
-                        </a:spcAft>
-                        <a:defRPr sz="1200" b="0">
-                          <a:solidFill>
-                            <a:srgbClr val="21243A"/>
-                          </a:solidFill>
-                          <a:latin typeface="Arial"/>
-                        </a:defRPr>
-                      </a:pPr>
-                      <a:r>
-                        <a:t>[Computer software]. Manchester Metropolitan University. Available at:</a:t>
-                      </a:r>
-                    </a:p>
-                    <a:p>
-                      <a:pPr>
-                        <a:lnSpc>
-                          <a:spcPts val="1600"/>
-                        </a:lnSpc>
-                        <a:spcAft>
-                          <a:spcPts val="0"/>
-                        </a:spcAft>
-                        <a:defRPr sz="1200" b="0">
-                          <a:solidFill>
-                            <a:srgbClr val="21243A"/>
-                          </a:solidFill>
-                          <a:latin typeface="Arial"/>
-                        </a:defRPr>
-                      </a:pPr>
-                      <a:r>
-                        <a:t>https://sdavision.io/</a:t>
+                        <a:t>infographic.pdf</a:t>
                       </a:r>
                     </a:p>
                   </a:txBody>
@@ -15145,8 +15011,8 @@
           <p:nvPr/>
         </p:nvGraphicFramePr>
         <p:xfrm>
-          <a:off x="365760" y="2456688"/>
-          <a:ext cx="8412479" cy="552704"/>
+          <a:off x="365760" y="2050288"/>
+          <a:ext cx="8412479" cy="349504"/>
         </p:xfrm>
         <a:graphic>
           <a:graphicData uri="http://schemas.openxmlformats.org/drawingml/2006/table">
@@ -15158,28 +15024,28 @@
                 <a:gridCol w="2271369"/>
                 <a:gridCol w="6141110"/>
               </a:tblGrid>
-              <a:tr h="552704">
-                <a:tc>
-                  <a:txBody>
-                    <a:bodyPr wrap="none"/>
-                    <a:lstStyle/>
-                    <a:p>
-                      <a:pPr>
-                        <a:lnSpc>
-                          <a:spcPts val="1600"/>
-                        </a:lnSpc>
-                        <a:spcAft>
-                          <a:spcPts val="0"/>
-                        </a:spcAft>
-                        <a:defRPr sz="1200" b="0">
-                          <a:solidFill>
-                            <a:srgbClr val="21243A"/>
-                          </a:solidFill>
-                          <a:latin typeface="Arial"/>
-                        </a:defRPr>
-                      </a:pPr>
-                      <a:r>
-                        <a:t>Software creator</a:t>
+              <a:tr h="349504">
+                <a:tc>
+                  <a:txBody>
+                    <a:bodyPr wrap="none"/>
+                    <a:lstStyle/>
+                    <a:p>
+                      <a:pPr>
+                        <a:lnSpc>
+                          <a:spcPts val="1600"/>
+                        </a:lnSpc>
+                        <a:spcAft>
+                          <a:spcPts val="0"/>
+                        </a:spcAft>
+                        <a:defRPr sz="1200" b="0">
+                          <a:solidFill>
+                            <a:srgbClr val="21243A"/>
+                          </a:solidFill>
+                          <a:latin typeface="Arial"/>
+                        </a:defRPr>
+                      </a:pPr>
+                      <a:r>
+                        <a:t>Analysis ID</a:t>
                       </a:r>
                     </a:p>
                   </a:txBody>
@@ -15209,26 +15075,7 @@
                         </a:defRPr>
                       </a:pPr>
                       <a:r>
-                        <a:t>Dr Sam Martin, Smart Data Research UK (UKRI) Fellow, Manchester Metropolitan</a:t>
-                      </a:r>
-                    </a:p>
-                    <a:p>
-                      <a:pPr>
-                        <a:lnSpc>
-                          <a:spcPts val="1600"/>
-                        </a:lnSpc>
-                        <a:spcAft>
-                          <a:spcPts val="0"/>
-                        </a:spcAft>
-                        <a:defRPr sz="1200" b="0">
-                          <a:solidFill>
-                            <a:srgbClr val="21243A"/>
-                          </a:solidFill>
-                          <a:latin typeface="Arial"/>
-                        </a:defRPr>
-                      </a:pPr>
-                      <a:r>
-                        <a:t>University (MMU). ORCID: https://orcid.org/0000-0002-4466-8374.</a:t>
+                        <a:t>f46ae041-994d-44fa-997c-8e6f23dcff90</a:t>
                       </a:r>
                     </a:p>
                   </a:txBody>
@@ -15252,8 +15099,8 @@
           <p:nvPr/>
         </p:nvGraphicFramePr>
         <p:xfrm>
-          <a:off x="365760" y="3009392"/>
-          <a:ext cx="8412479" cy="552704"/>
+          <a:off x="365760" y="2399792"/>
+          <a:ext cx="8412479" cy="349504"/>
         </p:xfrm>
         <a:graphic>
           <a:graphicData uri="http://schemas.openxmlformats.org/drawingml/2006/table">
@@ -15265,28 +15112,28 @@
                 <a:gridCol w="2271369"/>
                 <a:gridCol w="6141110"/>
               </a:tblGrid>
-              <a:tr h="552704">
-                <a:tc>
-                  <a:txBody>
-                    <a:bodyPr wrap="none"/>
-                    <a:lstStyle/>
-                    <a:p>
-                      <a:pPr>
-                        <a:lnSpc>
-                          <a:spcPts val="1600"/>
-                        </a:lnSpc>
-                        <a:spcAft>
-                          <a:spcPts val="0"/>
-                        </a:spcAft>
-                        <a:defRPr sz="1200" b="0">
-                          <a:solidFill>
-                            <a:srgbClr val="21243A"/>
-                          </a:solidFill>
-                          <a:latin typeface="Arial"/>
-                        </a:defRPr>
-                      </a:pPr>
-                      <a:r>
-                        <a:t>Funding acknowledgement</a:t>
+              <a:tr h="349504">
+                <a:tc>
+                  <a:txBody>
+                    <a:bodyPr wrap="none"/>
+                    <a:lstStyle/>
+                    <a:p>
+                      <a:pPr>
+                        <a:lnSpc>
+                          <a:spcPts val="1600"/>
+                        </a:lnSpc>
+                        <a:spcAft>
+                          <a:spcPts val="0"/>
+                        </a:spcAft>
+                        <a:defRPr sz="1200" b="0">
+                          <a:solidFill>
+                            <a:srgbClr val="21243A"/>
+                          </a:solidFill>
+                          <a:latin typeface="Arial"/>
+                        </a:defRPr>
+                      </a:pPr>
+                      <a:r>
+                        <a:t>Generated</a:t>
                       </a:r>
                     </a:p>
                   </a:txBody>
@@ -15316,26 +15163,7 @@
                         </a:defRPr>
                       </a:pPr>
                       <a:r>
-                        <a:t>This work was supported by Smart Data Research UK, a UKRI investment; Grant</a:t>
-                      </a:r>
-                    </a:p>
-                    <a:p>
-                      <a:pPr>
-                        <a:lnSpc>
-                          <a:spcPts val="1600"/>
-                        </a:lnSpc>
-                        <a:spcAft>
-                          <a:spcPts val="0"/>
-                        </a:spcAft>
-                        <a:defRPr sz="1200" b="0">
-                          <a:solidFill>
-                            <a:srgbClr val="21243A"/>
-                          </a:solidFill>
-                          <a:latin typeface="Arial"/>
-                        </a:defRPr>
-                      </a:pPr>
-                      <a:r>
-                        <a:t>number UKRI4010.</a:t>
+                        <a:t>2026-09-26T22:31:05+00:00</a:t>
                       </a:r>
                     </a:p>
                   </a:txBody>
@@ -15359,7 +15187,447 @@
           <p:nvPr/>
         </p:nvGraphicFramePr>
         <p:xfrm>
-          <a:off x="365760" y="3562095"/>
+          <a:off x="365760" y="2749296"/>
+          <a:ext cx="8412479" cy="349504"/>
+        </p:xfrm>
+        <a:graphic>
+          <a:graphicData uri="http://schemas.openxmlformats.org/drawingml/2006/table">
+            <a:tbl>
+              <a:tblPr firstRow="1" bandRow="1">
+                <a:tableStyleId>{5C22544A-7EE6-4342-B048-85BDC9FD1C3A}</a:tableStyleId>
+              </a:tblPr>
+              <a:tblGrid>
+                <a:gridCol w="2271369"/>
+                <a:gridCol w="6141110"/>
+              </a:tblGrid>
+              <a:tr h="349504">
+                <a:tc>
+                  <a:txBody>
+                    <a:bodyPr wrap="none"/>
+                    <a:lstStyle/>
+                    <a:p>
+                      <a:pPr>
+                        <a:lnSpc>
+                          <a:spcPts val="1600"/>
+                        </a:lnSpc>
+                        <a:spcAft>
+                          <a:spcPts val="0"/>
+                        </a:spcAft>
+                        <a:defRPr sz="1200" b="0">
+                          <a:solidFill>
+                            <a:srgbClr val="21243A"/>
+                          </a:solidFill>
+                          <a:latin typeface="Arial"/>
+                        </a:defRPr>
+                      </a:pPr>
+                      <a:r>
+                        <a:t>Tool</a:t>
+                      </a:r>
+                    </a:p>
+                  </a:txBody>
+                  <a:tcPr marL="82296" marR="82296" marT="64008" marB="64008">
+                    <a:solidFill>
+                      <a:srgbClr val="FFFFFF"/>
+                    </a:solidFill>
+                  </a:tcPr>
+                </a:tc>
+                <a:tc>
+                  <a:txBody>
+                    <a:bodyPr wrap="none"/>
+                    <a:lstStyle/>
+                    <a:p>
+                      <a:pPr>
+                        <a:lnSpc>
+                          <a:spcPts val="1600"/>
+                        </a:lnSpc>
+                        <a:spcAft>
+                          <a:spcPts val="0"/>
+                        </a:spcAft>
+                        <a:defRPr sz="1200" b="0">
+                          <a:solidFill>
+                            <a:srgbClr val="21243A"/>
+                          </a:solidFill>
+                          <a:latin typeface="Arial"/>
+                        </a:defRPr>
+                      </a:pPr>
+                      <a:r>
+                        <a:t>SDA Vision 0.1.0</a:t>
+                      </a:r>
+                    </a:p>
+                  </a:txBody>
+                  <a:tcPr marL="82296" marR="82296" marT="64008" marB="64008">
+                    <a:solidFill>
+                      <a:srgbClr val="FFFFFF"/>
+                    </a:solidFill>
+                  </a:tcPr>
+                </a:tc>
+              </a:tr>
+            </a:tbl>
+          </a:graphicData>
+        </a:graphic>
+      </p:graphicFrame>
+      <p:graphicFrame>
+        <p:nvGraphicFramePr>
+          <p:cNvPr id="11" name="Table 10"/>
+          <p:cNvGraphicFramePr>
+            <a:graphicFrameLocks noGrp="1"/>
+          </p:cNvGraphicFramePr>
+          <p:nvPr/>
+        </p:nvGraphicFramePr>
+        <p:xfrm>
+          <a:off x="365760" y="3098800"/>
+          <a:ext cx="8412479" cy="349504"/>
+        </p:xfrm>
+        <a:graphic>
+          <a:graphicData uri="http://schemas.openxmlformats.org/drawingml/2006/table">
+            <a:tbl>
+              <a:tblPr firstRow="1" bandRow="1">
+                <a:tableStyleId>{5C22544A-7EE6-4342-B048-85BDC9FD1C3A}</a:tableStyleId>
+              </a:tblPr>
+              <a:tblGrid>
+                <a:gridCol w="2271369"/>
+                <a:gridCol w="6141110"/>
+              </a:tblGrid>
+              <a:tr h="349504">
+                <a:tc>
+                  <a:txBody>
+                    <a:bodyPr wrap="none"/>
+                    <a:lstStyle/>
+                    <a:p>
+                      <a:pPr>
+                        <a:lnSpc>
+                          <a:spcPts val="1600"/>
+                        </a:lnSpc>
+                        <a:spcAft>
+                          <a:spcPts val="0"/>
+                        </a:spcAft>
+                        <a:defRPr sz="1200" b="0">
+                          <a:solidFill>
+                            <a:srgbClr val="21243A"/>
+                          </a:solidFill>
+                          <a:latin typeface="Arial"/>
+                        </a:defRPr>
+                      </a:pPr>
+                      <a:r>
+                        <a:t>Models</a:t>
+                      </a:r>
+                    </a:p>
+                  </a:txBody>
+                  <a:tcPr marL="82296" marR="82296" marT="64008" marB="64008">
+                    <a:solidFill>
+                      <a:srgbClr val="F1F7F7"/>
+                    </a:solidFill>
+                  </a:tcPr>
+                </a:tc>
+                <a:tc>
+                  <a:txBody>
+                    <a:bodyPr wrap="none"/>
+                    <a:lstStyle/>
+                    <a:p>
+                      <a:pPr>
+                        <a:lnSpc>
+                          <a:spcPts val="1600"/>
+                        </a:lnSpc>
+                        <a:spcAft>
+                          <a:spcPts val="0"/>
+                        </a:spcAft>
+                        <a:defRPr sz="1200" b="0">
+                          <a:solidFill>
+                            <a:srgbClr val="21243A"/>
+                          </a:solidFill>
+                          <a:latin typeface="Arial"/>
+                        </a:defRPr>
+                      </a:pPr>
+                      <a:r>
+                        <a:t>claude-opus-5-5, gemini-3.8-flash, gpt-6-astra</a:t>
+                      </a:r>
+                    </a:p>
+                  </a:txBody>
+                  <a:tcPr marL="82296" marR="82296" marT="64008" marB="64008">
+                    <a:solidFill>
+                      <a:srgbClr val="F1F7F7"/>
+                    </a:solidFill>
+                  </a:tcPr>
+                </a:tc>
+              </a:tr>
+            </a:tbl>
+          </a:graphicData>
+        </a:graphic>
+      </p:graphicFrame>
+      <p:graphicFrame>
+        <p:nvGraphicFramePr>
+          <p:cNvPr id="12" name="Table 11"/>
+          <p:cNvGraphicFramePr>
+            <a:graphicFrameLocks noGrp="1"/>
+          </p:cNvGraphicFramePr>
+          <p:nvPr/>
+        </p:nvGraphicFramePr>
+        <p:xfrm>
+          <a:off x="365760" y="3448304"/>
+          <a:ext cx="8412479" cy="349504"/>
+        </p:xfrm>
+        <a:graphic>
+          <a:graphicData uri="http://schemas.openxmlformats.org/drawingml/2006/table">
+            <a:tbl>
+              <a:tblPr firstRow="1" bandRow="1">
+                <a:tableStyleId>{5C22544A-7EE6-4342-B048-85BDC9FD1C3A}</a:tableStyleId>
+              </a:tblPr>
+              <a:tblGrid>
+                <a:gridCol w="2271369"/>
+                <a:gridCol w="6141110"/>
+              </a:tblGrid>
+              <a:tr h="349504">
+                <a:tc>
+                  <a:txBody>
+                    <a:bodyPr wrap="none"/>
+                    <a:lstStyle/>
+                    <a:p>
+                      <a:pPr>
+                        <a:lnSpc>
+                          <a:spcPts val="1600"/>
+                        </a:lnSpc>
+                        <a:spcAft>
+                          <a:spcPts val="0"/>
+                        </a:spcAft>
+                        <a:defRPr sz="1200" b="0">
+                          <a:solidFill>
+                            <a:srgbClr val="21243A"/>
+                          </a:solidFill>
+                          <a:latin typeface="Arial"/>
+                        </a:defRPr>
+                      </a:pPr>
+                      <a:r>
+                        <a:t>Method version</a:t>
+                      </a:r>
+                    </a:p>
+                  </a:txBody>
+                  <a:tcPr marL="82296" marR="82296" marT="64008" marB="64008">
+                    <a:solidFill>
+                      <a:srgbClr val="FFFFFF"/>
+                    </a:solidFill>
+                  </a:tcPr>
+                </a:tc>
+                <a:tc>
+                  <a:txBody>
+                    <a:bodyPr wrap="none"/>
+                    <a:lstStyle/>
+                    <a:p>
+                      <a:pPr>
+                        <a:lnSpc>
+                          <a:spcPts val="1600"/>
+                        </a:lnSpc>
+                        <a:spcAft>
+                          <a:spcPts val="0"/>
+                        </a:spcAft>
+                        <a:defRPr sz="1200" b="0">
+                          <a:solidFill>
+                            <a:srgbClr val="21243A"/>
+                          </a:solidFill>
+                          <a:latin typeface="Arial"/>
+                        </a:defRPr>
+                      </a:pPr>
+                      <a:r>
+                        <a:t>pdf-preparation-2026-09-26.1</a:t>
+                      </a:r>
+                    </a:p>
+                  </a:txBody>
+                  <a:tcPr marL="82296" marR="82296" marT="64008" marB="64008">
+                    <a:solidFill>
+                      <a:srgbClr val="FFFFFF"/>
+                    </a:solidFill>
+                  </a:tcPr>
+                </a:tc>
+              </a:tr>
+            </a:tbl>
+          </a:graphicData>
+        </a:graphic>
+      </p:graphicFrame>
+      <p:graphicFrame>
+        <p:nvGraphicFramePr>
+          <p:cNvPr id="13" name="Table 12"/>
+          <p:cNvGraphicFramePr>
+            <a:graphicFrameLocks noGrp="1"/>
+          </p:cNvGraphicFramePr>
+          <p:nvPr/>
+        </p:nvGraphicFramePr>
+        <p:xfrm>
+          <a:off x="365760" y="3797808"/>
+          <a:ext cx="8412479" cy="349504"/>
+        </p:xfrm>
+        <a:graphic>
+          <a:graphicData uri="http://schemas.openxmlformats.org/drawingml/2006/table">
+            <a:tbl>
+              <a:tblPr firstRow="1" bandRow="1">
+                <a:tableStyleId>{5C22544A-7EE6-4342-B048-85BDC9FD1C3A}</a:tableStyleId>
+              </a:tblPr>
+              <a:tblGrid>
+                <a:gridCol w="2271369"/>
+                <a:gridCol w="6141110"/>
+              </a:tblGrid>
+              <a:tr h="349504">
+                <a:tc>
+                  <a:txBody>
+                    <a:bodyPr wrap="none"/>
+                    <a:lstStyle/>
+                    <a:p>
+                      <a:pPr>
+                        <a:lnSpc>
+                          <a:spcPts val="1600"/>
+                        </a:lnSpc>
+                        <a:spcAft>
+                          <a:spcPts val="0"/>
+                        </a:spcAft>
+                        <a:defRPr sz="1200" b="0">
+                          <a:solidFill>
+                            <a:srgbClr val="21243A"/>
+                          </a:solidFill>
+                          <a:latin typeface="Arial"/>
+                        </a:defRPr>
+                      </a:pPr>
+                      <a:r>
+                        <a:t>Analysis lens</a:t>
+                      </a:r>
+                    </a:p>
+                  </a:txBody>
+                  <a:tcPr marL="82296" marR="82296" marT="64008" marB="64008">
+                    <a:solidFill>
+                      <a:srgbClr val="F1F7F7"/>
+                    </a:solidFill>
+                  </a:tcPr>
+                </a:tc>
+                <a:tc>
+                  <a:txBody>
+                    <a:bodyPr wrap="none"/>
+                    <a:lstStyle/>
+                    <a:p>
+                      <a:pPr>
+                        <a:lnSpc>
+                          <a:spcPts val="1600"/>
+                        </a:lnSpc>
+                        <a:spcAft>
+                          <a:spcPts val="0"/>
+                        </a:spcAft>
+                        <a:defRPr sz="1200" b="0">
+                          <a:solidFill>
+                            <a:srgbClr val="21243A"/>
+                          </a:solidFill>
+                          <a:latin typeface="Arial"/>
+                        </a:defRPr>
+                      </a:pPr>
+                      <a:r>
+                        <a:t>general</a:t>
+                      </a:r>
+                    </a:p>
+                  </a:txBody>
+                  <a:tcPr marL="82296" marR="82296" marT="64008" marB="64008">
+                    <a:solidFill>
+                      <a:srgbClr val="F1F7F7"/>
+                    </a:solidFill>
+                  </a:tcPr>
+                </a:tc>
+              </a:tr>
+            </a:tbl>
+          </a:graphicData>
+        </a:graphic>
+      </p:graphicFrame>
+      <p:graphicFrame>
+        <p:nvGraphicFramePr>
+          <p:cNvPr id="14" name="Table 13"/>
+          <p:cNvGraphicFramePr>
+            <a:graphicFrameLocks noGrp="1"/>
+          </p:cNvGraphicFramePr>
+          <p:nvPr/>
+        </p:nvGraphicFramePr>
+        <p:xfrm>
+          <a:off x="365760" y="4147312"/>
+          <a:ext cx="8412479" cy="349504"/>
+        </p:xfrm>
+        <a:graphic>
+          <a:graphicData uri="http://schemas.openxmlformats.org/drawingml/2006/table">
+            <a:tbl>
+              <a:tblPr firstRow="1" bandRow="1">
+                <a:tableStyleId>{5C22544A-7EE6-4342-B048-85BDC9FD1C3A}</a:tableStyleId>
+              </a:tblPr>
+              <a:tblGrid>
+                <a:gridCol w="2271369"/>
+                <a:gridCol w="6141110"/>
+              </a:tblGrid>
+              <a:tr h="349504">
+                <a:tc>
+                  <a:txBody>
+                    <a:bodyPr wrap="none"/>
+                    <a:lstStyle/>
+                    <a:p>
+                      <a:pPr>
+                        <a:lnSpc>
+                          <a:spcPts val="1600"/>
+                        </a:lnSpc>
+                        <a:spcAft>
+                          <a:spcPts val="0"/>
+                        </a:spcAft>
+                        <a:defRPr sz="1200" b="0">
+                          <a:solidFill>
+                            <a:srgbClr val="21243A"/>
+                          </a:solidFill>
+                          <a:latin typeface="Arial"/>
+                        </a:defRPr>
+                      </a:pPr>
+                      <a:r>
+                        <a:t>Original SHA-256</a:t>
+                      </a:r>
+                    </a:p>
+                  </a:txBody>
+                  <a:tcPr marL="82296" marR="82296" marT="64008" marB="64008">
+                    <a:solidFill>
+                      <a:srgbClr val="FFFFFF"/>
+                    </a:solidFill>
+                  </a:tcPr>
+                </a:tc>
+                <a:tc>
+                  <a:txBody>
+                    <a:bodyPr wrap="none"/>
+                    <a:lstStyle/>
+                    <a:p>
+                      <a:pPr>
+                        <a:lnSpc>
+                          <a:spcPts val="1600"/>
+                        </a:lnSpc>
+                        <a:spcAft>
+                          <a:spcPts val="0"/>
+                        </a:spcAft>
+                        <a:defRPr sz="1200" b="0">
+                          <a:solidFill>
+                            <a:srgbClr val="21243A"/>
+                          </a:solidFill>
+                          <a:latin typeface="Arial"/>
+                        </a:defRPr>
+                      </a:pPr>
+                      <a:r>
+                        <a:t>02915f051b6eb2c9ef0c21f5bb20c4229ca21324bf20172f3867c32c299a5924</a:t>
+                      </a:r>
+                    </a:p>
+                  </a:txBody>
+                  <a:tcPr marL="82296" marR="82296" marT="64008" marB="64008">
+                    <a:solidFill>
+                      <a:srgbClr val="FFFFFF"/>
+                    </a:solidFill>
+                  </a:tcPr>
+                </a:tc>
+              </a:tr>
+            </a:tbl>
+          </a:graphicData>
+        </a:graphic>
+      </p:graphicFrame>
+      <p:graphicFrame>
+        <p:nvGraphicFramePr>
+          <p:cNvPr id="15" name="Table 14"/>
+          <p:cNvGraphicFramePr>
+            <a:graphicFrameLocks noGrp="1"/>
+          </p:cNvGraphicFramePr>
+          <p:nvPr/>
+        </p:nvGraphicFramePr>
+        <p:xfrm>
+          <a:off x="365760" y="4496816"/>
           <a:ext cx="8412479" cy="552704"/>
         </p:xfrm>
         <a:graphic>
@@ -15393,7 +15661,114 @@
                         </a:defRPr>
                       </a:pPr>
                       <a:r>
-                        <a:t>Analysis record</a:t>
+                        <a:t>Ingestion note 1</a:t>
+                      </a:r>
+                    </a:p>
+                  </a:txBody>
+                  <a:tcPr marL="82296" marR="82296" marT="64008" marB="64008">
+                    <a:solidFill>
+                      <a:srgbClr val="F1F7F7"/>
+                    </a:solidFill>
+                  </a:tcPr>
+                </a:tc>
+                <a:tc>
+                  <a:txBody>
+                    <a:bodyPr wrap="none"/>
+                    <a:lstStyle/>
+                    <a:p>
+                      <a:pPr>
+                        <a:lnSpc>
+                          <a:spcPts val="1600"/>
+                        </a:lnSpc>
+                        <a:spcAft>
+                          <a:spcPts val="0"/>
+                        </a:spcAft>
+                        <a:defRPr sz="1200" b="0">
+                          <a:solidFill>
+                            <a:srgbClr val="21243A"/>
+                          </a:solidFill>
+                          <a:latin typeface="Arial"/>
+                        </a:defRPr>
+                      </a:pPr>
+                      <a:r>
+                        <a:t>PDF preparation: pdf-input-2026-09-26.1 (pypdf text/figures; PDFium page</a:t>
+                      </a:r>
+                    </a:p>
+                    <a:p>
+                      <a:pPr>
+                        <a:lnSpc>
+                          <a:spcPts val="1600"/>
+                        </a:lnSpc>
+                        <a:spcAft>
+                          <a:spcPts val="0"/>
+                        </a:spcAft>
+                        <a:defRPr sz="1200" b="0">
+                          <a:solidFill>
+                            <a:srgbClr val="21243A"/>
+                          </a:solidFill>
+                          <a:latin typeface="Arial"/>
+                        </a:defRPr>
+                      </a:pPr>
+                      <a:r>
+                        <a:t>rendering).</a:t>
+                      </a:r>
+                    </a:p>
+                  </a:txBody>
+                  <a:tcPr marL="82296" marR="82296" marT="64008" marB="64008">
+                    <a:solidFill>
+                      <a:srgbClr val="F1F7F7"/>
+                    </a:solidFill>
+                  </a:tcPr>
+                </a:tc>
+              </a:tr>
+            </a:tbl>
+          </a:graphicData>
+        </a:graphic>
+      </p:graphicFrame>
+      <p:graphicFrame>
+        <p:nvGraphicFramePr>
+          <p:cNvPr id="16" name="Table 15"/>
+          <p:cNvGraphicFramePr>
+            <a:graphicFrameLocks noGrp="1"/>
+          </p:cNvGraphicFramePr>
+          <p:nvPr/>
+        </p:nvGraphicFramePr>
+        <p:xfrm>
+          <a:off x="365760" y="5049520"/>
+          <a:ext cx="8412479" cy="349504"/>
+        </p:xfrm>
+        <a:graphic>
+          <a:graphicData uri="http://schemas.openxmlformats.org/drawingml/2006/table">
+            <a:tbl>
+              <a:tblPr firstRow="1" bandRow="1">
+                <a:tableStyleId>{5C22544A-7EE6-4342-B048-85BDC9FD1C3A}</a:tableStyleId>
+              </a:tblPr>
+              <a:tblGrid>
+                <a:gridCol w="2271369"/>
+                <a:gridCol w="6141110"/>
+              </a:tblGrid>
+              <a:tr h="349504">
+                <a:tc>
+                  <a:txBody>
+                    <a:bodyPr wrap="none"/>
+                    <a:lstStyle/>
+                    <a:p>
+                      <a:pPr>
+                        <a:lnSpc>
+                          <a:spcPts val="1600"/>
+                        </a:lnSpc>
+                        <a:spcAft>
+                          <a:spcPts val="0"/>
+                        </a:spcAft>
+                        <a:defRPr sz="1200" b="0">
+                          <a:solidFill>
+                            <a:srgbClr val="21243A"/>
+                          </a:solidFill>
+                          <a:latin typeface="Arial"/>
+                        </a:defRPr>
+                      </a:pPr>
+                      <a:r>
+                        <a:t>Ingestion note 2</a:t>
                       </a:r>
                     </a:p>
                   </a:txBody>
@@ -15423,32 +15798,101 @@
                         </a:defRPr>
                       </a:pPr>
                       <a:r>
-                        <a:t>File: infographic.pdf; media type: pdf; recorded at: 2026-09-26T22:31:05+00:00;</a:t>
-                      </a:r>
-                    </a:p>
-                    <a:p>
-                      <a:pPr>
-                        <a:lnSpc>
-                          <a:spcPts val="1600"/>
-                        </a:lnSpc>
-                        <a:spcAft>
-                          <a:spcPts val="0"/>
-                        </a:spcAft>
-                        <a:defRPr sz="1200" b="0">
-                          <a:solidFill>
-                            <a:srgbClr val="21243A"/>
-                          </a:solidFill>
-                          <a:latin typeface="Arial"/>
-                        </a:defRPr>
-                      </a:pPr>
-                      <a:r>
-                        <a:t>models: claude-opus-5-5, gemini-3.8-flash, gpt-6-astra.</a:t>
+                        <a:t>Extracted 4 embedded figure(s) of 15 found (figure mode).</a:t>
                       </a:r>
                     </a:p>
                   </a:txBody>
                   <a:tcPr marL="82296" marR="82296" marT="64008" marB="64008">
                     <a:solidFill>
                       <a:srgbClr val="FFFFFF"/>
+                    </a:solidFill>
+                  </a:tcPr>
+                </a:tc>
+              </a:tr>
+            </a:tbl>
+          </a:graphicData>
+        </a:graphic>
+      </p:graphicFrame>
+      <p:graphicFrame>
+        <p:nvGraphicFramePr>
+          <p:cNvPr id="17" name="Table 16"/>
+          <p:cNvGraphicFramePr>
+            <a:graphicFrameLocks noGrp="1"/>
+          </p:cNvGraphicFramePr>
+          <p:nvPr/>
+        </p:nvGraphicFramePr>
+        <p:xfrm>
+          <a:off x="365760" y="5399024"/>
+          <a:ext cx="8412479" cy="349504"/>
+        </p:xfrm>
+        <a:graphic>
+          <a:graphicData uri="http://schemas.openxmlformats.org/drawingml/2006/table">
+            <a:tbl>
+              <a:tblPr firstRow="1" bandRow="1">
+                <a:tableStyleId>{5C22544A-7EE6-4342-B048-85BDC9FD1C3A}</a:tableStyleId>
+              </a:tblPr>
+              <a:tblGrid>
+                <a:gridCol w="2271369"/>
+                <a:gridCol w="6141110"/>
+              </a:tblGrid>
+              <a:tr h="349504">
+                <a:tc>
+                  <a:txBody>
+                    <a:bodyPr wrap="none"/>
+                    <a:lstStyle/>
+                    <a:p>
+                      <a:pPr>
+                        <a:lnSpc>
+                          <a:spcPts val="1600"/>
+                        </a:lnSpc>
+                        <a:spcAft>
+                          <a:spcPts val="0"/>
+                        </a:spcAft>
+                        <a:defRPr sz="1200" b="0">
+                          <a:solidFill>
+                            <a:srgbClr val="21243A"/>
+                          </a:solidFill>
+                          <a:latin typeface="Arial"/>
+                        </a:defRPr>
+                      </a:pPr>
+                      <a:r>
+                        <a:t>Ingestion note 3</a:t>
+                      </a:r>
+                    </a:p>
+                  </a:txBody>
+                  <a:tcPr marL="82296" marR="82296" marT="64008" marB="64008">
+                    <a:solidFill>
+                      <a:srgbClr val="F1F7F7"/>
+                    </a:solidFill>
+                  </a:tcPr>
+                </a:tc>
+                <a:tc>
+                  <a:txBody>
+                    <a:bodyPr wrap="none"/>
+                    <a:lstStyle/>
+                    <a:p>
+                      <a:pPr>
+                        <a:lnSpc>
+                          <a:spcPts val="1600"/>
+                        </a:lnSpc>
+                        <a:spcAft>
+                          <a:spcPts val="0"/>
+                        </a:spcAft>
+                        <a:defRPr sz="1200" b="0">
+                          <a:solidFill>
+                            <a:srgbClr val="21243A"/>
+                          </a:solidFill>
+                          <a:latin typeface="Arial"/>
+                        </a:defRPr>
+                      </a:pPr>
+                      <a:r>
+                        <a:t>No selectable text layer - vision models read the page/figure images.</a:t>
+                      </a:r>
+                    </a:p>
+                  </a:txBody>
+                  <a:tcPr marL="82296" marR="82296" marT="64008" marB="64008">
+                    <a:solidFill>
+                      <a:srgbClr val="F1F7F7"/>
                     </a:solidFill>
                   </a:tcPr>
                 </a:tc>
@@ -15554,7 +15998,7 @@
               </a:defRPr>
             </a:pPr>
             <a:r>
-              <a:t>File and analysis record</a:t>
+              <a:t>File and analysis record (continued)</a:t>
             </a:r>
           </a:p>
         </p:txBody>
@@ -15639,1267 +16083,6 @@
             </a:pPr>
             <a:r>
               <a:t>21</a:t>
-            </a:r>
-          </a:p>
-        </p:txBody>
-      </p:sp>
-      <p:graphicFrame>
-        <p:nvGraphicFramePr>
-          <p:cNvPr id="6" name="Table 5"/>
-          <p:cNvGraphicFramePr>
-            <a:graphicFrameLocks noGrp="1"/>
-          </p:cNvGraphicFramePr>
-          <p:nvPr/>
-        </p:nvGraphicFramePr>
-        <p:xfrm>
-          <a:off x="365760" y="1353312"/>
-          <a:ext cx="8412479" cy="347472"/>
-        </p:xfrm>
-        <a:graphic>
-          <a:graphicData uri="http://schemas.openxmlformats.org/drawingml/2006/table">
-            <a:tbl>
-              <a:tblPr firstRow="1" bandRow="1">
-                <a:tableStyleId>{5C22544A-7EE6-4342-B048-85BDC9FD1C3A}</a:tableStyleId>
-              </a:tblPr>
-              <a:tblGrid>
-                <a:gridCol w="2271369"/>
-                <a:gridCol w="6141110"/>
-              </a:tblGrid>
-              <a:tr h="347472">
-                <a:tc>
-                  <a:txBody>
-                    <a:bodyPr wrap="none"/>
-                    <a:lstStyle/>
-                    <a:p>
-                      <a:pPr>
-                        <a:lnSpc>
-                          <a:spcPts val="1600"/>
-                        </a:lnSpc>
-                        <a:spcAft>
-                          <a:spcPts val="0"/>
-                        </a:spcAft>
-                        <a:defRPr sz="1200" b="1">
-                          <a:solidFill>
-                            <a:srgbClr val="FFFFFF"/>
-                          </a:solidFill>
-                          <a:latin typeface="Arial"/>
-                        </a:defRPr>
-                      </a:pPr>
-                      <a:r>
-                        <a:t>Field</a:t>
-                      </a:r>
-                    </a:p>
-                  </a:txBody>
-                  <a:tcPr marL="82296" marR="82296" marT="64008" marB="64008">
-                    <a:solidFill>
-                      <a:srgbClr val="16787C"/>
-                    </a:solidFill>
-                  </a:tcPr>
-                </a:tc>
-                <a:tc>
-                  <a:txBody>
-                    <a:bodyPr wrap="none"/>
-                    <a:lstStyle/>
-                    <a:p>
-                      <a:pPr>
-                        <a:lnSpc>
-                          <a:spcPts val="1600"/>
-                        </a:lnSpc>
-                        <a:spcAft>
-                          <a:spcPts val="0"/>
-                        </a:spcAft>
-                        <a:defRPr sz="1200" b="1">
-                          <a:solidFill>
-                            <a:srgbClr val="FFFFFF"/>
-                          </a:solidFill>
-                          <a:latin typeface="Arial"/>
-                        </a:defRPr>
-                      </a:pPr>
-                      <a:r>
-                        <a:t>Recorded detail</a:t>
-                      </a:r>
-                    </a:p>
-                  </a:txBody>
-                  <a:tcPr marL="82296" marR="82296" marT="64008" marB="64008">
-                    <a:solidFill>
-                      <a:srgbClr val="16787C"/>
-                    </a:solidFill>
-                  </a:tcPr>
-                </a:tc>
-              </a:tr>
-            </a:tbl>
-          </a:graphicData>
-        </a:graphic>
-      </p:graphicFrame>
-      <p:graphicFrame>
-        <p:nvGraphicFramePr>
-          <p:cNvPr id="7" name="Table 6"/>
-          <p:cNvGraphicFramePr>
-            <a:graphicFrameLocks noGrp="1"/>
-          </p:cNvGraphicFramePr>
-          <p:nvPr/>
-        </p:nvGraphicFramePr>
-        <p:xfrm>
-          <a:off x="365760" y="1700784"/>
-          <a:ext cx="8412479" cy="349504"/>
-        </p:xfrm>
-        <a:graphic>
-          <a:graphicData uri="http://schemas.openxmlformats.org/drawingml/2006/table">
-            <a:tbl>
-              <a:tblPr firstRow="1" bandRow="1">
-                <a:tableStyleId>{5C22544A-7EE6-4342-B048-85BDC9FD1C3A}</a:tableStyleId>
-              </a:tblPr>
-              <a:tblGrid>
-                <a:gridCol w="2271369"/>
-                <a:gridCol w="6141110"/>
-              </a:tblGrid>
-              <a:tr h="349504">
-                <a:tc>
-                  <a:txBody>
-                    <a:bodyPr wrap="none"/>
-                    <a:lstStyle/>
-                    <a:p>
-                      <a:pPr>
-                        <a:lnSpc>
-                          <a:spcPts val="1600"/>
-                        </a:lnSpc>
-                        <a:spcAft>
-                          <a:spcPts val="0"/>
-                        </a:spcAft>
-                        <a:defRPr sz="1200" b="0">
-                          <a:solidFill>
-                            <a:srgbClr val="21243A"/>
-                          </a:solidFill>
-                          <a:latin typeface="Arial"/>
-                        </a:defRPr>
-                      </a:pPr>
-                      <a:r>
-                        <a:t>File</a:t>
-                      </a:r>
-                    </a:p>
-                  </a:txBody>
-                  <a:tcPr marL="82296" marR="82296" marT="64008" marB="64008">
-                    <a:solidFill>
-                      <a:srgbClr val="F1F7F7"/>
-                    </a:solidFill>
-                  </a:tcPr>
-                </a:tc>
-                <a:tc>
-                  <a:txBody>
-                    <a:bodyPr wrap="none"/>
-                    <a:lstStyle/>
-                    <a:p>
-                      <a:pPr>
-                        <a:lnSpc>
-                          <a:spcPts val="1600"/>
-                        </a:lnSpc>
-                        <a:spcAft>
-                          <a:spcPts val="0"/>
-                        </a:spcAft>
-                        <a:defRPr sz="1200" b="0">
-                          <a:solidFill>
-                            <a:srgbClr val="21243A"/>
-                          </a:solidFill>
-                          <a:latin typeface="Arial"/>
-                        </a:defRPr>
-                      </a:pPr>
-                      <a:r>
-                        <a:t>infographic.pdf</a:t>
-                      </a:r>
-                    </a:p>
-                  </a:txBody>
-                  <a:tcPr marL="82296" marR="82296" marT="64008" marB="64008">
-                    <a:solidFill>
-                      <a:srgbClr val="F1F7F7"/>
-                    </a:solidFill>
-                  </a:tcPr>
-                </a:tc>
-              </a:tr>
-            </a:tbl>
-          </a:graphicData>
-        </a:graphic>
-      </p:graphicFrame>
-      <p:graphicFrame>
-        <p:nvGraphicFramePr>
-          <p:cNvPr id="8" name="Table 7"/>
-          <p:cNvGraphicFramePr>
-            <a:graphicFrameLocks noGrp="1"/>
-          </p:cNvGraphicFramePr>
-          <p:nvPr/>
-        </p:nvGraphicFramePr>
-        <p:xfrm>
-          <a:off x="365760" y="2050288"/>
-          <a:ext cx="8412479" cy="349504"/>
-        </p:xfrm>
-        <a:graphic>
-          <a:graphicData uri="http://schemas.openxmlformats.org/drawingml/2006/table">
-            <a:tbl>
-              <a:tblPr firstRow="1" bandRow="1">
-                <a:tableStyleId>{5C22544A-7EE6-4342-B048-85BDC9FD1C3A}</a:tableStyleId>
-              </a:tblPr>
-              <a:tblGrid>
-                <a:gridCol w="2271369"/>
-                <a:gridCol w="6141110"/>
-              </a:tblGrid>
-              <a:tr h="349504">
-                <a:tc>
-                  <a:txBody>
-                    <a:bodyPr wrap="none"/>
-                    <a:lstStyle/>
-                    <a:p>
-                      <a:pPr>
-                        <a:lnSpc>
-                          <a:spcPts val="1600"/>
-                        </a:lnSpc>
-                        <a:spcAft>
-                          <a:spcPts val="0"/>
-                        </a:spcAft>
-                        <a:defRPr sz="1200" b="0">
-                          <a:solidFill>
-                            <a:srgbClr val="21243A"/>
-                          </a:solidFill>
-                          <a:latin typeface="Arial"/>
-                        </a:defRPr>
-                      </a:pPr>
-                      <a:r>
-                        <a:t>Analysis ID</a:t>
-                      </a:r>
-                    </a:p>
-                  </a:txBody>
-                  <a:tcPr marL="82296" marR="82296" marT="64008" marB="64008">
-                    <a:solidFill>
-                      <a:srgbClr val="FFFFFF"/>
-                    </a:solidFill>
-                  </a:tcPr>
-                </a:tc>
-                <a:tc>
-                  <a:txBody>
-                    <a:bodyPr wrap="none"/>
-                    <a:lstStyle/>
-                    <a:p>
-                      <a:pPr>
-                        <a:lnSpc>
-                          <a:spcPts val="1600"/>
-                        </a:lnSpc>
-                        <a:spcAft>
-                          <a:spcPts val="0"/>
-                        </a:spcAft>
-                        <a:defRPr sz="1200" b="0">
-                          <a:solidFill>
-                            <a:srgbClr val="21243A"/>
-                          </a:solidFill>
-                          <a:latin typeface="Arial"/>
-                        </a:defRPr>
-                      </a:pPr>
-                      <a:r>
-                        <a:t>f46ae041-994d-44fa-997c-8e6f23dcff90</a:t>
-                      </a:r>
-                    </a:p>
-                  </a:txBody>
-                  <a:tcPr marL="82296" marR="82296" marT="64008" marB="64008">
-                    <a:solidFill>
-                      <a:srgbClr val="FFFFFF"/>
-                    </a:solidFill>
-                  </a:tcPr>
-                </a:tc>
-              </a:tr>
-            </a:tbl>
-          </a:graphicData>
-        </a:graphic>
-      </p:graphicFrame>
-      <p:graphicFrame>
-        <p:nvGraphicFramePr>
-          <p:cNvPr id="9" name="Table 8"/>
-          <p:cNvGraphicFramePr>
-            <a:graphicFrameLocks noGrp="1"/>
-          </p:cNvGraphicFramePr>
-          <p:nvPr/>
-        </p:nvGraphicFramePr>
-        <p:xfrm>
-          <a:off x="365760" y="2399792"/>
-          <a:ext cx="8412479" cy="349504"/>
-        </p:xfrm>
-        <a:graphic>
-          <a:graphicData uri="http://schemas.openxmlformats.org/drawingml/2006/table">
-            <a:tbl>
-              <a:tblPr firstRow="1" bandRow="1">
-                <a:tableStyleId>{5C22544A-7EE6-4342-B048-85BDC9FD1C3A}</a:tableStyleId>
-              </a:tblPr>
-              <a:tblGrid>
-                <a:gridCol w="2271369"/>
-                <a:gridCol w="6141110"/>
-              </a:tblGrid>
-              <a:tr h="349504">
-                <a:tc>
-                  <a:txBody>
-                    <a:bodyPr wrap="none"/>
-                    <a:lstStyle/>
-                    <a:p>
-                      <a:pPr>
-                        <a:lnSpc>
-                          <a:spcPts val="1600"/>
-                        </a:lnSpc>
-                        <a:spcAft>
-                          <a:spcPts val="0"/>
-                        </a:spcAft>
-                        <a:defRPr sz="1200" b="0">
-                          <a:solidFill>
-                            <a:srgbClr val="21243A"/>
-                          </a:solidFill>
-                          <a:latin typeface="Arial"/>
-                        </a:defRPr>
-                      </a:pPr>
-                      <a:r>
-                        <a:t>Generated</a:t>
-                      </a:r>
-                    </a:p>
-                  </a:txBody>
-                  <a:tcPr marL="82296" marR="82296" marT="64008" marB="64008">
-                    <a:solidFill>
-                      <a:srgbClr val="F1F7F7"/>
-                    </a:solidFill>
-                  </a:tcPr>
-                </a:tc>
-                <a:tc>
-                  <a:txBody>
-                    <a:bodyPr wrap="none"/>
-                    <a:lstStyle/>
-                    <a:p>
-                      <a:pPr>
-                        <a:lnSpc>
-                          <a:spcPts val="1600"/>
-                        </a:lnSpc>
-                        <a:spcAft>
-                          <a:spcPts val="0"/>
-                        </a:spcAft>
-                        <a:defRPr sz="1200" b="0">
-                          <a:solidFill>
-                            <a:srgbClr val="21243A"/>
-                          </a:solidFill>
-                          <a:latin typeface="Arial"/>
-                        </a:defRPr>
-                      </a:pPr>
-                      <a:r>
-                        <a:t>2026-09-26T22:31:05+00:00</a:t>
-                      </a:r>
-                    </a:p>
-                  </a:txBody>
-                  <a:tcPr marL="82296" marR="82296" marT="64008" marB="64008">
-                    <a:solidFill>
-                      <a:srgbClr val="F1F7F7"/>
-                    </a:solidFill>
-                  </a:tcPr>
-                </a:tc>
-              </a:tr>
-            </a:tbl>
-          </a:graphicData>
-        </a:graphic>
-      </p:graphicFrame>
-      <p:graphicFrame>
-        <p:nvGraphicFramePr>
-          <p:cNvPr id="10" name="Table 9"/>
-          <p:cNvGraphicFramePr>
-            <a:graphicFrameLocks noGrp="1"/>
-          </p:cNvGraphicFramePr>
-          <p:nvPr/>
-        </p:nvGraphicFramePr>
-        <p:xfrm>
-          <a:off x="365760" y="2749296"/>
-          <a:ext cx="8412479" cy="349504"/>
-        </p:xfrm>
-        <a:graphic>
-          <a:graphicData uri="http://schemas.openxmlformats.org/drawingml/2006/table">
-            <a:tbl>
-              <a:tblPr firstRow="1" bandRow="1">
-                <a:tableStyleId>{5C22544A-7EE6-4342-B048-85BDC9FD1C3A}</a:tableStyleId>
-              </a:tblPr>
-              <a:tblGrid>
-                <a:gridCol w="2271369"/>
-                <a:gridCol w="6141110"/>
-              </a:tblGrid>
-              <a:tr h="349504">
-                <a:tc>
-                  <a:txBody>
-                    <a:bodyPr wrap="none"/>
-                    <a:lstStyle/>
-                    <a:p>
-                      <a:pPr>
-                        <a:lnSpc>
-                          <a:spcPts val="1600"/>
-                        </a:lnSpc>
-                        <a:spcAft>
-                          <a:spcPts val="0"/>
-                        </a:spcAft>
-                        <a:defRPr sz="1200" b="0">
-                          <a:solidFill>
-                            <a:srgbClr val="21243A"/>
-                          </a:solidFill>
-                          <a:latin typeface="Arial"/>
-                        </a:defRPr>
-                      </a:pPr>
-                      <a:r>
-                        <a:t>Tool</a:t>
-                      </a:r>
-                    </a:p>
-                  </a:txBody>
-                  <a:tcPr marL="82296" marR="82296" marT="64008" marB="64008">
-                    <a:solidFill>
-                      <a:srgbClr val="FFFFFF"/>
-                    </a:solidFill>
-                  </a:tcPr>
-                </a:tc>
-                <a:tc>
-                  <a:txBody>
-                    <a:bodyPr wrap="none"/>
-                    <a:lstStyle/>
-                    <a:p>
-                      <a:pPr>
-                        <a:lnSpc>
-                          <a:spcPts val="1600"/>
-                        </a:lnSpc>
-                        <a:spcAft>
-                          <a:spcPts val="0"/>
-                        </a:spcAft>
-                        <a:defRPr sz="1200" b="0">
-                          <a:solidFill>
-                            <a:srgbClr val="21243A"/>
-                          </a:solidFill>
-                          <a:latin typeface="Arial"/>
-                        </a:defRPr>
-                      </a:pPr>
-                      <a:r>
-                        <a:t>SDA Vision 0.1.0</a:t>
-                      </a:r>
-                    </a:p>
-                  </a:txBody>
-                  <a:tcPr marL="82296" marR="82296" marT="64008" marB="64008">
-                    <a:solidFill>
-                      <a:srgbClr val="FFFFFF"/>
-                    </a:solidFill>
-                  </a:tcPr>
-                </a:tc>
-              </a:tr>
-            </a:tbl>
-          </a:graphicData>
-        </a:graphic>
-      </p:graphicFrame>
-      <p:graphicFrame>
-        <p:nvGraphicFramePr>
-          <p:cNvPr id="11" name="Table 10"/>
-          <p:cNvGraphicFramePr>
-            <a:graphicFrameLocks noGrp="1"/>
-          </p:cNvGraphicFramePr>
-          <p:nvPr/>
-        </p:nvGraphicFramePr>
-        <p:xfrm>
-          <a:off x="365760" y="3098800"/>
-          <a:ext cx="8412479" cy="349504"/>
-        </p:xfrm>
-        <a:graphic>
-          <a:graphicData uri="http://schemas.openxmlformats.org/drawingml/2006/table">
-            <a:tbl>
-              <a:tblPr firstRow="1" bandRow="1">
-                <a:tableStyleId>{5C22544A-7EE6-4342-B048-85BDC9FD1C3A}</a:tableStyleId>
-              </a:tblPr>
-              <a:tblGrid>
-                <a:gridCol w="2271369"/>
-                <a:gridCol w="6141110"/>
-              </a:tblGrid>
-              <a:tr h="349504">
-                <a:tc>
-                  <a:txBody>
-                    <a:bodyPr wrap="none"/>
-                    <a:lstStyle/>
-                    <a:p>
-                      <a:pPr>
-                        <a:lnSpc>
-                          <a:spcPts val="1600"/>
-                        </a:lnSpc>
-                        <a:spcAft>
-                          <a:spcPts val="0"/>
-                        </a:spcAft>
-                        <a:defRPr sz="1200" b="0">
-                          <a:solidFill>
-                            <a:srgbClr val="21243A"/>
-                          </a:solidFill>
-                          <a:latin typeface="Arial"/>
-                        </a:defRPr>
-                      </a:pPr>
-                      <a:r>
-                        <a:t>Models</a:t>
-                      </a:r>
-                    </a:p>
-                  </a:txBody>
-                  <a:tcPr marL="82296" marR="82296" marT="64008" marB="64008">
-                    <a:solidFill>
-                      <a:srgbClr val="F1F7F7"/>
-                    </a:solidFill>
-                  </a:tcPr>
-                </a:tc>
-                <a:tc>
-                  <a:txBody>
-                    <a:bodyPr wrap="none"/>
-                    <a:lstStyle/>
-                    <a:p>
-                      <a:pPr>
-                        <a:lnSpc>
-                          <a:spcPts val="1600"/>
-                        </a:lnSpc>
-                        <a:spcAft>
-                          <a:spcPts val="0"/>
-                        </a:spcAft>
-                        <a:defRPr sz="1200" b="0">
-                          <a:solidFill>
-                            <a:srgbClr val="21243A"/>
-                          </a:solidFill>
-                          <a:latin typeface="Arial"/>
-                        </a:defRPr>
-                      </a:pPr>
-                      <a:r>
-                        <a:t>claude-opus-5-5, gemini-3.8-flash, gpt-6-astra</a:t>
-                      </a:r>
-                    </a:p>
-                  </a:txBody>
-                  <a:tcPr marL="82296" marR="82296" marT="64008" marB="64008">
-                    <a:solidFill>
-                      <a:srgbClr val="F1F7F7"/>
-                    </a:solidFill>
-                  </a:tcPr>
-                </a:tc>
-              </a:tr>
-            </a:tbl>
-          </a:graphicData>
-        </a:graphic>
-      </p:graphicFrame>
-      <p:graphicFrame>
-        <p:nvGraphicFramePr>
-          <p:cNvPr id="12" name="Table 11"/>
-          <p:cNvGraphicFramePr>
-            <a:graphicFrameLocks noGrp="1"/>
-          </p:cNvGraphicFramePr>
-          <p:nvPr/>
-        </p:nvGraphicFramePr>
-        <p:xfrm>
-          <a:off x="365760" y="3448304"/>
-          <a:ext cx="8412479" cy="349504"/>
-        </p:xfrm>
-        <a:graphic>
-          <a:graphicData uri="http://schemas.openxmlformats.org/drawingml/2006/table">
-            <a:tbl>
-              <a:tblPr firstRow="1" bandRow="1">
-                <a:tableStyleId>{5C22544A-7EE6-4342-B048-85BDC9FD1C3A}</a:tableStyleId>
-              </a:tblPr>
-              <a:tblGrid>
-                <a:gridCol w="2271369"/>
-                <a:gridCol w="6141110"/>
-              </a:tblGrid>
-              <a:tr h="349504">
-                <a:tc>
-                  <a:txBody>
-                    <a:bodyPr wrap="none"/>
-                    <a:lstStyle/>
-                    <a:p>
-                      <a:pPr>
-                        <a:lnSpc>
-                          <a:spcPts val="1600"/>
-                        </a:lnSpc>
-                        <a:spcAft>
-                          <a:spcPts val="0"/>
-                        </a:spcAft>
-                        <a:defRPr sz="1200" b="0">
-                          <a:solidFill>
-                            <a:srgbClr val="21243A"/>
-                          </a:solidFill>
-                          <a:latin typeface="Arial"/>
-                        </a:defRPr>
-                      </a:pPr>
-                      <a:r>
-                        <a:t>Method version</a:t>
-                      </a:r>
-                    </a:p>
-                  </a:txBody>
-                  <a:tcPr marL="82296" marR="82296" marT="64008" marB="64008">
-                    <a:solidFill>
-                      <a:srgbClr val="FFFFFF"/>
-                    </a:solidFill>
-                  </a:tcPr>
-                </a:tc>
-                <a:tc>
-                  <a:txBody>
-                    <a:bodyPr wrap="none"/>
-                    <a:lstStyle/>
-                    <a:p>
-                      <a:pPr>
-                        <a:lnSpc>
-                          <a:spcPts val="1600"/>
-                        </a:lnSpc>
-                        <a:spcAft>
-                          <a:spcPts val="0"/>
-                        </a:spcAft>
-                        <a:defRPr sz="1200" b="0">
-                          <a:solidFill>
-                            <a:srgbClr val="21243A"/>
-                          </a:solidFill>
-                          <a:latin typeface="Arial"/>
-                        </a:defRPr>
-                      </a:pPr>
-                      <a:r>
-                        <a:t>pdf-preparation-2026-09-26.1</a:t>
-                      </a:r>
-                    </a:p>
-                  </a:txBody>
-                  <a:tcPr marL="82296" marR="82296" marT="64008" marB="64008">
-                    <a:solidFill>
-                      <a:srgbClr val="FFFFFF"/>
-                    </a:solidFill>
-                  </a:tcPr>
-                </a:tc>
-              </a:tr>
-            </a:tbl>
-          </a:graphicData>
-        </a:graphic>
-      </p:graphicFrame>
-      <p:graphicFrame>
-        <p:nvGraphicFramePr>
-          <p:cNvPr id="13" name="Table 12"/>
-          <p:cNvGraphicFramePr>
-            <a:graphicFrameLocks noGrp="1"/>
-          </p:cNvGraphicFramePr>
-          <p:nvPr/>
-        </p:nvGraphicFramePr>
-        <p:xfrm>
-          <a:off x="365760" y="3797808"/>
-          <a:ext cx="8412479" cy="349504"/>
-        </p:xfrm>
-        <a:graphic>
-          <a:graphicData uri="http://schemas.openxmlformats.org/drawingml/2006/table">
-            <a:tbl>
-              <a:tblPr firstRow="1" bandRow="1">
-                <a:tableStyleId>{5C22544A-7EE6-4342-B048-85BDC9FD1C3A}</a:tableStyleId>
-              </a:tblPr>
-              <a:tblGrid>
-                <a:gridCol w="2271369"/>
-                <a:gridCol w="6141110"/>
-              </a:tblGrid>
-              <a:tr h="349504">
-                <a:tc>
-                  <a:txBody>
-                    <a:bodyPr wrap="none"/>
-                    <a:lstStyle/>
-                    <a:p>
-                      <a:pPr>
-                        <a:lnSpc>
-                          <a:spcPts val="1600"/>
-                        </a:lnSpc>
-                        <a:spcAft>
-                          <a:spcPts val="0"/>
-                        </a:spcAft>
-                        <a:defRPr sz="1200" b="0">
-                          <a:solidFill>
-                            <a:srgbClr val="21243A"/>
-                          </a:solidFill>
-                          <a:latin typeface="Arial"/>
-                        </a:defRPr>
-                      </a:pPr>
-                      <a:r>
-                        <a:t>Analysis lens</a:t>
-                      </a:r>
-                    </a:p>
-                  </a:txBody>
-                  <a:tcPr marL="82296" marR="82296" marT="64008" marB="64008">
-                    <a:solidFill>
-                      <a:srgbClr val="F1F7F7"/>
-                    </a:solidFill>
-                  </a:tcPr>
-                </a:tc>
-                <a:tc>
-                  <a:txBody>
-                    <a:bodyPr wrap="none"/>
-                    <a:lstStyle/>
-                    <a:p>
-                      <a:pPr>
-                        <a:lnSpc>
-                          <a:spcPts val="1600"/>
-                        </a:lnSpc>
-                        <a:spcAft>
-                          <a:spcPts val="0"/>
-                        </a:spcAft>
-                        <a:defRPr sz="1200" b="0">
-                          <a:solidFill>
-                            <a:srgbClr val="21243A"/>
-                          </a:solidFill>
-                          <a:latin typeface="Arial"/>
-                        </a:defRPr>
-                      </a:pPr>
-                      <a:r>
-                        <a:t>general</a:t>
-                      </a:r>
-                    </a:p>
-                  </a:txBody>
-                  <a:tcPr marL="82296" marR="82296" marT="64008" marB="64008">
-                    <a:solidFill>
-                      <a:srgbClr val="F1F7F7"/>
-                    </a:solidFill>
-                  </a:tcPr>
-                </a:tc>
-              </a:tr>
-            </a:tbl>
-          </a:graphicData>
-        </a:graphic>
-      </p:graphicFrame>
-      <p:graphicFrame>
-        <p:nvGraphicFramePr>
-          <p:cNvPr id="14" name="Table 13"/>
-          <p:cNvGraphicFramePr>
-            <a:graphicFrameLocks noGrp="1"/>
-          </p:cNvGraphicFramePr>
-          <p:nvPr/>
-        </p:nvGraphicFramePr>
-        <p:xfrm>
-          <a:off x="365760" y="4147312"/>
-          <a:ext cx="8412479" cy="349504"/>
-        </p:xfrm>
-        <a:graphic>
-          <a:graphicData uri="http://schemas.openxmlformats.org/drawingml/2006/table">
-            <a:tbl>
-              <a:tblPr firstRow="1" bandRow="1">
-                <a:tableStyleId>{5C22544A-7EE6-4342-B048-85BDC9FD1C3A}</a:tableStyleId>
-              </a:tblPr>
-              <a:tblGrid>
-                <a:gridCol w="2271369"/>
-                <a:gridCol w="6141110"/>
-              </a:tblGrid>
-              <a:tr h="349504">
-                <a:tc>
-                  <a:txBody>
-                    <a:bodyPr wrap="none"/>
-                    <a:lstStyle/>
-                    <a:p>
-                      <a:pPr>
-                        <a:lnSpc>
-                          <a:spcPts val="1600"/>
-                        </a:lnSpc>
-                        <a:spcAft>
-                          <a:spcPts val="0"/>
-                        </a:spcAft>
-                        <a:defRPr sz="1200" b="0">
-                          <a:solidFill>
-                            <a:srgbClr val="21243A"/>
-                          </a:solidFill>
-                          <a:latin typeface="Arial"/>
-                        </a:defRPr>
-                      </a:pPr>
-                      <a:r>
-                        <a:t>Original SHA-256</a:t>
-                      </a:r>
-                    </a:p>
-                  </a:txBody>
-                  <a:tcPr marL="82296" marR="82296" marT="64008" marB="64008">
-                    <a:solidFill>
-                      <a:srgbClr val="FFFFFF"/>
-                    </a:solidFill>
-                  </a:tcPr>
-                </a:tc>
-                <a:tc>
-                  <a:txBody>
-                    <a:bodyPr wrap="none"/>
-                    <a:lstStyle/>
-                    <a:p>
-                      <a:pPr>
-                        <a:lnSpc>
-                          <a:spcPts val="1600"/>
-                        </a:lnSpc>
-                        <a:spcAft>
-                          <a:spcPts val="0"/>
-                        </a:spcAft>
-                        <a:defRPr sz="1200" b="0">
-                          <a:solidFill>
-                            <a:srgbClr val="21243A"/>
-                          </a:solidFill>
-                          <a:latin typeface="Arial"/>
-                        </a:defRPr>
-                      </a:pPr>
-                      <a:r>
-                        <a:t>02915f051b6eb2c9ef0c21f5bb20c4229ca21324bf20172f3867c32c299a5924</a:t>
-                      </a:r>
-                    </a:p>
-                  </a:txBody>
-                  <a:tcPr marL="82296" marR="82296" marT="64008" marB="64008">
-                    <a:solidFill>
-                      <a:srgbClr val="FFFFFF"/>
-                    </a:solidFill>
-                  </a:tcPr>
-                </a:tc>
-              </a:tr>
-            </a:tbl>
-          </a:graphicData>
-        </a:graphic>
-      </p:graphicFrame>
-      <p:graphicFrame>
-        <p:nvGraphicFramePr>
-          <p:cNvPr id="15" name="Table 14"/>
-          <p:cNvGraphicFramePr>
-            <a:graphicFrameLocks noGrp="1"/>
-          </p:cNvGraphicFramePr>
-          <p:nvPr/>
-        </p:nvGraphicFramePr>
-        <p:xfrm>
-          <a:off x="365760" y="4496816"/>
-          <a:ext cx="8412479" cy="552704"/>
-        </p:xfrm>
-        <a:graphic>
-          <a:graphicData uri="http://schemas.openxmlformats.org/drawingml/2006/table">
-            <a:tbl>
-              <a:tblPr firstRow="1" bandRow="1">
-                <a:tableStyleId>{5C22544A-7EE6-4342-B048-85BDC9FD1C3A}</a:tableStyleId>
-              </a:tblPr>
-              <a:tblGrid>
-                <a:gridCol w="2271369"/>
-                <a:gridCol w="6141110"/>
-              </a:tblGrid>
-              <a:tr h="552704">
-                <a:tc>
-                  <a:txBody>
-                    <a:bodyPr wrap="none"/>
-                    <a:lstStyle/>
-                    <a:p>
-                      <a:pPr>
-                        <a:lnSpc>
-                          <a:spcPts val="1600"/>
-                        </a:lnSpc>
-                        <a:spcAft>
-                          <a:spcPts val="0"/>
-                        </a:spcAft>
-                        <a:defRPr sz="1200" b="0">
-                          <a:solidFill>
-                            <a:srgbClr val="21243A"/>
-                          </a:solidFill>
-                          <a:latin typeface="Arial"/>
-                        </a:defRPr>
-                      </a:pPr>
-                      <a:r>
-                        <a:t>Ingestion note 1</a:t>
-                      </a:r>
-                    </a:p>
-                  </a:txBody>
-                  <a:tcPr marL="82296" marR="82296" marT="64008" marB="64008">
-                    <a:solidFill>
-                      <a:srgbClr val="F1F7F7"/>
-                    </a:solidFill>
-                  </a:tcPr>
-                </a:tc>
-                <a:tc>
-                  <a:txBody>
-                    <a:bodyPr wrap="none"/>
-                    <a:lstStyle/>
-                    <a:p>
-                      <a:pPr>
-                        <a:lnSpc>
-                          <a:spcPts val="1600"/>
-                        </a:lnSpc>
-                        <a:spcAft>
-                          <a:spcPts val="0"/>
-                        </a:spcAft>
-                        <a:defRPr sz="1200" b="0">
-                          <a:solidFill>
-                            <a:srgbClr val="21243A"/>
-                          </a:solidFill>
-                          <a:latin typeface="Arial"/>
-                        </a:defRPr>
-                      </a:pPr>
-                      <a:r>
-                        <a:t>PDF preparation: pdf-input-2026-09-26.1 (pypdf text/figures; PDFium page</a:t>
-                      </a:r>
-                    </a:p>
-                    <a:p>
-                      <a:pPr>
-                        <a:lnSpc>
-                          <a:spcPts val="1600"/>
-                        </a:lnSpc>
-                        <a:spcAft>
-                          <a:spcPts val="0"/>
-                        </a:spcAft>
-                        <a:defRPr sz="1200" b="0">
-                          <a:solidFill>
-                            <a:srgbClr val="21243A"/>
-                          </a:solidFill>
-                          <a:latin typeface="Arial"/>
-                        </a:defRPr>
-                      </a:pPr>
-                      <a:r>
-                        <a:t>rendering).</a:t>
-                      </a:r>
-                    </a:p>
-                  </a:txBody>
-                  <a:tcPr marL="82296" marR="82296" marT="64008" marB="64008">
-                    <a:solidFill>
-                      <a:srgbClr val="F1F7F7"/>
-                    </a:solidFill>
-                  </a:tcPr>
-                </a:tc>
-              </a:tr>
-            </a:tbl>
-          </a:graphicData>
-        </a:graphic>
-      </p:graphicFrame>
-      <p:graphicFrame>
-        <p:nvGraphicFramePr>
-          <p:cNvPr id="16" name="Table 15"/>
-          <p:cNvGraphicFramePr>
-            <a:graphicFrameLocks noGrp="1"/>
-          </p:cNvGraphicFramePr>
-          <p:nvPr/>
-        </p:nvGraphicFramePr>
-        <p:xfrm>
-          <a:off x="365760" y="5049520"/>
-          <a:ext cx="8412479" cy="349504"/>
-        </p:xfrm>
-        <a:graphic>
-          <a:graphicData uri="http://schemas.openxmlformats.org/drawingml/2006/table">
-            <a:tbl>
-              <a:tblPr firstRow="1" bandRow="1">
-                <a:tableStyleId>{5C22544A-7EE6-4342-B048-85BDC9FD1C3A}</a:tableStyleId>
-              </a:tblPr>
-              <a:tblGrid>
-                <a:gridCol w="2271369"/>
-                <a:gridCol w="6141110"/>
-              </a:tblGrid>
-              <a:tr h="349504">
-                <a:tc>
-                  <a:txBody>
-                    <a:bodyPr wrap="none"/>
-                    <a:lstStyle/>
-                    <a:p>
-                      <a:pPr>
-                        <a:lnSpc>
-                          <a:spcPts val="1600"/>
-                        </a:lnSpc>
-                        <a:spcAft>
-                          <a:spcPts val="0"/>
-                        </a:spcAft>
-                        <a:defRPr sz="1200" b="0">
-                          <a:solidFill>
-                            <a:srgbClr val="21243A"/>
-                          </a:solidFill>
-                          <a:latin typeface="Arial"/>
-                        </a:defRPr>
-                      </a:pPr>
-                      <a:r>
-                        <a:t>Ingestion note 2</a:t>
-                      </a:r>
-                    </a:p>
-                  </a:txBody>
-                  <a:tcPr marL="82296" marR="82296" marT="64008" marB="64008">
-                    <a:solidFill>
-                      <a:srgbClr val="FFFFFF"/>
-                    </a:solidFill>
-                  </a:tcPr>
-                </a:tc>
-                <a:tc>
-                  <a:txBody>
-                    <a:bodyPr wrap="none"/>
-                    <a:lstStyle/>
-                    <a:p>
-                      <a:pPr>
-                        <a:lnSpc>
-                          <a:spcPts val="1600"/>
-                        </a:lnSpc>
-                        <a:spcAft>
-                          <a:spcPts val="0"/>
-                        </a:spcAft>
-                        <a:defRPr sz="1200" b="0">
-                          <a:solidFill>
-                            <a:srgbClr val="21243A"/>
-                          </a:solidFill>
-                          <a:latin typeface="Arial"/>
-                        </a:defRPr>
-                      </a:pPr>
-                      <a:r>
-                        <a:t>Extracted 4 embedded figure(s) of 15 found (figure mode).</a:t>
-                      </a:r>
-                    </a:p>
-                  </a:txBody>
-                  <a:tcPr marL="82296" marR="82296" marT="64008" marB="64008">
-                    <a:solidFill>
-                      <a:srgbClr val="FFFFFF"/>
-                    </a:solidFill>
-                  </a:tcPr>
-                </a:tc>
-              </a:tr>
-            </a:tbl>
-          </a:graphicData>
-        </a:graphic>
-      </p:graphicFrame>
-      <p:graphicFrame>
-        <p:nvGraphicFramePr>
-          <p:cNvPr id="17" name="Table 16"/>
-          <p:cNvGraphicFramePr>
-            <a:graphicFrameLocks noGrp="1"/>
-          </p:cNvGraphicFramePr>
-          <p:nvPr/>
-        </p:nvGraphicFramePr>
-        <p:xfrm>
-          <a:off x="365760" y="5399024"/>
-          <a:ext cx="8412479" cy="349504"/>
-        </p:xfrm>
-        <a:graphic>
-          <a:graphicData uri="http://schemas.openxmlformats.org/drawingml/2006/table">
-            <a:tbl>
-              <a:tblPr firstRow="1" bandRow="1">
-                <a:tableStyleId>{5C22544A-7EE6-4342-B048-85BDC9FD1C3A}</a:tableStyleId>
-              </a:tblPr>
-              <a:tblGrid>
-                <a:gridCol w="2271369"/>
-                <a:gridCol w="6141110"/>
-              </a:tblGrid>
-              <a:tr h="349504">
-                <a:tc>
-                  <a:txBody>
-                    <a:bodyPr wrap="none"/>
-                    <a:lstStyle/>
-                    <a:p>
-                      <a:pPr>
-                        <a:lnSpc>
-                          <a:spcPts val="1600"/>
-                        </a:lnSpc>
-                        <a:spcAft>
-                          <a:spcPts val="0"/>
-                        </a:spcAft>
-                        <a:defRPr sz="1200" b="0">
-                          <a:solidFill>
-                            <a:srgbClr val="21243A"/>
-                          </a:solidFill>
-                          <a:latin typeface="Arial"/>
-                        </a:defRPr>
-                      </a:pPr>
-                      <a:r>
-                        <a:t>Ingestion note 3</a:t>
-                      </a:r>
-                    </a:p>
-                  </a:txBody>
-                  <a:tcPr marL="82296" marR="82296" marT="64008" marB="64008">
-                    <a:solidFill>
-                      <a:srgbClr val="F1F7F7"/>
-                    </a:solidFill>
-                  </a:tcPr>
-                </a:tc>
-                <a:tc>
-                  <a:txBody>
-                    <a:bodyPr wrap="none"/>
-                    <a:lstStyle/>
-                    <a:p>
-                      <a:pPr>
-                        <a:lnSpc>
-                          <a:spcPts val="1600"/>
-                        </a:lnSpc>
-                        <a:spcAft>
-                          <a:spcPts val="0"/>
-                        </a:spcAft>
-                        <a:defRPr sz="1200" b="0">
-                          <a:solidFill>
-                            <a:srgbClr val="21243A"/>
-                          </a:solidFill>
-                          <a:latin typeface="Arial"/>
-                        </a:defRPr>
-                      </a:pPr>
-                      <a:r>
-                        <a:t>No selectable text layer - vision models read the page/figure images.</a:t>
-                      </a:r>
-                    </a:p>
-                  </a:txBody>
-                  <a:tcPr marL="82296" marR="82296" marT="64008" marB="64008">
-                    <a:solidFill>
-                      <a:srgbClr val="F1F7F7"/>
-                    </a:solidFill>
-                  </a:tcPr>
-                </a:tc>
-              </a:tr>
-            </a:tbl>
-          </a:graphicData>
-        </a:graphic>
-      </p:graphicFrame>
-    </p:spTree>
-  </p:cSld>
-  <p:clrMapOvr>
-    <a:masterClrMapping/>
-  </p:clrMapOvr>
-</p:sld>
-</file>
-
-<file path=ppt/slides/slide22.xml><?xml version="1.0" encoding="utf-8"?>
-<p:sld xmlns:a="http://schemas.openxmlformats.org/drawingml/2006/main" xmlns:p="http://schemas.openxmlformats.org/presentationml/2006/main" xmlns:r="http://schemas.openxmlformats.org/officeDocument/2006/relationships">
-  <p:cSld>
-    <p:spTree>
-      <p:nvGrpSpPr>
-        <p:cNvPr id="1" name=""/>
-        <p:cNvGrpSpPr/>
-        <p:nvPr/>
-      </p:nvGrpSpPr>
-      <p:grpSpPr/>
-      <p:sp>
-        <p:nvSpPr>
-          <p:cNvPr id="2" name="TextBox 1"/>
-          <p:cNvSpPr txBox="1"/>
-          <p:nvPr/>
-        </p:nvSpPr>
-        <p:spPr>
-          <a:xfrm>
-            <a:off x="365760" y="219456"/>
-            <a:ext cx="8412480" cy="228600"/>
-          </a:xfrm>
-          <a:prstGeom prst="rect">
-            <a:avLst/>
-          </a:prstGeom>
-          <a:noFill/>
-        </p:spPr>
-        <p:txBody>
-          <a:bodyPr wrap="square" lIns="0" rIns="0" tIns="0" bIns="0">
-            <a:spAutoFit/>
-          </a:bodyPr>
-          <a:lstStyle/>
-          <a:p>
-            <a:pPr>
-              <a:lnSpc>
-                <a:spcPct val="115000"/>
-              </a:lnSpc>
-              <a:spcAft>
-                <a:spcPts val="0"/>
-              </a:spcAft>
-              <a:defRPr sz="1100" b="1">
-                <a:solidFill>
-                  <a:srgbClr val="C5006A"/>
-                </a:solidFill>
-                <a:latin typeface="Arial"/>
-              </a:defRPr>
-            </a:pPr>
-            <a:r>
-              <a:t>SDA VISION / RESEARCH REPORT</a:t>
-            </a:r>
-          </a:p>
-        </p:txBody>
-      </p:sp>
-      <p:sp>
-        <p:nvSpPr>
-          <p:cNvPr id="3" name="TextBox 2"/>
-          <p:cNvSpPr txBox="1"/>
-          <p:nvPr/>
-        </p:nvSpPr>
-        <p:spPr>
-          <a:xfrm>
-            <a:off x="365760" y="658368"/>
-            <a:ext cx="8412480" cy="612648"/>
-          </a:xfrm>
-          <a:prstGeom prst="rect">
-            <a:avLst/>
-          </a:prstGeom>
-          <a:noFill/>
-        </p:spPr>
-        <p:txBody>
-          <a:bodyPr wrap="square" lIns="0" rIns="0" tIns="0" bIns="0">
-            <a:spAutoFit/>
-          </a:bodyPr>
-          <a:lstStyle/>
-          <a:p>
-            <a:pPr>
-              <a:lnSpc>
-                <a:spcPct val="115000"/>
-              </a:lnSpc>
-              <a:spcAft>
-                <a:spcPts val="0"/>
-              </a:spcAft>
-              <a:defRPr sz="2200" b="1">
-                <a:solidFill>
-                  <a:srgbClr val="21243A"/>
-                </a:solidFill>
-                <a:latin typeface="Arial"/>
-              </a:defRPr>
-            </a:pPr>
-            <a:r>
-              <a:t>File and analysis record (continued)</a:t>
-            </a:r>
-          </a:p>
-        </p:txBody>
-      </p:sp>
-      <p:sp>
-        <p:nvSpPr>
-          <p:cNvPr id="4" name="TextBox 3"/>
-          <p:cNvSpPr txBox="1"/>
-          <p:nvPr/>
-        </p:nvSpPr>
-        <p:spPr>
-          <a:xfrm>
-            <a:off x="365760" y="6291072"/>
-            <a:ext cx="8001000" cy="365760"/>
-          </a:xfrm>
-          <a:prstGeom prst="rect">
-            <a:avLst/>
-          </a:prstGeom>
-          <a:noFill/>
-        </p:spPr>
-        <p:txBody>
-          <a:bodyPr wrap="square" lIns="0" rIns="0" tIns="0" bIns="0">
-            <a:spAutoFit/>
-          </a:bodyPr>
-          <a:lstStyle/>
-          <a:p>
-            <a:pPr>
-              <a:lnSpc>
-                <a:spcPct val="115000"/>
-              </a:lnSpc>
-              <a:spcAft>
-                <a:spcPts val="0"/>
-              </a:spcAft>
-              <a:defRPr sz="800" b="0">
-                <a:solidFill>
-                  <a:srgbClr val="545B6D"/>
-                </a:solidFill>
-                <a:latin typeface="Arial"/>
-              </a:defRPr>
-            </a:pPr>
-            <a:r>
-              <a:t>Research assessment. Ratings are not calibrated probabilities.</a:t>
-            </a:r>
-          </a:p>
-        </p:txBody>
-      </p:sp>
-      <p:sp>
-        <p:nvSpPr>
-          <p:cNvPr id="5" name="TextBox 4"/>
-          <p:cNvSpPr txBox="1"/>
-          <p:nvPr/>
-        </p:nvSpPr>
-        <p:spPr>
-          <a:xfrm>
-            <a:off x="8394192" y="6318504"/>
-            <a:ext cx="365760" cy="228600"/>
-          </a:xfrm>
-          <a:prstGeom prst="rect">
-            <a:avLst/>
-          </a:prstGeom>
-          <a:noFill/>
-        </p:spPr>
-        <p:txBody>
-          <a:bodyPr wrap="square" lIns="0" rIns="0" tIns="0" bIns="0">
-            <a:spAutoFit/>
-          </a:bodyPr>
-          <a:lstStyle/>
-          <a:p>
-            <a:pPr>
-              <a:lnSpc>
-                <a:spcPct val="115000"/>
-              </a:lnSpc>
-              <a:spcAft>
-                <a:spcPts val="0"/>
-              </a:spcAft>
-              <a:defRPr sz="900" b="0">
-                <a:solidFill>
-                  <a:srgbClr val="545B6D"/>
-                </a:solidFill>
-                <a:latin typeface="Arial"/>
-              </a:defRPr>
-            </a:pPr>
-            <a:r>
-              <a:t>22</a:t>
             </a:r>
           </a:p>
         </p:txBody>
